--- a/presentations/ifoa/hwle_ifoa_life_2026.pptx
+++ b/presentations/ifoa/hwle_ifoa_life_2026.pptx
@@ -1016,13 +1016,13 @@
             <a:spLocks noGrp="1"/>
           </p:cNvSpPr>
           <p:nvPr>
-            <p:ph type="title" hasCustomPrompt="1"/>
-          </p:nvPr>
-        </p:nvSpPr>
-        <p:spPr>
-          <a:xfrm>
-            <a:off x="4186804" y="3896206"/>
-            <a:ext cx="7882392" cy="1836584"/>
+            <p:ph type="ctrTitle" hasCustomPrompt="1"/>
+          </p:nvPr>
+        </p:nvSpPr>
+        <p:spPr>
+          <a:xfrm>
+            <a:off x="2500000" y="3200000"/>
+            <a:ext cx="11256000" cy="2000000"/>
           </a:xfrm>
           <a:prstGeom prst="rect">
             <a:avLst/>
@@ -1037,7 +1037,7 @@
               <a:lnSpc>
                 <a:spcPct val="90000"/>
               </a:lnSpc>
-              <a:defRPr sz="7000" b="1" i="0">
+              <a:defRPr sz="4000" b="1" i="0">
                 <a:solidFill>
                   <a:schemeClr val="bg1"/>
                 </a:solidFill>
@@ -1059,6 +1059,57 @@
               <a:t>Conference 2026</a:t>
             </a:r>
             <a:endParaRPr lang="en-GB" dirty="0"/>
+          </a:p>
+        </p:txBody>
+      </p:sp>
+      <p:sp>
+        <p:nvSpPr>
+          <p:cNvPr id="70" name="Subtitle 2">
+            <a:extLst>
+              <a:ext uri="{FF2B5EF4-FFF2-40B4-BE49-F238E27FC236}">
+                <a16:creationId xmlns:a16="http://schemas.microsoft.com/office/drawing/2014/main" id="{6AA7276D-7192-0B34-473D-EA39E90AE911}"/>
+              </a:ext>
+            </a:extLst>
+          </p:cNvPr>
+          <p:cNvSpPr>
+            <a:spLocks noGrp="1"/>
+          </p:cNvSpPr>
+          <p:nvPr>
+            <p:ph type="subTitle" idx="1"/>
+          </p:nvPr>
+        </p:nvSpPr>
+        <p:spPr>
+          <a:xfrm>
+            <a:off x="2500000" y="5300000"/>
+            <a:ext cx="11256000" cy="2400000"/>
+          </a:xfrm>
+          <a:prstGeom prst="rect">
+            <a:avLst/>
+          </a:prstGeom>
+        </p:spPr>
+        <p:txBody>
+          <a:bodyPr vert="horz" lIns="91440" tIns="45720" rIns="91440" bIns="45720" rtlCol="0" anchor="t">
+            <a:noAutofit/>
+          </a:bodyPr>
+          <a:lstStyle>
+            <a:lvl1pPr algn="ctr">
+              <a:lnSpc>
+                <a:spcPct val="90000"/>
+              </a:lnSpc>
+              <a:defRPr sz="1800" b="0" i="0">
+                <a:solidFill>
+                  <a:schemeClr val="bg1"/>
+                </a:solidFill>
+                <a:latin typeface="Arial" panose="020B0604020202020204" pitchFamily="34" charset="0"/>
+                <a:cs typeface="Arial" panose="020B0604020202020204" pitchFamily="34" charset="0"/>
+              </a:defRPr>
+            </a:lvl1pPr>
+          </a:lstStyle>
+          <a:p>
+            <a:r>
+              <a:rPr lang="en-GB"/>
+              <a:t>Subtitle</a:t>
+            </a:r>
           </a:p>
         </p:txBody>
       </p:sp>
@@ -7612,6 +7663,46 @@
           </a:fontRef>
         </p:style>
       </p:cxnSp>
+      <p:sp>
+        <p:nvSpPr>
+          <p:cNvPr id="914" name="Title 1">
+            <a:extLst>
+              <a:ext uri="{FF2B5EF4-FFF2-40B4-BE49-F238E27FC236}">
+                <a16:creationId xmlns:a16="http://schemas.microsoft.com/office/drawing/2014/main" id="{EF499182-B1CD-4399-99FD-7B1CA914FD59}"/>
+              </a:ext>
+            </a:extLst>
+          </p:cNvPr>
+          <p:cNvSpPr>
+            <a:spLocks noGrp="1"/>
+          </p:cNvSpPr>
+          <p:nvPr>
+            <p:ph type="title" hasCustomPrompt="1"/>
+          </p:nvPr>
+        </p:nvSpPr>
+        <p:spPr>
+          <a:xfrm>
+            <a:off x="1500000" y="3400000"/>
+            <a:ext cx="13256000" cy="2200000"/>
+          </a:xfrm>
+        </p:spPr>
+        <p:txBody>
+          <a:bodyPr>
+            <a:normAutofit/>
+          </a:bodyPr>
+          <a:lstStyle>
+            <a:lvl1pPr>
+              <a:defRPr sz="4400" cap="none" baseline="0"/>
+            </a:lvl1pPr>
+          </a:lstStyle>
+          <a:p>
+            <a:r>
+              <a:rPr lang="en-US" dirty="0"/>
+              <a:t>Title</a:t>
+            </a:r>
+            <a:endParaRPr lang="en-GB" dirty="0"/>
+          </a:p>
+        </p:txBody>
+      </p:sp>
     </p:spTree>
     <p:extLst>
       <p:ext uri="{BB962C8B-B14F-4D97-AF65-F5344CB8AC3E}">
@@ -11248,8 +11339,100 @@
           <a:chExt cx="0" cy="0"/>
         </a:xfrm>
       </p:grpSpPr>
-      <p:sp/>
-      <p:sp/>
+      <p:sp>
+        <p:nvSpPr>
+          <p:cNvPr id="7" name="Title Placeholder 1">
+            <a:extLst>
+              <a:ext uri="{FF2B5EF4-FFF2-40B4-BE49-F238E27FC236}">
+                <a16:creationId xmlns:a16="http://schemas.microsoft.com/office/drawing/2014/main" id="{6AA7276D-7192-0B34-473D-EA39E90AE910}"/>
+              </a:ext>
+            </a:extLst>
+          </p:cNvPr>
+          <p:cNvSpPr>
+            <a:spLocks noGrp="1"/>
+          </p:cNvSpPr>
+          <p:nvPr>
+            <p:ph hasCustomPrompt="1" type="ctrTitle"/>
+          </p:nvPr>
+        </p:nvSpPr>
+        <p:spPr>
+          <a:xfrm>
+            <a:off x="2500000" y="3200000"/>
+            <a:ext cx="11256000" cy="2000000"/>
+          </a:xfrm>
+          <a:prstGeom prst="rect">
+            <a:avLst/>
+          </a:prstGeom>
+        </p:spPr>
+        <p:txBody>
+          <a:bodyPr/>
+          <a:lstStyle/>
+          <a:p>
+            <a:pPr lvl="0" indent="0" marL="0">
+              <a:buNone/>
+            </a:pPr>
+            <a:r>
+              <a:rPr/>
+              <a:t>Healthy Working Life Expectancy</a:t>
+            </a:r>
+          </a:p>
+        </p:txBody>
+      </p:sp>
+      <p:sp>
+        <p:nvSpPr>
+          <p:cNvPr id="70" name="Subtitle 2">
+            <a:extLst>
+              <a:ext uri="{FF2B5EF4-FFF2-40B4-BE49-F238E27FC236}">
+                <a16:creationId xmlns:a16="http://schemas.microsoft.com/office/drawing/2014/main" id="{6AA7276D-7192-0B34-473D-EA39E90AE911}"/>
+              </a:ext>
+            </a:extLst>
+          </p:cNvPr>
+          <p:cNvSpPr>
+            <a:spLocks noGrp="1"/>
+          </p:cNvSpPr>
+          <p:nvPr>
+            <p:ph idx="1" type="subTitle"/>
+          </p:nvPr>
+        </p:nvSpPr>
+        <p:spPr>
+          <a:xfrm>
+            <a:off x="2500000" y="5300000"/>
+            <a:ext cx="11256000" cy="2400000"/>
+          </a:xfrm>
+          <a:prstGeom prst="rect">
+            <a:avLst/>
+          </a:prstGeom>
+        </p:spPr>
+        <p:txBody>
+          <a:bodyPr/>
+          <a:lstStyle/>
+          <a:p>
+            <a:pPr lvl="0" indent="0" marL="0">
+              <a:buNone/>
+            </a:pPr>
+            <a:r>
+              <a:rPr/>
+              <a:t>From survey data to insurer administrative data</a:t>
+            </a:r>
+            <a:br/>
+            <a:br/>
+            <a:r>
+              <a:rPr/>
+              <a:t>IFoA Healthy Workforce Working Party</a:t>
+            </a:r>
+            <a:br/>
+            <a:r>
+              <a:rPr/>
+              <a:t>Presented by David Beddows, Chris Martin and Jon Minton</a:t>
+            </a:r>
+            <a:br/>
+            <a:r>
+              <a:rPr/>
+              <a:t>on behalf of Z. Woodroffe, D. Bates, S. Batrakova, R. Pal and C. Zhang</a:t>
+            </a:r>
+          </a:p>
+        </p:txBody>
+      </p:sp>
       <p:sp/>
       <p:sp>
         <p:nvSpPr>
@@ -11369,7 +11552,42 @@
           <a:chExt cx="0" cy="0"/>
         </a:xfrm>
       </p:grpSpPr>
-      <p:sp/>
+      <p:sp>
+        <p:nvSpPr>
+          <p:cNvPr id="914" name="Title 1">
+            <a:extLst>
+              <a:ext uri="{FF2B5EF4-FFF2-40B4-BE49-F238E27FC236}">
+                <a16:creationId xmlns:a16="http://schemas.microsoft.com/office/drawing/2014/main" id="{EF499182-B1CD-4399-99FD-7B1CA914FD59}"/>
+              </a:ext>
+            </a:extLst>
+          </p:cNvPr>
+          <p:cNvSpPr>
+            <a:spLocks noGrp="1"/>
+          </p:cNvSpPr>
+          <p:nvPr>
+            <p:ph hasCustomPrompt="1" type="title"/>
+          </p:nvPr>
+        </p:nvSpPr>
+        <p:spPr>
+          <a:xfrm>
+            <a:off x="1500000" y="3400000"/>
+            <a:ext cx="13256000" cy="2200000"/>
+          </a:xfrm>
+        </p:spPr>
+        <p:txBody>
+          <a:bodyPr/>
+          <a:lstStyle/>
+          <a:p>
+            <a:pPr lvl="0" indent="0" marL="0">
+              <a:buNone/>
+            </a:pPr>
+            <a:r>
+              <a:rPr/>
+              <a:t>Why this matters [CHRIS · 10 min]</a:t>
+            </a:r>
+          </a:p>
+        </p:txBody>
+      </p:sp>
       <p:sp>
         <p:nvSpPr>
           <p:cNvPr id="8" name="Footer Placeholder 4">
@@ -12150,7 +12368,42 @@
           <a:chExt cx="0" cy="0"/>
         </a:xfrm>
       </p:grpSpPr>
-      <p:sp/>
+      <p:sp>
+        <p:nvSpPr>
+          <p:cNvPr id="914" name="Title 1">
+            <a:extLst>
+              <a:ext uri="{FF2B5EF4-FFF2-40B4-BE49-F238E27FC236}">
+                <a16:creationId xmlns:a16="http://schemas.microsoft.com/office/drawing/2014/main" id="{EF499182-B1CD-4399-99FD-7B1CA914FD59}"/>
+              </a:ext>
+            </a:extLst>
+          </p:cNvPr>
+          <p:cNvSpPr>
+            <a:spLocks noGrp="1"/>
+          </p:cNvSpPr>
+          <p:nvPr>
+            <p:ph hasCustomPrompt="1" type="title"/>
+          </p:nvPr>
+        </p:nvSpPr>
+        <p:spPr>
+          <a:xfrm>
+            <a:off x="1500000" y="3400000"/>
+            <a:ext cx="13256000" cy="2200000"/>
+          </a:xfrm>
+        </p:spPr>
+        <p:txBody>
+          <a:bodyPr/>
+          <a:lstStyle/>
+          <a:p>
+            <a:pPr lvl="0" indent="0" marL="0">
+              <a:buNone/>
+            </a:pPr>
+            <a:r>
+              <a:rPr/>
+              <a:t>Public health approaches with survey data [JON · 5–10 min]</a:t>
+            </a:r>
+          </a:p>
+        </p:txBody>
+      </p:sp>
       <p:sp>
         <p:nvSpPr>
           <p:cNvPr id="8" name="Footer Placeholder 4">
@@ -13443,7 +13696,42 @@
           <a:chExt cx="0" cy="0"/>
         </a:xfrm>
       </p:grpSpPr>
-      <p:sp/>
+      <p:sp>
+        <p:nvSpPr>
+          <p:cNvPr id="914" name="Title 1">
+            <a:extLst>
+              <a:ext uri="{FF2B5EF4-FFF2-40B4-BE49-F238E27FC236}">
+                <a16:creationId xmlns:a16="http://schemas.microsoft.com/office/drawing/2014/main" id="{EF499182-B1CD-4399-99FD-7B1CA914FD59}"/>
+              </a:ext>
+            </a:extLst>
+          </p:cNvPr>
+          <p:cNvSpPr>
+            <a:spLocks noGrp="1"/>
+          </p:cNvSpPr>
+          <p:nvPr>
+            <p:ph hasCustomPrompt="1" type="title"/>
+          </p:nvPr>
+        </p:nvSpPr>
+        <p:spPr>
+          <a:xfrm>
+            <a:off x="1500000" y="3400000"/>
+            <a:ext cx="13256000" cy="2200000"/>
+          </a:xfrm>
+        </p:spPr>
+        <p:txBody>
+          <a:bodyPr/>
+          <a:lstStyle/>
+          <a:p>
+            <a:pPr lvl="0" indent="0" marL="0">
+              <a:buNone/>
+            </a:pPr>
+            <a:r>
+              <a:rPr/>
+              <a:t>❓ Presentation-wide questions (REMOVE THIS SECTION BEFORE FINALISING)</a:t>
+            </a:r>
+          </a:p>
+        </p:txBody>
+      </p:sp>
       <p:sp>
         <p:nvSpPr>
           <p:cNvPr id="8" name="Footer Placeholder 4">
@@ -13788,7 +14076,42 @@
           <a:chExt cx="0" cy="0"/>
         </a:xfrm>
       </p:grpSpPr>
-      <p:sp/>
+      <p:sp>
+        <p:nvSpPr>
+          <p:cNvPr id="914" name="Title 1">
+            <a:extLst>
+              <a:ext uri="{FF2B5EF4-FFF2-40B4-BE49-F238E27FC236}">
+                <a16:creationId xmlns:a16="http://schemas.microsoft.com/office/drawing/2014/main" id="{EF499182-B1CD-4399-99FD-7B1CA914FD59}"/>
+              </a:ext>
+            </a:extLst>
+          </p:cNvPr>
+          <p:cNvSpPr>
+            <a:spLocks noGrp="1"/>
+          </p:cNvSpPr>
+          <p:nvPr>
+            <p:ph hasCustomPrompt="1" type="title"/>
+          </p:nvPr>
+        </p:nvSpPr>
+        <p:spPr>
+          <a:xfrm>
+            <a:off x="1500000" y="3400000"/>
+            <a:ext cx="13256000" cy="2200000"/>
+          </a:xfrm>
+        </p:spPr>
+        <p:txBody>
+          <a:bodyPr/>
+          <a:lstStyle/>
+          <a:p>
+            <a:pPr lvl="0" indent="0" marL="0">
+              <a:buNone/>
+            </a:pPr>
+            <a:r>
+              <a:rPr/>
+              <a:t>HWLE estimates with CMI rates [DAVID · 10 min]</a:t>
+            </a:r>
+          </a:p>
+        </p:txBody>
+      </p:sp>
       <p:sp>
         <p:nvSpPr>
           <p:cNvPr id="8" name="Footer Placeholder 4">
@@ -17112,7 +17435,42 @@
           <a:chExt cx="0" cy="0"/>
         </a:xfrm>
       </p:grpSpPr>
-      <p:sp/>
+      <p:sp>
+        <p:nvSpPr>
+          <p:cNvPr id="914" name="Title 1">
+            <a:extLst>
+              <a:ext uri="{FF2B5EF4-FFF2-40B4-BE49-F238E27FC236}">
+                <a16:creationId xmlns:a16="http://schemas.microsoft.com/office/drawing/2014/main" id="{EF499182-B1CD-4399-99FD-7B1CA914FD59}"/>
+              </a:ext>
+            </a:extLst>
+          </p:cNvPr>
+          <p:cNvSpPr>
+            <a:spLocks noGrp="1"/>
+          </p:cNvSpPr>
+          <p:nvPr>
+            <p:ph hasCustomPrompt="1" type="title"/>
+          </p:nvPr>
+        </p:nvSpPr>
+        <p:spPr>
+          <a:xfrm>
+            <a:off x="1500000" y="3400000"/>
+            <a:ext cx="13256000" cy="2200000"/>
+          </a:xfrm>
+        </p:spPr>
+        <p:txBody>
+          <a:bodyPr/>
+          <a:lstStyle/>
+          <a:p>
+            <a:pPr lvl="0" indent="0" marL="0">
+              <a:buNone/>
+            </a:pPr>
+            <a:r>
+              <a:rPr/>
+              <a:t>SUPPLEMENT — material held back from the main deck</a:t>
+            </a:r>
+          </a:p>
+        </p:txBody>
+      </p:sp>
       <p:sp>
         <p:nvSpPr>
           <p:cNvPr id="8" name="Footer Placeholder 4">
@@ -17448,7 +17806,42 @@
           <a:chExt cx="0" cy="0"/>
         </a:xfrm>
       </p:grpSpPr>
-      <p:sp/>
+      <p:sp>
+        <p:nvSpPr>
+          <p:cNvPr id="914" name="Title 1">
+            <a:extLst>
+              <a:ext uri="{FF2B5EF4-FFF2-40B4-BE49-F238E27FC236}">
+                <a16:creationId xmlns:a16="http://schemas.microsoft.com/office/drawing/2014/main" id="{EF499182-B1CD-4399-99FD-7B1CA914FD59}"/>
+              </a:ext>
+            </a:extLst>
+          </p:cNvPr>
+          <p:cNvSpPr>
+            <a:spLocks noGrp="1"/>
+          </p:cNvSpPr>
+          <p:nvPr>
+            <p:ph hasCustomPrompt="1" type="title"/>
+          </p:nvPr>
+        </p:nvSpPr>
+        <p:spPr>
+          <a:xfrm>
+            <a:off x="1500000" y="3400000"/>
+            <a:ext cx="13256000" cy="2200000"/>
+          </a:xfrm>
+        </p:spPr>
+        <p:txBody>
+          <a:bodyPr/>
+          <a:lstStyle/>
+          <a:p>
+            <a:pPr lvl="0" indent="0" marL="0">
+              <a:buNone/>
+            </a:pPr>
+            <a:r>
+              <a:rPr/>
+              <a:t>Supplement · Why this matters</a:t>
+            </a:r>
+          </a:p>
+        </p:txBody>
+      </p:sp>
       <p:sp>
         <p:nvSpPr>
           <p:cNvPr id="8" name="Footer Placeholder 4">
@@ -18504,7 +18897,42 @@
           <a:chExt cx="0" cy="0"/>
         </a:xfrm>
       </p:grpSpPr>
-      <p:sp/>
+      <p:sp>
+        <p:nvSpPr>
+          <p:cNvPr id="914" name="Title 1">
+            <a:extLst>
+              <a:ext uri="{FF2B5EF4-FFF2-40B4-BE49-F238E27FC236}">
+                <a16:creationId xmlns:a16="http://schemas.microsoft.com/office/drawing/2014/main" id="{EF499182-B1CD-4399-99FD-7B1CA914FD59}"/>
+              </a:ext>
+            </a:extLst>
+          </p:cNvPr>
+          <p:cNvSpPr>
+            <a:spLocks noGrp="1"/>
+          </p:cNvSpPr>
+          <p:nvPr>
+            <p:ph hasCustomPrompt="1" type="title"/>
+          </p:nvPr>
+        </p:nvSpPr>
+        <p:spPr>
+          <a:xfrm>
+            <a:off x="1500000" y="3400000"/>
+            <a:ext cx="13256000" cy="2200000"/>
+          </a:xfrm>
+        </p:spPr>
+        <p:txBody>
+          <a:bodyPr/>
+          <a:lstStyle/>
+          <a:p>
+            <a:pPr lvl="0" indent="0" marL="0">
+              <a:buNone/>
+            </a:pPr>
+            <a:r>
+              <a:rPr/>
+              <a:t>Supplement · Survey approaches</a:t>
+            </a:r>
+          </a:p>
+        </p:txBody>
+      </p:sp>
       <p:sp>
         <p:nvSpPr>
           <p:cNvPr id="8" name="Footer Placeholder 4">
@@ -19575,7 +20003,42 @@
           <a:chExt cx="0" cy="0"/>
         </a:xfrm>
       </p:grpSpPr>
-      <p:sp/>
+      <p:sp>
+        <p:nvSpPr>
+          <p:cNvPr id="914" name="Title 1">
+            <a:extLst>
+              <a:ext uri="{FF2B5EF4-FFF2-40B4-BE49-F238E27FC236}">
+                <a16:creationId xmlns:a16="http://schemas.microsoft.com/office/drawing/2014/main" id="{EF499182-B1CD-4399-99FD-7B1CA914FD59}"/>
+              </a:ext>
+            </a:extLst>
+          </p:cNvPr>
+          <p:cNvSpPr>
+            <a:spLocks noGrp="1"/>
+          </p:cNvSpPr>
+          <p:nvPr>
+            <p:ph hasCustomPrompt="1" type="title"/>
+          </p:nvPr>
+        </p:nvSpPr>
+        <p:spPr>
+          <a:xfrm>
+            <a:off x="1500000" y="3400000"/>
+            <a:ext cx="13256000" cy="2200000"/>
+          </a:xfrm>
+        </p:spPr>
+        <p:txBody>
+          <a:bodyPr/>
+          <a:lstStyle/>
+          <a:p>
+            <a:pPr lvl="0" indent="0" marL="0">
+              <a:buNone/>
+            </a:pPr>
+            <a:r>
+              <a:rPr/>
+              <a:t>Supplement · CMI rates</a:t>
+            </a:r>
+          </a:p>
+        </p:txBody>
+      </p:sp>
       <p:sp>
         <p:nvSpPr>
           <p:cNvPr id="8" name="Footer Placeholder 4">
@@ -22751,7 +23214,42 @@
           <a:chExt cx="0" cy="0"/>
         </a:xfrm>
       </p:grpSpPr>
-      <p:sp/>
+      <p:sp>
+        <p:nvSpPr>
+          <p:cNvPr id="914" name="Title 1">
+            <a:extLst>
+              <a:ext uri="{FF2B5EF4-FFF2-40B4-BE49-F238E27FC236}">
+                <a16:creationId xmlns:a16="http://schemas.microsoft.com/office/drawing/2014/main" id="{EF499182-B1CD-4399-99FD-7B1CA914FD59}"/>
+              </a:ext>
+            </a:extLst>
+          </p:cNvPr>
+          <p:cNvSpPr>
+            <a:spLocks noGrp="1"/>
+          </p:cNvSpPr>
+          <p:nvPr>
+            <p:ph hasCustomPrompt="1" type="title"/>
+          </p:nvPr>
+        </p:nvSpPr>
+        <p:spPr>
+          <a:xfrm>
+            <a:off x="1500000" y="3400000"/>
+            <a:ext cx="13256000" cy="2200000"/>
+          </a:xfrm>
+        </p:spPr>
+        <p:txBody>
+          <a:bodyPr/>
+          <a:lstStyle/>
+          <a:p>
+            <a:pPr lvl="0" indent="0" marL="0">
+              <a:buNone/>
+            </a:pPr>
+            <a:r>
+              <a:rPr/>
+              <a:t>Supplement · Close</a:t>
+            </a:r>
+          </a:p>
+        </p:txBody>
+      </p:sp>
       <p:sp>
         <p:nvSpPr>
           <p:cNvPr id="8" name="Footer Placeholder 4">
@@ -23166,7 +23664,42 @@
           <a:chExt cx="0" cy="0"/>
         </a:xfrm>
       </p:grpSpPr>
-      <p:sp/>
+      <p:sp>
+        <p:nvSpPr>
+          <p:cNvPr id="914" name="Title 1">
+            <a:extLst>
+              <a:ext uri="{FF2B5EF4-FFF2-40B4-BE49-F238E27FC236}">
+                <a16:creationId xmlns:a16="http://schemas.microsoft.com/office/drawing/2014/main" id="{EF499182-B1CD-4399-99FD-7B1CA914FD59}"/>
+              </a:ext>
+            </a:extLst>
+          </p:cNvPr>
+          <p:cNvSpPr>
+            <a:spLocks noGrp="1"/>
+          </p:cNvSpPr>
+          <p:nvPr>
+            <p:ph hasCustomPrompt="1" type="title"/>
+          </p:nvPr>
+        </p:nvSpPr>
+        <p:spPr>
+          <a:xfrm>
+            <a:off x="1500000" y="3400000"/>
+            <a:ext cx="13256000" cy="2200000"/>
+          </a:xfrm>
+        </p:spPr>
+        <p:txBody>
+          <a:bodyPr/>
+          <a:lstStyle/>
+          <a:p>
+            <a:pPr lvl="0" indent="0" marL="0">
+              <a:buNone/>
+            </a:pPr>
+            <a:r>
+              <a:rPr/>
+              <a:t>MAIN DECK</a:t>
+            </a:r>
+          </a:p>
+        </p:txBody>
+      </p:sp>
       <p:sp>
         <p:nvSpPr>
           <p:cNvPr id="8" name="Footer Placeholder 4">

--- a/presentations/ifoa/hwle_ifoa_life_2026.pptx
+++ b/presentations/ifoa/hwle_ifoa_life_2026.pptx
@@ -11758,9 +11758,17 @@
             <p:ph hasCustomPrompt="1" idx="13" sz="quarter"/>
           </p:nvPr>
         </p:nvSpPr>
+        <p:spPr>
+          <a:xfrm>
+            <a:off x="1104904" y="2269323"/>
+            <a:ext cx="14020800" cy="5659894"/>
+          </a:xfrm>
+        </p:spPr>
         <p:spPr/>
         <p:txBody>
-          <a:bodyPr/>
+          <a:bodyPr wrap="square" rtlCol="0">
+            <a:normAutofit/>
+          </a:bodyPr>
           <a:lstStyle/>
           <a:p>
             <a:pPr lvl="0" indent="0" marL="0">
@@ -11995,9 +12003,17 @@
             <p:ph hasCustomPrompt="1" idx="13" sz="quarter"/>
           </p:nvPr>
         </p:nvSpPr>
+        <p:spPr>
+          <a:xfrm>
+            <a:off x="1104904" y="2269323"/>
+            <a:ext cx="14020800" cy="5659894"/>
+          </a:xfrm>
+        </p:spPr>
         <p:spPr/>
         <p:txBody>
-          <a:bodyPr/>
+          <a:bodyPr wrap="square" rtlCol="0">
+            <a:normAutofit/>
+          </a:bodyPr>
           <a:lstStyle/>
           <a:p>
             <a:pPr lvl="0" indent="0" marL="0">
@@ -12209,9 +12225,17 @@
             <p:ph hasCustomPrompt="1" idx="13" sz="quarter"/>
           </p:nvPr>
         </p:nvSpPr>
+        <p:spPr>
+          <a:xfrm>
+            <a:off x="1104904" y="2269323"/>
+            <a:ext cx="14020800" cy="5659894"/>
+          </a:xfrm>
+        </p:spPr>
         <p:spPr/>
         <p:txBody>
-          <a:bodyPr/>
+          <a:bodyPr wrap="square" rtlCol="0">
+            <a:normAutofit/>
+          </a:bodyPr>
           <a:lstStyle/>
           <a:p>
             <a:pPr lvl="0"/>
@@ -12574,9 +12598,17 @@
             <p:ph hasCustomPrompt="1" idx="13" sz="quarter"/>
           </p:nvPr>
         </p:nvSpPr>
+        <p:spPr>
+          <a:xfrm>
+            <a:off x="1104904" y="2269323"/>
+            <a:ext cx="14020800" cy="5659894"/>
+          </a:xfrm>
+        </p:spPr>
         <p:spPr/>
         <p:txBody>
-          <a:bodyPr/>
+          <a:bodyPr wrap="square" rtlCol="0">
+            <a:normAutofit/>
+          </a:bodyPr>
           <a:lstStyle/>
           <a:p>
             <a:pPr lvl="0"/>
@@ -13059,9 +13091,17 @@
             <p:ph hasCustomPrompt="1" idx="13" sz="quarter"/>
           </p:nvPr>
         </p:nvSpPr>
+        <p:spPr>
+          <a:xfrm>
+            <a:off x="1104904" y="2269323"/>
+            <a:ext cx="14020800" cy="5659894"/>
+          </a:xfrm>
+        </p:spPr>
         <p:spPr/>
         <p:txBody>
-          <a:bodyPr/>
+          <a:bodyPr wrap="square" rtlCol="0">
+            <a:normAutofit/>
+          </a:bodyPr>
           <a:lstStyle/>
           <a:p>
             <a:pPr lvl="0"/>
@@ -13303,9 +13343,17 @@
             <p:ph hasCustomPrompt="1" idx="13" sz="quarter"/>
           </p:nvPr>
         </p:nvSpPr>
+        <p:spPr>
+          <a:xfrm>
+            <a:off x="1104904" y="2269323"/>
+            <a:ext cx="6896104" cy="5459310"/>
+          </a:xfrm>
+        </p:spPr>
         <p:spPr/>
         <p:txBody>
-          <a:bodyPr/>
+          <a:bodyPr wrap="square" rtlCol="0">
+            <a:normAutofit/>
+          </a:bodyPr>
           <a:lstStyle/>
           <a:p>
             <a:pPr lvl="0" indent="0" marL="0">
@@ -13378,9 +13426,17 @@
             <p:ph hasCustomPrompt="1" idx="25" sz="quarter"/>
           </p:nvPr>
         </p:nvSpPr>
+        <p:spPr>
+          <a:xfrm>
+            <a:off x="8229600" y="2269322"/>
+            <a:ext cx="6896104" cy="5459309"/>
+          </a:xfrm>
+        </p:spPr>
         <p:spPr/>
         <p:txBody>
-          <a:bodyPr/>
+          <a:bodyPr wrap="square" rtlCol="0">
+            <a:normAutofit/>
+          </a:bodyPr>
           <a:lstStyle/>
           <a:p>
             <a:pPr lvl="0" indent="0" marL="0">
@@ -13555,9 +13611,17 @@
             <p:ph hasCustomPrompt="1" idx="13" sz="quarter"/>
           </p:nvPr>
         </p:nvSpPr>
+        <p:spPr>
+          <a:xfrm>
+            <a:off x="1104904" y="2269323"/>
+            <a:ext cx="14020800" cy="5659894"/>
+          </a:xfrm>
+        </p:spPr>
         <p:spPr/>
         <p:txBody>
-          <a:bodyPr/>
+          <a:bodyPr wrap="square" rtlCol="0">
+            <a:normAutofit/>
+          </a:bodyPr>
           <a:lstStyle/>
           <a:p>
             <a:pPr lvl="0" indent="0" marL="0">
@@ -13902,9 +13966,17 @@
             <p:ph hasCustomPrompt="1" idx="13" sz="quarter"/>
           </p:nvPr>
         </p:nvSpPr>
+        <p:spPr>
+          <a:xfrm>
+            <a:off x="1104904" y="2269323"/>
+            <a:ext cx="14020800" cy="5659894"/>
+          </a:xfrm>
+        </p:spPr>
         <p:spPr/>
         <p:txBody>
-          <a:bodyPr/>
+          <a:bodyPr wrap="square" rtlCol="0">
+            <a:normAutofit/>
+          </a:bodyPr>
           <a:lstStyle/>
           <a:p>
             <a:pPr lvl="0"/>
@@ -14344,9 +14416,17 @@
             <p:ph hasCustomPrompt="1" idx="25" sz="quarter"/>
           </p:nvPr>
         </p:nvSpPr>
+        <p:spPr>
+          <a:xfrm>
+            <a:off x="8229600" y="2269322"/>
+            <a:ext cx="6896104" cy="5459309"/>
+          </a:xfrm>
+        </p:spPr>
         <p:spPr/>
         <p:txBody>
-          <a:bodyPr/>
+          <a:bodyPr wrap="square" rtlCol="0">
+            <a:normAutofit/>
+          </a:bodyPr>
           <a:lstStyle/>
           <a:p>
             <a:pPr lvl="0"/>
@@ -14579,9 +14659,17 @@
             <p:ph hasCustomPrompt="1" idx="24" sz="quarter" type="body"/>
           </p:nvPr>
         </p:nvSpPr>
+        <p:spPr>
+          <a:xfrm>
+            <a:off x="1117601" y="1214783"/>
+            <a:ext cx="7835897" cy="653900"/>
+          </a:xfrm>
+        </p:spPr>
         <p:spPr/>
         <p:txBody>
-          <a:bodyPr/>
+          <a:bodyPr wrap="square" rtlCol="0">
+            <a:normAutofit/>
+          </a:bodyPr>
           <a:lstStyle/>
           <a:p>
             <a:pPr lvl="0" indent="0" marL="0">
@@ -14926,9 +15014,17 @@
             <p:ph hasCustomPrompt="1" idx="13" sz="quarter"/>
           </p:nvPr>
         </p:nvSpPr>
+        <p:spPr>
+          <a:xfrm>
+            <a:off x="1104904" y="2269323"/>
+            <a:ext cx="14020800" cy="5659894"/>
+          </a:xfrm>
+        </p:spPr>
         <p:spPr/>
         <p:txBody>
-          <a:bodyPr/>
+          <a:bodyPr wrap="square" rtlCol="0">
+            <a:normAutofit/>
+          </a:bodyPr>
           <a:lstStyle/>
           <a:p>
             <a:pPr lvl="0"/>
@@ -15825,9 +15921,17 @@
             <p:ph hasCustomPrompt="1" idx="13" sz="quarter"/>
           </p:nvPr>
         </p:nvSpPr>
+        <p:spPr>
+          <a:xfrm>
+            <a:off x="1104904" y="2269323"/>
+            <a:ext cx="14020800" cy="5659894"/>
+          </a:xfrm>
+        </p:spPr>
         <p:spPr/>
         <p:txBody>
-          <a:bodyPr/>
+          <a:bodyPr wrap="square" rtlCol="0">
+            <a:normAutofit/>
+          </a:bodyPr>
           <a:lstStyle/>
           <a:p>
             <a:pPr lvl="0" indent="0" marL="0">
@@ -16026,9 +16130,17 @@
             <p:ph hasCustomPrompt="1" idx="13" sz="quarter"/>
           </p:nvPr>
         </p:nvSpPr>
+        <p:spPr>
+          <a:xfrm>
+            <a:off x="1104904" y="2269323"/>
+            <a:ext cx="14020800" cy="5659894"/>
+          </a:xfrm>
+        </p:spPr>
         <p:spPr/>
         <p:txBody>
-          <a:bodyPr/>
+          <a:bodyPr wrap="square" rtlCol="0">
+            <a:normAutofit/>
+          </a:bodyPr>
           <a:lstStyle/>
           <a:p>
             <a:pPr lvl="0"/>
@@ -16258,9 +16370,17 @@
             <p:ph hasCustomPrompt="1" idx="13" sz="quarter"/>
           </p:nvPr>
         </p:nvSpPr>
+        <p:spPr>
+          <a:xfrm>
+            <a:off x="1104904" y="2269323"/>
+            <a:ext cx="14020800" cy="5659894"/>
+          </a:xfrm>
+        </p:spPr>
         <p:spPr/>
         <p:txBody>
-          <a:bodyPr/>
+          <a:bodyPr wrap="square" rtlCol="0">
+            <a:normAutofit/>
+          </a:bodyPr>
           <a:lstStyle/>
           <a:p>
             <a:pPr lvl="0"/>
@@ -16476,9 +16596,17 @@
             <p:ph hasCustomPrompt="1" idx="13" sz="quarter"/>
           </p:nvPr>
         </p:nvSpPr>
+        <p:spPr>
+          <a:xfrm>
+            <a:off x="1104904" y="2269323"/>
+            <a:ext cx="14020800" cy="5659894"/>
+          </a:xfrm>
+        </p:spPr>
         <p:spPr/>
         <p:txBody>
-          <a:bodyPr/>
+          <a:bodyPr wrap="square" rtlCol="0">
+            <a:normAutofit/>
+          </a:bodyPr>
           <a:lstStyle/>
           <a:p>
             <a:pPr lvl="0"/>
@@ -16702,9 +16830,17 @@
             <p:ph hasCustomPrompt="1" idx="13" sz="quarter"/>
           </p:nvPr>
         </p:nvSpPr>
+        <p:spPr>
+          <a:xfrm>
+            <a:off x="1104904" y="2269323"/>
+            <a:ext cx="14020800" cy="5659894"/>
+          </a:xfrm>
+        </p:spPr>
         <p:spPr/>
         <p:txBody>
-          <a:bodyPr/>
+          <a:bodyPr wrap="square" rtlCol="0">
+            <a:normAutofit/>
+          </a:bodyPr>
           <a:lstStyle/>
           <a:p>
             <a:pPr lvl="0"/>
@@ -17072,9 +17208,17 @@
             <p:ph hasCustomPrompt="1" idx="13" sz="quarter"/>
           </p:nvPr>
         </p:nvSpPr>
+        <p:spPr>
+          <a:xfrm>
+            <a:off x="1104904" y="2269323"/>
+            <a:ext cx="14020800" cy="5659894"/>
+          </a:xfrm>
+        </p:spPr>
         <p:spPr/>
         <p:txBody>
-          <a:bodyPr/>
+          <a:bodyPr wrap="square" rtlCol="0">
+            <a:normAutofit/>
+          </a:bodyPr>
           <a:lstStyle/>
           <a:p>
             <a:pPr lvl="0" indent="0" marL="0">
@@ -17283,9 +17427,17 @@
             <p:ph hasCustomPrompt="1" idx="13" sz="quarter"/>
           </p:nvPr>
         </p:nvSpPr>
+        <p:spPr>
+          <a:xfrm>
+            <a:off x="1104904" y="2269323"/>
+            <a:ext cx="14020800" cy="5659894"/>
+          </a:xfrm>
+        </p:spPr>
         <p:spPr/>
         <p:txBody>
-          <a:bodyPr/>
+          <a:bodyPr wrap="square" rtlCol="0">
+            <a:normAutofit/>
+          </a:bodyPr>
           <a:lstStyle/>
           <a:p>
             <a:pPr lvl="0"/>
@@ -17641,9 +17793,17 @@
             <p:ph hasCustomPrompt="1" idx="13" sz="quarter"/>
           </p:nvPr>
         </p:nvSpPr>
+        <p:spPr>
+          <a:xfrm>
+            <a:off x="1104904" y="2269323"/>
+            <a:ext cx="14020800" cy="5659894"/>
+          </a:xfrm>
+        </p:spPr>
         <p:spPr/>
         <p:txBody>
-          <a:bodyPr/>
+          <a:bodyPr wrap="square" rtlCol="0">
+            <a:normAutofit/>
+          </a:bodyPr>
           <a:lstStyle/>
           <a:p>
             <a:pPr lvl="0"/>
@@ -18012,9 +18172,17 @@
             <p:ph hasCustomPrompt="1" idx="13" sz="quarter"/>
           </p:nvPr>
         </p:nvSpPr>
+        <p:spPr>
+          <a:xfrm>
+            <a:off x="1104904" y="2269323"/>
+            <a:ext cx="14020800" cy="5659894"/>
+          </a:xfrm>
+        </p:spPr>
         <p:spPr/>
         <p:txBody>
-          <a:bodyPr/>
+          <a:bodyPr wrap="square" rtlCol="0">
+            <a:normAutofit/>
+          </a:bodyPr>
           <a:lstStyle/>
           <a:p>
             <a:pPr lvl="0"/>
@@ -19103,9 +19271,17 @@
             <p:ph hasCustomPrompt="1" idx="13" sz="quarter"/>
           </p:nvPr>
         </p:nvSpPr>
+        <p:spPr>
+          <a:xfrm>
+            <a:off x="1104904" y="2269323"/>
+            <a:ext cx="6896104" cy="5459310"/>
+          </a:xfrm>
+        </p:spPr>
         <p:spPr/>
         <p:txBody>
-          <a:bodyPr/>
+          <a:bodyPr wrap="square" rtlCol="0">
+            <a:normAutofit/>
+          </a:bodyPr>
           <a:lstStyle/>
           <a:p>
             <a:pPr lvl="0" indent="0" marL="0">
@@ -19169,9 +19345,17 @@
             <p:ph hasCustomPrompt="1" idx="25" sz="quarter"/>
           </p:nvPr>
         </p:nvSpPr>
+        <p:spPr>
+          <a:xfrm>
+            <a:off x="8229600" y="2269322"/>
+            <a:ext cx="6896104" cy="5459309"/>
+          </a:xfrm>
+        </p:spPr>
         <p:spPr/>
         <p:txBody>
-          <a:bodyPr/>
+          <a:bodyPr wrap="square" rtlCol="0">
+            <a:normAutofit/>
+          </a:bodyPr>
           <a:lstStyle/>
           <a:p>
             <a:pPr lvl="0" indent="0" marL="0">
@@ -19709,9 +19893,17 @@
             <p:ph hasCustomPrompt="1" idx="13" sz="quarter"/>
           </p:nvPr>
         </p:nvSpPr>
+        <p:spPr>
+          <a:xfrm>
+            <a:off x="1104904" y="2269323"/>
+            <a:ext cx="14020800" cy="5659894"/>
+          </a:xfrm>
+        </p:spPr>
         <p:spPr/>
         <p:txBody>
-          <a:bodyPr/>
+          <a:bodyPr wrap="square" rtlCol="0">
+            <a:normAutofit/>
+          </a:bodyPr>
           <a:lstStyle/>
           <a:p>
             <a:pPr lvl="0"/>
@@ -21385,9 +21577,17 @@
             <p:ph hasCustomPrompt="1" idx="13" sz="quarter"/>
           </p:nvPr>
         </p:nvSpPr>
+        <p:spPr>
+          <a:xfrm>
+            <a:off x="1104904" y="2269323"/>
+            <a:ext cx="14020800" cy="5659894"/>
+          </a:xfrm>
+        </p:spPr>
         <p:spPr/>
         <p:txBody>
-          <a:bodyPr/>
+          <a:bodyPr wrap="square" rtlCol="0">
+            <a:normAutofit/>
+          </a:bodyPr>
           <a:lstStyle/>
           <a:p>
             <a:pPr lvl="0" indent="0" marL="0">
@@ -21964,9 +22164,17 @@
             <p:ph hasCustomPrompt="1" idx="13" sz="quarter"/>
           </p:nvPr>
         </p:nvSpPr>
+        <p:spPr>
+          <a:xfrm>
+            <a:off x="1104904" y="2269323"/>
+            <a:ext cx="14020800" cy="5659894"/>
+          </a:xfrm>
+        </p:spPr>
         <p:spPr/>
         <p:txBody>
-          <a:bodyPr/>
+          <a:bodyPr wrap="square" rtlCol="0">
+            <a:normAutofit/>
+          </a:bodyPr>
           <a:lstStyle/>
           <a:p>
             <a:pPr lvl="0" indent="0" marL="0">
@@ -22673,9 +22881,17 @@
             <p:ph hasCustomPrompt="1" idx="13" sz="quarter"/>
           </p:nvPr>
         </p:nvSpPr>
+        <p:spPr>
+          <a:xfrm>
+            <a:off x="1104904" y="2269323"/>
+            <a:ext cx="14020800" cy="5659894"/>
+          </a:xfrm>
+        </p:spPr>
         <p:spPr/>
         <p:txBody>
-          <a:bodyPr/>
+          <a:bodyPr wrap="square" rtlCol="0">
+            <a:normAutofit/>
+          </a:bodyPr>
           <a:lstStyle/>
           <a:p>
             <a:pPr lvl="0" indent="0" marL="0">
@@ -22858,9 +23074,17 @@
             <p:ph hasCustomPrompt="1" idx="13" sz="quarter"/>
           </p:nvPr>
         </p:nvSpPr>
+        <p:spPr>
+          <a:xfrm>
+            <a:off x="1104904" y="2269323"/>
+            <a:ext cx="14020800" cy="5659894"/>
+          </a:xfrm>
+        </p:spPr>
         <p:spPr/>
         <p:txBody>
-          <a:bodyPr/>
+          <a:bodyPr wrap="square" rtlCol="0">
+            <a:normAutofit/>
+          </a:bodyPr>
           <a:lstStyle/>
           <a:p>
             <a:pPr lvl="0"/>
@@ -23420,9 +23644,17 @@
             <p:ph hasCustomPrompt="1" idx="13" sz="quarter"/>
           </p:nvPr>
         </p:nvSpPr>
+        <p:spPr>
+          <a:xfrm>
+            <a:off x="1104904" y="2269323"/>
+            <a:ext cx="14020800" cy="5659894"/>
+          </a:xfrm>
+        </p:spPr>
         <p:spPr/>
         <p:txBody>
-          <a:bodyPr/>
+          <a:bodyPr wrap="square" rtlCol="0">
+            <a:normAutofit/>
+          </a:bodyPr>
           <a:lstStyle/>
           <a:p>
             <a:pPr lvl="0"/>
@@ -23870,9 +24102,17 @@
             <p:ph hasCustomPrompt="1" idx="13" sz="quarter"/>
           </p:nvPr>
         </p:nvSpPr>
+        <p:spPr>
+          <a:xfrm>
+            <a:off x="1104904" y="2269323"/>
+            <a:ext cx="14020800" cy="5659894"/>
+          </a:xfrm>
+        </p:spPr>
         <p:spPr/>
         <p:txBody>
-          <a:bodyPr/>
+          <a:bodyPr wrap="square" rtlCol="0">
+            <a:normAutofit/>
+          </a:bodyPr>
           <a:lstStyle/>
           <a:p>
             <a:pPr lvl="0" indent="-609585" marL="609585">
@@ -24120,9 +24360,17 @@
             <p:ph hasCustomPrompt="1" idx="13" sz="quarter"/>
           </p:nvPr>
         </p:nvSpPr>
+        <p:spPr>
+          <a:xfrm>
+            <a:off x="1104904" y="2269323"/>
+            <a:ext cx="14020800" cy="5659894"/>
+          </a:xfrm>
+        </p:spPr>
         <p:spPr/>
         <p:txBody>
-          <a:bodyPr/>
+          <a:bodyPr wrap="square" rtlCol="0">
+            <a:normAutofit/>
+          </a:bodyPr>
           <a:lstStyle/>
           <a:p>
             <a:pPr lvl="0" indent="0" marL="0">
@@ -24341,9 +24589,17 @@
             <p:ph hasCustomPrompt="1" idx="13" sz="quarter"/>
           </p:nvPr>
         </p:nvSpPr>
+        <p:spPr>
+          <a:xfrm>
+            <a:off x="1104904" y="2269323"/>
+            <a:ext cx="14020800" cy="5659894"/>
+          </a:xfrm>
+        </p:spPr>
         <p:spPr/>
         <p:txBody>
-          <a:bodyPr/>
+          <a:bodyPr wrap="square" rtlCol="0">
+            <a:normAutofit/>
+          </a:bodyPr>
           <a:lstStyle/>
           <a:p>
             <a:pPr lvl="0"/>

--- a/presentations/ifoa/hwle_ifoa_life_2026.pptx
+++ b/presentations/ifoa/hwle_ifoa_life_2026.pptx
@@ -3,64 +3,62 @@
 <p:presentation xmlns:a="http://schemas.openxmlformats.org/drawingml/2006/main" xmlns:p="http://schemas.openxmlformats.org/presentationml/2006/main" xmlns:r="http://schemas.openxmlformats.org/officeDocument/2006/relationships">
   <p:sldMasterIdLst>
     <p:sldMasterId id="2147484060" r:id="rId4"/>
-    <p:sldMasterId id="2147484090" r:id="rId5"/>
-    <p:sldMasterId id="2147483897" r:id="rId6"/>
   </p:sldMasterIdLst>
   <p:notesMasterIdLst>
-    <p:notesMasterId r:id="rId58"/>
+    <p:notesMasterId r:id="rId56"/>
   </p:notesMasterIdLst>
   <p:sldIdLst>
-    <p:sldId id="256" r:id="rId7"/>
-    <p:sldId id="257" r:id="rId8"/>
-    <p:sldId id="258" r:id="rId9"/>
-    <p:sldId id="259" r:id="rId10"/>
-    <p:sldId id="260" r:id="rId11"/>
-    <p:sldId id="261" r:id="rId12"/>
-    <p:sldId id="262" r:id="rId13"/>
-    <p:sldId id="263" r:id="rId14"/>
-    <p:sldId id="264" r:id="rId15"/>
-    <p:sldId id="265" r:id="rId16"/>
-    <p:sldId id="266" r:id="rId17"/>
-    <p:sldId id="267" r:id="rId18"/>
-    <p:sldId id="268" r:id="rId19"/>
-    <p:sldId id="269" r:id="rId20"/>
-    <p:sldId id="270" r:id="rId21"/>
-    <p:sldId id="271" r:id="rId22"/>
-    <p:sldId id="272" r:id="rId23"/>
-    <p:sldId id="273" r:id="rId24"/>
-    <p:sldId id="274" r:id="rId25"/>
-    <p:sldId id="275" r:id="rId26"/>
-    <p:sldId id="276" r:id="rId27"/>
-    <p:sldId id="277" r:id="rId28"/>
-    <p:sldId id="278" r:id="rId29"/>
-    <p:sldId id="279" r:id="rId30"/>
-    <p:sldId id="280" r:id="rId31"/>
-    <p:sldId id="281" r:id="rId32"/>
-    <p:sldId id="282" r:id="rId33"/>
-    <p:sldId id="283" r:id="rId34"/>
-    <p:sldId id="284" r:id="rId35"/>
-    <p:sldId id="285" r:id="rId36"/>
-    <p:sldId id="286" r:id="rId37"/>
-    <p:sldId id="287" r:id="rId38"/>
-    <p:sldId id="288" r:id="rId39"/>
-    <p:sldId id="289" r:id="rId40"/>
-    <p:sldId id="290" r:id="rId41"/>
-    <p:sldId id="291" r:id="rId42"/>
-    <p:sldId id="292" r:id="rId43"/>
-    <p:sldId id="293" r:id="rId44"/>
-    <p:sldId id="294" r:id="rId45"/>
-    <p:sldId id="295" r:id="rId46"/>
-    <p:sldId id="296" r:id="rId47"/>
-    <p:sldId id="297" r:id="rId48"/>
-    <p:sldId id="298" r:id="rId49"/>
-    <p:sldId id="299" r:id="rId50"/>
-    <p:sldId id="300" r:id="rId51"/>
-    <p:sldId id="301" r:id="rId52"/>
-    <p:sldId id="302" r:id="rId53"/>
-    <p:sldId id="303" r:id="rId54"/>
-    <p:sldId id="304" r:id="rId55"/>
-    <p:sldId id="305" r:id="rId56"/>
-    <p:sldId id="306" r:id="rId57"/>
+    <p:sldId id="256" r:id="rId5"/>
+    <p:sldId id="257" r:id="rId6"/>
+    <p:sldId id="258" r:id="rId7"/>
+    <p:sldId id="259" r:id="rId8"/>
+    <p:sldId id="260" r:id="rId9"/>
+    <p:sldId id="261" r:id="rId10"/>
+    <p:sldId id="262" r:id="rId11"/>
+    <p:sldId id="263" r:id="rId12"/>
+    <p:sldId id="264" r:id="rId13"/>
+    <p:sldId id="265" r:id="rId14"/>
+    <p:sldId id="266" r:id="rId15"/>
+    <p:sldId id="267" r:id="rId16"/>
+    <p:sldId id="268" r:id="rId17"/>
+    <p:sldId id="269" r:id="rId18"/>
+    <p:sldId id="270" r:id="rId19"/>
+    <p:sldId id="271" r:id="rId20"/>
+    <p:sldId id="272" r:id="rId21"/>
+    <p:sldId id="273" r:id="rId22"/>
+    <p:sldId id="274" r:id="rId23"/>
+    <p:sldId id="275" r:id="rId24"/>
+    <p:sldId id="276" r:id="rId25"/>
+    <p:sldId id="277" r:id="rId26"/>
+    <p:sldId id="278" r:id="rId27"/>
+    <p:sldId id="279" r:id="rId28"/>
+    <p:sldId id="280" r:id="rId29"/>
+    <p:sldId id="281" r:id="rId30"/>
+    <p:sldId id="282" r:id="rId31"/>
+    <p:sldId id="283" r:id="rId32"/>
+    <p:sldId id="284" r:id="rId33"/>
+    <p:sldId id="285" r:id="rId34"/>
+    <p:sldId id="286" r:id="rId35"/>
+    <p:sldId id="287" r:id="rId36"/>
+    <p:sldId id="288" r:id="rId37"/>
+    <p:sldId id="289" r:id="rId38"/>
+    <p:sldId id="290" r:id="rId39"/>
+    <p:sldId id="291" r:id="rId40"/>
+    <p:sldId id="292" r:id="rId41"/>
+    <p:sldId id="293" r:id="rId42"/>
+    <p:sldId id="294" r:id="rId43"/>
+    <p:sldId id="295" r:id="rId44"/>
+    <p:sldId id="296" r:id="rId45"/>
+    <p:sldId id="297" r:id="rId46"/>
+    <p:sldId id="298" r:id="rId47"/>
+    <p:sldId id="299" r:id="rId48"/>
+    <p:sldId id="300" r:id="rId49"/>
+    <p:sldId id="301" r:id="rId50"/>
+    <p:sldId id="302" r:id="rId51"/>
+    <p:sldId id="303" r:id="rId52"/>
+    <p:sldId id="304" r:id="rId53"/>
+    <p:sldId id="305" r:id="rId54"/>
+    <p:sldId id="306" r:id="rId55"/>
   </p:sldIdLst>
   <p:sldSz cx="16256000" cy="9144000"/>
   <p:notesSz cx="16256000" cy="9144000"/>
@@ -1067,7 +1065,7 @@
           <p:cNvPr id="70" name="Subtitle 2">
             <a:extLst>
               <a:ext uri="{FF2B5EF4-FFF2-40B4-BE49-F238E27FC236}">
-                <a16:creationId xmlns:a16="http://schemas.microsoft.com/office/drawing/2014/main" id="{6AA7276D-7192-0B34-473D-EA39E90AE911}"/>
+                <a16:creationId xmlns:a16="http://schemas.microsoft.com/office/drawing/2014/main" id="{6AA7276D-7192-0B34-473D-EA39E90AE910}"/>
               </a:ext>
             </a:extLst>
           </p:cNvPr>
@@ -7665,7 +7663,7 @@
       </p:cxnSp>
       <p:sp>
         <p:nvSpPr>
-          <p:cNvPr id="914" name="Title 1">
+          <p:cNvPr id="97" name="Title 1">
             <a:extLst>
               <a:ext uri="{FF2B5EF4-FFF2-40B4-BE49-F238E27FC236}">
                 <a16:creationId xmlns:a16="http://schemas.microsoft.com/office/drawing/2014/main" id="{EF499182-B1CD-4399-99FD-7B1CA914FD59}"/>
@@ -10692,10 +10690,10 @@
       </p:grpSpPr>
       <p:sp>
         <p:nvSpPr>
-          <p:cNvPr id="5" name="Title Placeholder 1">
-            <a:extLst>
-              <a:ext uri="{FF2B5EF4-FFF2-40B4-BE49-F238E27FC236}">
-                <a16:creationId xmlns:a16="http://schemas.microsoft.com/office/drawing/2014/main" id="{FF25C570-C0B9-76B3-4BFD-E6B3A0571624}"/>
+          <p:cNvPr id="2" name="Title Placeholder 1">
+            <a:extLst>
+              <a:ext uri="{FF2B5EF4-FFF2-40B4-BE49-F238E27FC236}">
+                <a16:creationId xmlns:a16="http://schemas.microsoft.com/office/drawing/2014/main" id="{C3F9E5E3-50B6-4FBB-92A3-9FF023DDE2C5}"/>
               </a:ext>
             </a:extLst>
           </p:cNvPr>
@@ -10730,10 +10728,10 @@
       </p:sp>
       <p:sp>
         <p:nvSpPr>
-          <p:cNvPr id="6" name="Text Placeholder 2">
-            <a:extLst>
-              <a:ext uri="{FF2B5EF4-FFF2-40B4-BE49-F238E27FC236}">
-                <a16:creationId xmlns:a16="http://schemas.microsoft.com/office/drawing/2014/main" id="{A630D8FD-A6F6-6EE4-2434-A38016314418}"/>
+          <p:cNvPr id="3" name="Text Placeholder 2">
+            <a:extLst>
+              <a:ext uri="{FF2B5EF4-FFF2-40B4-BE49-F238E27FC236}">
+                <a16:creationId xmlns:a16="http://schemas.microsoft.com/office/drawing/2014/main" id="{CD748E6F-0121-4691-8E7F-4F7004A7CAA4}"/>
               </a:ext>
             </a:extLst>
           </p:cNvPr>
@@ -10795,47 +10793,12 @@
           </a:p>
         </p:txBody>
       </p:sp>
-      <p:pic>
-        <p:nvPicPr>
-          <p:cNvPr id="7" name="Picture 6">
-            <a:extLst>
-              <a:ext uri="{FF2B5EF4-FFF2-40B4-BE49-F238E27FC236}">
-                <a16:creationId xmlns:a16="http://schemas.microsoft.com/office/drawing/2014/main" id="{BDD3F4E8-5CDA-8955-4BFE-A2FCDD5BA013}"/>
-              </a:ext>
-            </a:extLst>
-          </p:cNvPr>
-          <p:cNvPicPr>
-            <a:picLocks noChangeAspect="1"/>
-          </p:cNvPicPr>
-          <p:nvPr userDrawn="1"/>
-        </p:nvPicPr>
-        <p:blipFill>
-          <a:blip cstate="email" r:embed="rId3">
-            <a:extLst>
-              <a:ext uri="{28A0092B-C50C-407E-A947-70E740481C1C}">
-                <a14:useLocalDpi xmlns:a14="http://schemas.microsoft.com/office/drawing/2010/main" val="0"/>
-              </a:ext>
-            </a:extLst>
-          </a:blip>
-          <a:srcRect/>
-          <a:stretch/>
-        </p:blipFill>
-        <p:spPr>
-          <a:xfrm>
-            <a:off x="12850415" y="8348635"/>
-            <a:ext cx="1366353" cy="554629"/>
-          </a:xfrm>
-          <a:prstGeom prst="rect">
-            <a:avLst/>
-          </a:prstGeom>
-        </p:spPr>
-      </p:pic>
-      <p:sp>
-        <p:nvSpPr>
-          <p:cNvPr id="8" name="Footer Placeholder 4">
-            <a:extLst>
-              <a:ext uri="{FF2B5EF4-FFF2-40B4-BE49-F238E27FC236}">
-                <a16:creationId xmlns:a16="http://schemas.microsoft.com/office/drawing/2014/main" id="{ACA03778-E4AF-D519-D257-3D5B728D22F7}"/>
+      <p:sp>
+        <p:nvSpPr>
+          <p:cNvPr id="22" name="Footer Placeholder 4">
+            <a:extLst>
+              <a:ext uri="{FF2B5EF4-FFF2-40B4-BE49-F238E27FC236}">
+                <a16:creationId xmlns:a16="http://schemas.microsoft.com/office/drawing/2014/main" id="{15B6EA79-ADD6-536F-9385-DD3D12B23CD5}"/>
               </a:ext>
             </a:extLst>
           </p:cNvPr>
@@ -10877,10 +10840,10 @@
       </p:sp>
       <p:sp>
         <p:nvSpPr>
-          <p:cNvPr id="9" name="Slide Number Placeholder 5">
-            <a:extLst>
-              <a:ext uri="{FF2B5EF4-FFF2-40B4-BE49-F238E27FC236}">
-                <a16:creationId xmlns:a16="http://schemas.microsoft.com/office/drawing/2014/main" id="{A1516921-5FEC-FB3B-75CE-FB6663376CD0}"/>
+          <p:cNvPr id="23" name="Slide Number Placeholder 5">
+            <a:extLst>
+              <a:ext uri="{FF2B5EF4-FFF2-40B4-BE49-F238E27FC236}">
+                <a16:creationId xmlns:a16="http://schemas.microsoft.com/office/drawing/2014/main" id="{E2592FD6-5F90-36CF-89E1-38DFB0DCDE60}"/>
               </a:ext>
             </a:extLst>
           </p:cNvPr>
@@ -10928,10 +10891,10 @@
       </p:sp>
       <p:cxnSp>
         <p:nvCxnSpPr>
-          <p:cNvPr id="10" name="Straight Connector 9">
-            <a:extLst>
-              <a:ext uri="{FF2B5EF4-FFF2-40B4-BE49-F238E27FC236}">
-                <a16:creationId xmlns:a16="http://schemas.microsoft.com/office/drawing/2014/main" id="{5B708CF7-AFA2-B03F-3762-97D636B572D0}"/>
+          <p:cNvPr id="24" name="Straight Connector 23">
+            <a:extLst>
+              <a:ext uri="{FF2B5EF4-FFF2-40B4-BE49-F238E27FC236}">
+                <a16:creationId xmlns:a16="http://schemas.microsoft.com/office/drawing/2014/main" id="{CB2459A5-41A4-9F91-CD93-561B1A34EFD3}"/>
               </a:ext>
             </a:extLst>
           </p:cNvPr>
@@ -10971,10 +10934,10 @@
       </p:cxnSp>
       <p:cxnSp>
         <p:nvCxnSpPr>
-          <p:cNvPr id="11" name="Straight Connector 10">
-            <a:extLst>
-              <a:ext uri="{FF2B5EF4-FFF2-40B4-BE49-F238E27FC236}">
-                <a16:creationId xmlns:a16="http://schemas.microsoft.com/office/drawing/2014/main" id="{6F886170-12CD-9DF7-29C3-124E4C5EF48A}"/>
+          <p:cNvPr id="25" name="Straight Connector 24">
+            <a:extLst>
+              <a:ext uri="{FF2B5EF4-FFF2-40B4-BE49-F238E27FC236}">
+                <a16:creationId xmlns:a16="http://schemas.microsoft.com/office/drawing/2014/main" id="{193BB4BF-B293-D332-15CC-111A2FEAA3DA}"/>
               </a:ext>
             </a:extLst>
           </p:cNvPr>
@@ -11012,16 +10975,69 @@
           </a:fontRef>
         </p:style>
       </p:cxnSp>
+      <p:pic>
+        <p:nvPicPr>
+          <p:cNvPr id="5" name="Picture 4">
+            <a:extLst>
+              <a:ext uri="{FF2B5EF4-FFF2-40B4-BE49-F238E27FC236}">
+                <a16:creationId xmlns:a16="http://schemas.microsoft.com/office/drawing/2014/main" id="{C59BA104-4A55-2960-85E0-106CAE1FF314}"/>
+              </a:ext>
+            </a:extLst>
+          </p:cNvPr>
+          <p:cNvPicPr>
+            <a:picLocks noChangeAspect="1"/>
+          </p:cNvPicPr>
+          <p:nvPr userDrawn="1"/>
+        </p:nvPicPr>
+        <p:blipFill>
+          <a:blip cstate="email" r:embed="rId16">
+            <a:extLst>
+              <a:ext uri="{28A0092B-C50C-407E-A947-70E740481C1C}">
+                <a14:useLocalDpi xmlns:a14="http://schemas.microsoft.com/office/drawing/2010/main" val="0"/>
+              </a:ext>
+            </a:extLst>
+          </a:blip>
+          <a:srcRect/>
+          <a:stretch/>
+        </p:blipFill>
+        <p:spPr>
+          <a:xfrm>
+            <a:off x="12850416" y="8348635"/>
+            <a:ext cx="1366351" cy="554629"/>
+          </a:xfrm>
+          <a:prstGeom prst="rect">
+            <a:avLst/>
+          </a:prstGeom>
+        </p:spPr>
+      </p:pic>
     </p:spTree>
     <p:extLst>
       <p:ext uri="{BB962C8B-B14F-4D97-AF65-F5344CB8AC3E}">
-        <p14:creationId xmlns:p14="http://schemas.microsoft.com/office/powerpoint/2010/main" val="429686094"/>
+        <p14:creationId xmlns:p14="http://schemas.microsoft.com/office/powerpoint/2010/main" val="2805869975"/>
       </p:ext>
     </p:extLst>
   </p:cSld>
   <p:clrMap accent1="accent1" accent2="accent2" accent3="accent3" accent4="accent4" accent5="accent5" accent6="accent6" bg1="lt1" bg2="lt2" folHlink="folHlink" hlink="hlink" tx1="dk1" tx2="dk2"/>
   <p:sldLayoutIdLst>
-    <p:sldLayoutId id="2147483989" r:id="rId1"/>
+    <p:sldLayoutId id="2147484091" r:id="rId1"/>
+    <p:sldLayoutId id="2147484092" r:id="rId2"/>
+    <p:sldLayoutId id="2147484093" r:id="rId3"/>
+    <p:sldLayoutId id="2147484094" r:id="rId4"/>
+    <p:sldLayoutId id="2147484095" r:id="rId5"/>
+    <p:sldLayoutId id="2147484096" r:id="rId6"/>
+    <p:sldLayoutId id="2147484097" r:id="rId7"/>
+    <p:sldLayoutId id="2147484098" r:id="rId8"/>
+    <p:sldLayoutId id="2147484099" r:id="rId9"/>
+    <p:sldLayoutId id="2147484100" r:id="rId10"/>
+    <p:sldLayoutId id="2147484101" r:id="rId11"/>
+    <p:sldLayoutId id="2147484102" r:id="rId12"/>
+    <p:sldLayoutId id="2147484103" r:id="rId13"/>
+    <p:sldLayoutId id="2147484104" r:id="rId14"/>
+    <p:sldLayoutId id="2147484105" r:id="rId17"/>
+    <p:sldLayoutId id="2147484106" r:id="rId18"/>
+    <p:sldLayoutId id="2147484107" r:id="rId19"/>
+    <p:sldLayoutId id="2147484108" r:id="rId20"/>
+    <p:sldLayoutId id="2147484109" r:id="rId21"/>
   </p:sldLayoutIdLst>
   <p:hf dt="0" hdr="0"/>
   <p:txStyles>
@@ -11061,7 +11077,7 @@
           <a:solidFill>
             <a:schemeClr val="tx1"/>
           </a:solidFill>
-          <a:latin charset="77" pitchFamily="2" typeface="Arial Light"/>
+          <a:latin charset="0" panose="020B0604020202020204" pitchFamily="34" typeface="Arial"/>
           <a:ea typeface="+mn-ea"/>
           <a:cs charset="0" panose="020B0604020202020204" pitchFamily="34" typeface="Arial"/>
         </a:defRPr>
@@ -11082,7 +11098,7 @@
           <a:solidFill>
             <a:schemeClr val="tx1"/>
           </a:solidFill>
-          <a:latin charset="77" pitchFamily="2" typeface="Arial Light"/>
+          <a:latin charset="0" panose="020B0604020202020204" pitchFamily="34" typeface="Arial"/>
           <a:ea typeface="+mn-ea"/>
           <a:cs charset="0" panose="020B0604020202020204" pitchFamily="34" typeface="Arial"/>
         </a:defRPr>
@@ -11103,7 +11119,7 @@
           <a:solidFill>
             <a:schemeClr val="tx1"/>
           </a:solidFill>
-          <a:latin charset="77" pitchFamily="2" typeface="Arial Light"/>
+          <a:latin charset="0" panose="020B0604020202020204" pitchFamily="34" typeface="Arial"/>
           <a:ea typeface="+mn-ea"/>
           <a:cs charset="0" panose="020B0604020202020204" pitchFamily="34" typeface="Arial"/>
         </a:defRPr>
@@ -11124,7 +11140,7 @@
           <a:solidFill>
             <a:schemeClr val="tx1"/>
           </a:solidFill>
-          <a:latin charset="77" pitchFamily="2" typeface="Arial Light"/>
+          <a:latin charset="0" panose="020B0604020202020204" pitchFamily="34" typeface="Arial"/>
           <a:ea typeface="+mn-ea"/>
           <a:cs charset="0" panose="020B0604020202020204" pitchFamily="34" typeface="Arial"/>
         </a:defRPr>
@@ -11145,7 +11161,7 @@
           <a:solidFill>
             <a:schemeClr val="tx1"/>
           </a:solidFill>
-          <a:latin charset="77" pitchFamily="2" typeface="Arial Light"/>
+          <a:latin charset="0" panose="020B0604020202020204" pitchFamily="34" typeface="Arial"/>
           <a:ea typeface="+mn-ea"/>
           <a:cs charset="0" panose="020B0604020202020204" pitchFamily="34" typeface="Arial"/>
         </a:defRPr>
@@ -11383,7 +11399,7 @@
           <p:cNvPr id="70" name="Subtitle 2">
             <a:extLst>
               <a:ext uri="{FF2B5EF4-FFF2-40B4-BE49-F238E27FC236}">
-                <a16:creationId xmlns:a16="http://schemas.microsoft.com/office/drawing/2014/main" id="{6AA7276D-7192-0B34-473D-EA39E90AE911}"/>
+                <a16:creationId xmlns:a16="http://schemas.microsoft.com/office/drawing/2014/main" id="{6AA7276D-7192-0B34-473D-EA39E90AE910}"/>
               </a:ext>
             </a:extLst>
           </p:cNvPr>
@@ -11554,7 +11570,7 @@
       </p:grpSpPr>
       <p:sp>
         <p:nvSpPr>
-          <p:cNvPr id="914" name="Title 1">
+          <p:cNvPr id="97" name="Title 1">
             <a:extLst>
               <a:ext uri="{FF2B5EF4-FFF2-40B4-BE49-F238E27FC236}">
                 <a16:creationId xmlns:a16="http://schemas.microsoft.com/office/drawing/2014/main" id="{EF499182-B1CD-4399-99FD-7B1CA914FD59}"/>
@@ -12394,7 +12410,7 @@
       </p:grpSpPr>
       <p:sp>
         <p:nvSpPr>
-          <p:cNvPr id="914" name="Title 1">
+          <p:cNvPr id="97" name="Title 1">
             <a:extLst>
               <a:ext uri="{FF2B5EF4-FFF2-40B4-BE49-F238E27FC236}">
                 <a16:creationId xmlns:a16="http://schemas.microsoft.com/office/drawing/2014/main" id="{EF499182-B1CD-4399-99FD-7B1CA914FD59}"/>
@@ -12829,7 +12845,7 @@
       </p:pic>
       <p:sp>
         <p:nvSpPr>
-          <p:cNvPr id="1" name="TextBox 3"/>
+          <p:cNvPr id="9" name="TextBox 3"/>
           <p:cNvSpPr txBox="1"/>
           <p:nvPr>
             <p:ph idx="1"/>
@@ -12891,7 +12907,7 @@
       </p:pic>
       <p:sp>
         <p:nvSpPr>
-          <p:cNvPr id="1" name="TextBox 3"/>
+          <p:cNvPr id="10" name="TextBox 3"/>
           <p:cNvSpPr txBox="1"/>
           <p:nvPr>
             <p:ph idx="1"/>
@@ -13762,7 +13778,7 @@
       </p:grpSpPr>
       <p:sp>
         <p:nvSpPr>
-          <p:cNvPr id="914" name="Title 1">
+          <p:cNvPr id="97" name="Title 1">
             <a:extLst>
               <a:ext uri="{FF2B5EF4-FFF2-40B4-BE49-F238E27FC236}">
                 <a16:creationId xmlns:a16="http://schemas.microsoft.com/office/drawing/2014/main" id="{EF499182-B1CD-4399-99FD-7B1CA914FD59}"/>
@@ -14150,7 +14166,7 @@
       </p:grpSpPr>
       <p:sp>
         <p:nvSpPr>
-          <p:cNvPr id="914" name="Title 1">
+          <p:cNvPr id="97" name="Title 1">
             <a:extLst>
               <a:ext uri="{FF2B5EF4-FFF2-40B4-BE49-F238E27FC236}">
                 <a16:creationId xmlns:a16="http://schemas.microsoft.com/office/drawing/2014/main" id="{EF499182-B1CD-4399-99FD-7B1CA914FD59}"/>
@@ -14370,7 +14386,7 @@
       </p:pic>
       <p:sp>
         <p:nvSpPr>
-          <p:cNvPr id="1" name="TextBox 3"/>
+          <p:cNvPr id="15" name="TextBox 3"/>
           <p:cNvSpPr txBox="1"/>
           <p:nvPr>
             <p:ph idx="1"/>
@@ -15789,7 +15805,7 @@
       </p:graphicFrame>
       <p:sp>
         <p:nvSpPr>
-          <p:cNvPr id="6" name="Footer Placeholder 4">
+          <p:cNvPr id="15" name="Footer Placeholder 4">
             <a:extLst>
               <a:ext uri="{FF2B5EF4-FFF2-40B4-BE49-F238E27FC236}">
                 <a16:creationId xmlns:a16="http://schemas.microsoft.com/office/drawing/2014/main" id="{8F9D7237-5CD7-6037-7D60-81DA36BE7AA4}"/>
@@ -17589,7 +17605,7 @@
       </p:grpSpPr>
       <p:sp>
         <p:nvSpPr>
-          <p:cNvPr id="914" name="Title 1">
+          <p:cNvPr id="97" name="Title 1">
             <a:extLst>
               <a:ext uri="{FF2B5EF4-FFF2-40B4-BE49-F238E27FC236}">
                 <a16:creationId xmlns:a16="http://schemas.microsoft.com/office/drawing/2014/main" id="{EF499182-B1CD-4399-99FD-7B1CA914FD59}"/>
@@ -17968,7 +17984,7 @@
       </p:grpSpPr>
       <p:sp>
         <p:nvSpPr>
-          <p:cNvPr id="914" name="Title 1">
+          <p:cNvPr id="97" name="Title 1">
             <a:extLst>
               <a:ext uri="{FF2B5EF4-FFF2-40B4-BE49-F238E27FC236}">
                 <a16:creationId xmlns:a16="http://schemas.microsoft.com/office/drawing/2014/main" id="{EF499182-B1CD-4399-99FD-7B1CA914FD59}"/>
@@ -18949,7 +18965,7 @@
       </p:graphicFrame>
       <p:sp>
         <p:nvSpPr>
-          <p:cNvPr id="6" name="Footer Placeholder 4">
+          <p:cNvPr id="15" name="Footer Placeholder 4">
             <a:extLst>
               <a:ext uri="{FF2B5EF4-FFF2-40B4-BE49-F238E27FC236}">
                 <a16:creationId xmlns:a16="http://schemas.microsoft.com/office/drawing/2014/main" id="{8F9D7237-5CD7-6037-7D60-81DA36BE7AA4}"/>
@@ -19067,7 +19083,7 @@
       </p:grpSpPr>
       <p:sp>
         <p:nvSpPr>
-          <p:cNvPr id="914" name="Title 1">
+          <p:cNvPr id="97" name="Title 1">
             <a:extLst>
               <a:ext uri="{FF2B5EF4-FFF2-40B4-BE49-F238E27FC236}">
                 <a16:creationId xmlns:a16="http://schemas.microsoft.com/office/drawing/2014/main" id="{EF499182-B1CD-4399-99FD-7B1CA914FD59}"/>
@@ -19725,7 +19741,7 @@
       </p:graphicFrame>
       <p:sp>
         <p:nvSpPr>
-          <p:cNvPr id="6" name="Footer Placeholder 4">
+          <p:cNvPr id="15" name="Footer Placeholder 4">
             <a:extLst>
               <a:ext uri="{FF2B5EF4-FFF2-40B4-BE49-F238E27FC236}">
                 <a16:creationId xmlns:a16="http://schemas.microsoft.com/office/drawing/2014/main" id="{8F9D7237-5CD7-6037-7D60-81DA36BE7AA4}"/>
@@ -20197,7 +20213,7 @@
       </p:grpSpPr>
       <p:sp>
         <p:nvSpPr>
-          <p:cNvPr id="914" name="Title 1">
+          <p:cNvPr id="97" name="Title 1">
             <a:extLst>
               <a:ext uri="{FF2B5EF4-FFF2-40B4-BE49-F238E27FC236}">
                 <a16:creationId xmlns:a16="http://schemas.microsoft.com/office/drawing/2014/main" id="{EF499182-B1CD-4399-99FD-7B1CA914FD59}"/>
@@ -20417,7 +20433,7 @@
       </p:pic>
       <p:sp>
         <p:nvSpPr>
-          <p:cNvPr id="1" name="TextBox 3"/>
+          <p:cNvPr id="15" name="TextBox 3"/>
           <p:cNvSpPr txBox="1"/>
           <p:nvPr>
             <p:ph idx="1"/>
@@ -20793,7 +20809,7 @@
       </p:graphicFrame>
       <p:sp>
         <p:nvSpPr>
-          <p:cNvPr id="6" name="Footer Placeholder 4">
+          <p:cNvPr id="15" name="Footer Placeholder 4">
             <a:extLst>
               <a:ext uri="{FF2B5EF4-FFF2-40B4-BE49-F238E27FC236}">
                 <a16:creationId xmlns:a16="http://schemas.microsoft.com/office/drawing/2014/main" id="{8F9D7237-5CD7-6037-7D60-81DA36BE7AA4}"/>
@@ -21445,7 +21461,7 @@
       </p:graphicFrame>
       <p:sp>
         <p:nvSpPr>
-          <p:cNvPr id="6" name="Footer Placeholder 4">
+          <p:cNvPr id="15" name="Footer Placeholder 4">
             <a:extLst>
               <a:ext uri="{FF2B5EF4-FFF2-40B4-BE49-F238E27FC236}">
                 <a16:creationId xmlns:a16="http://schemas.microsoft.com/office/drawing/2014/main" id="{8F9D7237-5CD7-6037-7D60-81DA36BE7AA4}"/>
@@ -22032,7 +22048,7 @@
       </p:graphicFrame>
       <p:sp>
         <p:nvSpPr>
-          <p:cNvPr id="6" name="Footer Placeholder 4">
+          <p:cNvPr id="15" name="Footer Placeholder 4">
             <a:extLst>
               <a:ext uri="{FF2B5EF4-FFF2-40B4-BE49-F238E27FC236}">
                 <a16:creationId xmlns:a16="http://schemas.microsoft.com/office/drawing/2014/main" id="{8F9D7237-5CD7-6037-7D60-81DA36BE7AA4}"/>
@@ -22749,7 +22765,7 @@
       </p:graphicFrame>
       <p:sp>
         <p:nvSpPr>
-          <p:cNvPr id="6" name="Footer Placeholder 4">
+          <p:cNvPr id="15" name="Footer Placeholder 4">
             <a:extLst>
               <a:ext uri="{FF2B5EF4-FFF2-40B4-BE49-F238E27FC236}">
                 <a16:creationId xmlns:a16="http://schemas.microsoft.com/office/drawing/2014/main" id="{8F9D7237-5CD7-6037-7D60-81DA36BE7AA4}"/>
@@ -23440,7 +23456,7 @@
       </p:grpSpPr>
       <p:sp>
         <p:nvSpPr>
-          <p:cNvPr id="914" name="Title 1">
+          <p:cNvPr id="97" name="Title 1">
             <a:extLst>
               <a:ext uri="{FF2B5EF4-FFF2-40B4-BE49-F238E27FC236}">
                 <a16:creationId xmlns:a16="http://schemas.microsoft.com/office/drawing/2014/main" id="{EF499182-B1CD-4399-99FD-7B1CA914FD59}"/>
@@ -23898,7 +23914,7 @@
       </p:grpSpPr>
       <p:sp>
         <p:nvSpPr>
-          <p:cNvPr id="914" name="Title 1">
+          <p:cNvPr id="97" name="Title 1">
             <a:extLst>
               <a:ext uri="{FF2B5EF4-FFF2-40B4-BE49-F238E27FC236}">
                 <a16:creationId xmlns:a16="http://schemas.microsoft.com/office/drawing/2014/main" id="{EF499182-B1CD-4399-99FD-7B1CA914FD59}"/>
@@ -25025,267 +25041,6 @@
       </a:hlink>
       <a:folHlink>
         <a:srgbClr val="829AAC"/>
-      </a:folHlink>
-    </a:clrScheme>
-    <a:fontScheme name="Arial">
-      <a:majorFont>
-        <a:latin typeface="Arial" panose="020B0604020202020204"/>
-        <a:ea typeface=""/>
-        <a:cs typeface=""/>
-        <a:font script="Jpan" typeface="ＭＳ Ｐゴシック"/>
-        <a:font script="Hang" typeface="굴림"/>
-        <a:font script="Hans" typeface="黑体"/>
-        <a:font script="Hant" typeface="微軟正黑體"/>
-        <a:font script="Arab" typeface="Arial"/>
-        <a:font script="Hebr" typeface="Arial"/>
-        <a:font script="Thai" typeface="Cordia New"/>
-        <a:font script="Ethi" typeface="Nyala"/>
-        <a:font script="Beng" typeface="Vrinda"/>
-        <a:font script="Gujr" typeface="Shruti"/>
-        <a:font script="Khmr" typeface="DaunPenh"/>
-        <a:font script="Knda" typeface="Tunga"/>
-        <a:font script="Guru" typeface="Raavi"/>
-        <a:font script="Cans" typeface="Euphemia"/>
-        <a:font script="Cher" typeface="Plantagenet Cherokee"/>
-        <a:font script="Yiii" typeface="Microsoft Yi Baiti"/>
-        <a:font script="Tibt" typeface="Microsoft Himalaya"/>
-        <a:font script="Thaa" typeface="MV Boli"/>
-        <a:font script="Deva" typeface="Mangal"/>
-        <a:font script="Telu" typeface="Gautami"/>
-        <a:font script="Taml" typeface="Latha"/>
-        <a:font script="Syrc" typeface="Estrangelo Edessa"/>
-        <a:font script="Orya" typeface="Kalinga"/>
-        <a:font script="Mlym" typeface="Kartika"/>
-        <a:font script="Laoo" typeface="DokChampa"/>
-        <a:font script="Sinh" typeface="Iskoola Pota"/>
-        <a:font script="Mong" typeface="Mongolian Baiti"/>
-        <a:font script="Viet" typeface="Arial"/>
-        <a:font script="Uigh" typeface="Microsoft Uighur"/>
-        <a:font script="Geor" typeface="Sylfaen"/>
-      </a:majorFont>
-      <a:minorFont>
-        <a:latin typeface="Arial" panose="020B0604020202020204"/>
-        <a:ea typeface=""/>
-        <a:cs typeface=""/>
-        <a:font script="Jpan" typeface="ＭＳ Ｐゴシック"/>
-        <a:font script="Hang" typeface="굴림"/>
-        <a:font script="Hans" typeface="黑体"/>
-        <a:font script="Hant" typeface="微軟正黑體"/>
-        <a:font script="Arab" typeface="Arial"/>
-        <a:font script="Hebr" typeface="Arial"/>
-        <a:font script="Thai" typeface="Cordia New"/>
-        <a:font script="Ethi" typeface="Nyala"/>
-        <a:font script="Beng" typeface="Vrinda"/>
-        <a:font script="Gujr" typeface="Shruti"/>
-        <a:font script="Khmr" typeface="DaunPenh"/>
-        <a:font script="Knda" typeface="Tunga"/>
-        <a:font script="Guru" typeface="Raavi"/>
-        <a:font script="Cans" typeface="Euphemia"/>
-        <a:font script="Cher" typeface="Plantagenet Cherokee"/>
-        <a:font script="Yiii" typeface="Microsoft Yi Baiti"/>
-        <a:font script="Tibt" typeface="Microsoft Himalaya"/>
-        <a:font script="Thaa" typeface="MV Boli"/>
-        <a:font script="Deva" typeface="Mangal"/>
-        <a:font script="Telu" typeface="Gautami"/>
-        <a:font script="Taml" typeface="Latha"/>
-        <a:font script="Syrc" typeface="Estrangelo Edessa"/>
-        <a:font script="Orya" typeface="Kalinga"/>
-        <a:font script="Mlym" typeface="Kartika"/>
-        <a:font script="Laoo" typeface="DokChampa"/>
-        <a:font script="Sinh" typeface="Iskoola Pota"/>
-        <a:font script="Mong" typeface="Mongolian Baiti"/>
-        <a:font script="Viet" typeface="Arial"/>
-        <a:font script="Uigh" typeface="Microsoft Uighur"/>
-        <a:font script="Geor" typeface="Sylfaen"/>
-      </a:minorFont>
-    </a:fontScheme>
-    <a:fmtScheme name="Office">
-      <a:fillStyleLst>
-        <a:solidFill>
-          <a:schemeClr val="phClr"/>
-        </a:solidFill>
-        <a:gradFill rotWithShape="1">
-          <a:gsLst>
-            <a:gs pos="0">
-              <a:schemeClr val="phClr">
-                <a:lumMod val="110000"/>
-                <a:satMod val="105000"/>
-                <a:tint val="67000"/>
-              </a:schemeClr>
-            </a:gs>
-            <a:gs pos="50000">
-              <a:schemeClr val="phClr">
-                <a:lumMod val="105000"/>
-                <a:satMod val="103000"/>
-                <a:tint val="73000"/>
-              </a:schemeClr>
-            </a:gs>
-            <a:gs pos="100000">
-              <a:schemeClr val="phClr">
-                <a:lumMod val="105000"/>
-                <a:satMod val="109000"/>
-                <a:tint val="81000"/>
-              </a:schemeClr>
-            </a:gs>
-          </a:gsLst>
-          <a:lin ang="5400000" scaled="0"/>
-        </a:gradFill>
-        <a:gradFill rotWithShape="1">
-          <a:gsLst>
-            <a:gs pos="0">
-              <a:schemeClr val="phClr">
-                <a:satMod val="103000"/>
-                <a:lumMod val="102000"/>
-                <a:tint val="94000"/>
-              </a:schemeClr>
-            </a:gs>
-            <a:gs pos="50000">
-              <a:schemeClr val="phClr">
-                <a:satMod val="110000"/>
-                <a:lumMod val="100000"/>
-                <a:shade val="100000"/>
-              </a:schemeClr>
-            </a:gs>
-            <a:gs pos="100000">
-              <a:schemeClr val="phClr">
-                <a:lumMod val="99000"/>
-                <a:satMod val="120000"/>
-                <a:shade val="78000"/>
-              </a:schemeClr>
-            </a:gs>
-          </a:gsLst>
-          <a:lin ang="5400000" scaled="0"/>
-        </a:gradFill>
-      </a:fillStyleLst>
-      <a:lnStyleLst>
-        <a:ln w="6350" cap="flat" cmpd="sng" algn="ctr">
-          <a:solidFill>
-            <a:schemeClr val="phClr"/>
-          </a:solidFill>
-          <a:prstDash val="solid"/>
-          <a:miter lim="800000"/>
-        </a:ln>
-        <a:ln w="12700" cap="flat" cmpd="sng" algn="ctr">
-          <a:solidFill>
-            <a:schemeClr val="phClr"/>
-          </a:solidFill>
-          <a:prstDash val="solid"/>
-          <a:miter lim="800000"/>
-        </a:ln>
-        <a:ln w="19050" cap="flat" cmpd="sng" algn="ctr">
-          <a:solidFill>
-            <a:schemeClr val="phClr"/>
-          </a:solidFill>
-          <a:prstDash val="solid"/>
-          <a:miter lim="800000"/>
-        </a:ln>
-      </a:lnStyleLst>
-      <a:effectStyleLst>
-        <a:effectStyle>
-          <a:effectLst/>
-        </a:effectStyle>
-        <a:effectStyle>
-          <a:effectLst/>
-        </a:effectStyle>
-        <a:effectStyle>
-          <a:effectLst>
-            <a:outerShdw blurRad="57150" dist="19050" dir="5400000" algn="ctr" rotWithShape="0">
-              <a:srgbClr val="000000">
-                <a:alpha val="63000"/>
-              </a:srgbClr>
-            </a:outerShdw>
-          </a:effectLst>
-        </a:effectStyle>
-      </a:effectStyleLst>
-      <a:bgFillStyleLst>
-        <a:solidFill>
-          <a:schemeClr val="phClr"/>
-        </a:solidFill>
-        <a:solidFill>
-          <a:schemeClr val="phClr">
-            <a:tint val="95000"/>
-            <a:satMod val="170000"/>
-          </a:schemeClr>
-        </a:solidFill>
-        <a:gradFill rotWithShape="1">
-          <a:gsLst>
-            <a:gs pos="0">
-              <a:schemeClr val="phClr">
-                <a:tint val="93000"/>
-                <a:satMod val="150000"/>
-                <a:shade val="98000"/>
-                <a:lumMod val="102000"/>
-              </a:schemeClr>
-            </a:gs>
-            <a:gs pos="50000">
-              <a:schemeClr val="phClr">
-                <a:tint val="98000"/>
-                <a:satMod val="130000"/>
-                <a:shade val="90000"/>
-                <a:lumMod val="103000"/>
-              </a:schemeClr>
-            </a:gs>
-            <a:gs pos="100000">
-              <a:schemeClr val="phClr">
-                <a:shade val="63000"/>
-                <a:satMod val="120000"/>
-              </a:schemeClr>
-            </a:gs>
-          </a:gsLst>
-          <a:lin ang="5400000" scaled="0"/>
-        </a:gradFill>
-      </a:bgFillStyleLst>
-    </a:fmtScheme>
-  </a:themeElements>
-  <a:objectDefaults/>
-  <a:extraClrSchemeLst/>
-  <a:extLst>
-    <a:ext uri="{05A4C25C-085E-4340-85A3-A5531E510DB2}">
-      <thm15:themeFamily xmlns:thm15="http://schemas.microsoft.com/office/thememl/2012/main" name="SSE_Group_PowerPoint_Template use" id="{E4657FDB-B5CC-4A41-BF6D-183D81AD8D22}" vid="{1F5C7FD9-EB8F-2541-9465-A7ED68755437}"/>
-    </a:ext>
-  </a:extLst>
-</a:theme>
-</file>
-
-<file path=ppt/theme/theme3.xml><?xml version="1.0" encoding="utf-8"?>
-<a:theme xmlns:a="http://schemas.openxmlformats.org/drawingml/2006/main" name="Blank Slides">
-  <a:themeElements>
-    <a:clrScheme name="IFoA Colour Palette">
-      <a:dk1>
-        <a:srgbClr val="3F4548"/>
-      </a:dk1>
-      <a:lt1>
-        <a:srgbClr val="FEFFFF"/>
-      </a:lt1>
-      <a:dk2>
-        <a:srgbClr val="113458"/>
-      </a:dk2>
-      <a:lt2>
-        <a:srgbClr val="FCFDF8"/>
-      </a:lt2>
-      <a:accent1>
-        <a:srgbClr val="D9AB16"/>
-      </a:accent1>
-      <a:accent2>
-        <a:srgbClr val="D01E45"/>
-      </a:accent2>
-      <a:accent3>
-        <a:srgbClr val="EE741D"/>
-      </a:accent3>
-      <a:accent4>
-        <a:srgbClr val="11B3A2"/>
-      </a:accent4>
-      <a:accent5>
-        <a:srgbClr val="009CC8"/>
-      </a:accent5>
-      <a:accent6>
-        <a:srgbClr val="8F4693"/>
-      </a:accent6>
-      <a:hlink>
-        <a:srgbClr val="D9AB16"/>
-      </a:hlink>
-      <a:folHlink>
-        <a:srgbClr val="D9AB16"/>
       </a:folHlink>
     </a:clrScheme>
     <a:fontScheme name="Arial">

--- a/presentations/ifoa/hwle_ifoa_life_2026.pptx
+++ b/presentations/ifoa/hwle_ifoa_life_2026.pptx
@@ -11780,7 +11780,6 @@
             <a:ext cx="14020800" cy="5659894"/>
           </a:xfrm>
         </p:spPr>
-        <p:spPr/>
         <p:txBody>
           <a:bodyPr wrap="square" rtlCol="0">
             <a:normAutofit/>
@@ -12025,7 +12024,6 @@
             <a:ext cx="14020800" cy="5659894"/>
           </a:xfrm>
         </p:spPr>
-        <p:spPr/>
         <p:txBody>
           <a:bodyPr wrap="square" rtlCol="0">
             <a:normAutofit/>
@@ -12247,7 +12245,6 @@
             <a:ext cx="14020800" cy="5659894"/>
           </a:xfrm>
         </p:spPr>
-        <p:spPr/>
         <p:txBody>
           <a:bodyPr wrap="square" rtlCol="0">
             <a:normAutofit/>
@@ -12620,7 +12617,6 @@
             <a:ext cx="14020800" cy="5659894"/>
           </a:xfrm>
         </p:spPr>
-        <p:spPr/>
         <p:txBody>
           <a:bodyPr wrap="square" rtlCol="0">
             <a:normAutofit/>
@@ -13113,7 +13109,6 @@
             <a:ext cx="14020800" cy="5659894"/>
           </a:xfrm>
         </p:spPr>
-        <p:spPr/>
         <p:txBody>
           <a:bodyPr wrap="square" rtlCol="0">
             <a:normAutofit/>
@@ -13365,7 +13360,6 @@
             <a:ext cx="6896104" cy="5459310"/>
           </a:xfrm>
         </p:spPr>
-        <p:spPr/>
         <p:txBody>
           <a:bodyPr wrap="square" rtlCol="0">
             <a:normAutofit/>
@@ -13448,7 +13442,6 @@
             <a:ext cx="6896104" cy="5459309"/>
           </a:xfrm>
         </p:spPr>
-        <p:spPr/>
         <p:txBody>
           <a:bodyPr wrap="square" rtlCol="0">
             <a:normAutofit/>
@@ -13633,7 +13626,6 @@
             <a:ext cx="14020800" cy="5659894"/>
           </a:xfrm>
         </p:spPr>
-        <p:spPr/>
         <p:txBody>
           <a:bodyPr wrap="square" rtlCol="0">
             <a:normAutofit/>
@@ -13988,7 +13980,6 @@
             <a:ext cx="14020800" cy="5659894"/>
           </a:xfrm>
         </p:spPr>
-        <p:spPr/>
         <p:txBody>
           <a:bodyPr wrap="square" rtlCol="0">
             <a:normAutofit/>
@@ -14438,7 +14429,6 @@
             <a:ext cx="6896104" cy="5459309"/>
           </a:xfrm>
         </p:spPr>
-        <p:spPr/>
         <p:txBody>
           <a:bodyPr wrap="square" rtlCol="0">
             <a:normAutofit/>
@@ -14681,7 +14671,6 @@
             <a:ext cx="7835897" cy="653900"/>
           </a:xfrm>
         </p:spPr>
-        <p:spPr/>
         <p:txBody>
           <a:bodyPr wrap="square" rtlCol="0">
             <a:normAutofit/>
@@ -15036,7 +15025,6 @@
             <a:ext cx="14020800" cy="5659894"/>
           </a:xfrm>
         </p:spPr>
-        <p:spPr/>
         <p:txBody>
           <a:bodyPr wrap="square" rtlCol="0">
             <a:normAutofit/>
@@ -15943,7 +15931,6 @@
             <a:ext cx="14020800" cy="5659894"/>
           </a:xfrm>
         </p:spPr>
-        <p:spPr/>
         <p:txBody>
           <a:bodyPr wrap="square" rtlCol="0">
             <a:normAutofit/>
@@ -16152,7 +16139,6 @@
             <a:ext cx="14020800" cy="5659894"/>
           </a:xfrm>
         </p:spPr>
-        <p:spPr/>
         <p:txBody>
           <a:bodyPr wrap="square" rtlCol="0">
             <a:normAutofit/>
@@ -16392,7 +16378,6 @@
             <a:ext cx="14020800" cy="5659894"/>
           </a:xfrm>
         </p:spPr>
-        <p:spPr/>
         <p:txBody>
           <a:bodyPr wrap="square" rtlCol="0">
             <a:normAutofit/>
@@ -16618,7 +16603,6 @@
             <a:ext cx="14020800" cy="5659894"/>
           </a:xfrm>
         </p:spPr>
-        <p:spPr/>
         <p:txBody>
           <a:bodyPr wrap="square" rtlCol="0">
             <a:normAutofit/>
@@ -16852,7 +16836,6 @@
             <a:ext cx="14020800" cy="5659894"/>
           </a:xfrm>
         </p:spPr>
-        <p:spPr/>
         <p:txBody>
           <a:bodyPr wrap="square" rtlCol="0">
             <a:normAutofit/>
@@ -17230,7 +17213,6 @@
             <a:ext cx="14020800" cy="5659894"/>
           </a:xfrm>
         </p:spPr>
-        <p:spPr/>
         <p:txBody>
           <a:bodyPr wrap="square" rtlCol="0">
             <a:normAutofit/>
@@ -17449,7 +17431,6 @@
             <a:ext cx="14020800" cy="5659894"/>
           </a:xfrm>
         </p:spPr>
-        <p:spPr/>
         <p:txBody>
           <a:bodyPr wrap="square" rtlCol="0">
             <a:normAutofit/>
@@ -17815,7 +17796,6 @@
             <a:ext cx="14020800" cy="5659894"/>
           </a:xfrm>
         </p:spPr>
-        <p:spPr/>
         <p:txBody>
           <a:bodyPr wrap="square" rtlCol="0">
             <a:normAutofit/>
@@ -18194,7 +18174,6 @@
             <a:ext cx="14020800" cy="5659894"/>
           </a:xfrm>
         </p:spPr>
-        <p:spPr/>
         <p:txBody>
           <a:bodyPr wrap="square" rtlCol="0">
             <a:normAutofit/>
@@ -19293,7 +19272,6 @@
             <a:ext cx="6896104" cy="5459310"/>
           </a:xfrm>
         </p:spPr>
-        <p:spPr/>
         <p:txBody>
           <a:bodyPr wrap="square" rtlCol="0">
             <a:normAutofit/>
@@ -19367,7 +19345,6 @@
             <a:ext cx="6896104" cy="5459309"/>
           </a:xfrm>
         </p:spPr>
-        <p:spPr/>
         <p:txBody>
           <a:bodyPr wrap="square" rtlCol="0">
             <a:normAutofit/>
@@ -19915,7 +19892,6 @@
             <a:ext cx="14020800" cy="5659894"/>
           </a:xfrm>
         </p:spPr>
-        <p:spPr/>
         <p:txBody>
           <a:bodyPr wrap="square" rtlCol="0">
             <a:normAutofit/>
@@ -21599,7 +21575,6 @@
             <a:ext cx="14020800" cy="5659894"/>
           </a:xfrm>
         </p:spPr>
-        <p:spPr/>
         <p:txBody>
           <a:bodyPr wrap="square" rtlCol="0">
             <a:normAutofit/>
@@ -22186,7 +22161,6 @@
             <a:ext cx="14020800" cy="5659894"/>
           </a:xfrm>
         </p:spPr>
-        <p:spPr/>
         <p:txBody>
           <a:bodyPr wrap="square" rtlCol="0">
             <a:normAutofit/>
@@ -22903,7 +22877,6 @@
             <a:ext cx="14020800" cy="5659894"/>
           </a:xfrm>
         </p:spPr>
-        <p:spPr/>
         <p:txBody>
           <a:bodyPr wrap="square" rtlCol="0">
             <a:normAutofit/>
@@ -23096,7 +23069,6 @@
             <a:ext cx="14020800" cy="5659894"/>
           </a:xfrm>
         </p:spPr>
-        <p:spPr/>
         <p:txBody>
           <a:bodyPr wrap="square" rtlCol="0">
             <a:normAutofit/>
@@ -23666,7 +23638,6 @@
             <a:ext cx="14020800" cy="5659894"/>
           </a:xfrm>
         </p:spPr>
-        <p:spPr/>
         <p:txBody>
           <a:bodyPr wrap="square" rtlCol="0">
             <a:normAutofit/>
@@ -24124,7 +24095,6 @@
             <a:ext cx="14020800" cy="5659894"/>
           </a:xfrm>
         </p:spPr>
-        <p:spPr/>
         <p:txBody>
           <a:bodyPr wrap="square" rtlCol="0">
             <a:normAutofit/>
@@ -24382,7 +24352,6 @@
             <a:ext cx="14020800" cy="5659894"/>
           </a:xfrm>
         </p:spPr>
-        <p:spPr/>
         <p:txBody>
           <a:bodyPr wrap="square" rtlCol="0">
             <a:normAutofit/>
@@ -24611,7 +24580,6 @@
             <a:ext cx="14020800" cy="5659894"/>
           </a:xfrm>
         </p:spPr>
-        <p:spPr/>
         <p:txBody>
           <a:bodyPr wrap="square" rtlCol="0">
             <a:normAutofit/>

--- a/presentations/ifoa/hwle_ifoa_life_2026.pptx
+++ b/presentations/ifoa/hwle_ifoa_life_2026.pptx
@@ -5,7 +5,7 @@
     <p:sldMasterId id="2147484060" r:id="rId4"/>
   </p:sldMasterIdLst>
   <p:notesMasterIdLst>
-    <p:notesMasterId r:id="rId56"/>
+    <p:notesMasterId r:id="rId58"/>
   </p:notesMasterIdLst>
   <p:sldIdLst>
     <p:sldId id="256" r:id="rId5"/>
@@ -59,6 +59,8 @@
     <p:sldId id="304" r:id="rId53"/>
     <p:sldId id="305" r:id="rId54"/>
     <p:sldId id="306" r:id="rId55"/>
+    <p:sldId id="307" r:id="rId56"/>
+    <p:sldId id="308" r:id="rId57"/>
   </p:sldIdLst>
   <p:sldSz cx="16256000" cy="9144000"/>
   <p:notesSz cx="16256000" cy="9144000"/>
@@ -660,7 +662,35 @@
             </a:pPr>
             <a:r>
               <a:rPr/>
-              <a:t>Age 20: 94% of working life to 65 spent working, 2.4% NN, 3.6% lost to death. Age 50: 90.7% / 4.9% / 4.4%.</a:t>
+              <a:t>Jon Minton, Knowledge Tree and Butterfly: one-line intro on taking over from Chris.</a:t>
+            </a:r>
+          </a:p>
+          <a:p>
+            <a:pPr lvl="0" indent="0" marL="0">
+              <a:buNone/>
+            </a:pPr>
+          </a:p>
+          <a:p>
+            <a:pPr lvl="0" indent="0" marL="0">
+              <a:buNone/>
+            </a:pPr>
+            <a:r>
+              <a:rPr/>
+              <a:t>About 1.5 minutes. A reminder, not a lecture: everyone here has seen multi-state life tables. Panel (a) is the life table; (b) adds a state you can leave; (c) is the shape of the health-and-work problem. Double border = absorbing.</a:t>
+            </a:r>
+          </a:p>
+          <a:p>
+            <a:pPr lvl="0" indent="0" marL="0">
+              <a:buNone/>
+            </a:pPr>
+          </a:p>
+          <a:p>
+            <a:pPr lvl="0" indent="0" marL="0">
+              <a:buNone/>
+            </a:pPr>
+            <a:r>
+              <a:rPr/>
+              <a:t>Retirement: “Hotel California”: you can check out any time you like, but you can never leave. In the model it is one-way; in life people do unretire, and pension-age policy cares about exactly that.</a:t>
             </a:r>
           </a:p>
         </p:txBody>
@@ -682,7 +712,253 @@
           <a:p>
             <a:fld id="{818DC993-C0AB-7145-A5E3-AB377573BF85}" type="slidenum">
               <a:rPr lang="en-US"/>
-              <a:t>41</a:t>
+              <a:t>15</a:t>
+            </a:fld>
+            <a:endParaRPr lang="en-US"/>
+          </a:p>
+        </p:txBody>
+      </p:sp>
+    </p:spTree>
+  </p:cSld>
+</p:notes>
+</file>
+
+<file path=ppt/notesSlides/notesSlide3.xml><?xml version="1.0" encoding="utf-8"?>
+<p:notes xmlns:a="http://schemas.openxmlformats.org/drawingml/2006/main" xmlns:r="http://schemas.openxmlformats.org/officeDocument/2006/relationships" xmlns:p="http://schemas.openxmlformats.org/presentationml/2006/main">
+  <p:cSld>
+    <p:spTree>
+      <p:nvGrpSpPr>
+        <p:cNvPr id="1" name=""/>
+        <p:cNvGrpSpPr/>
+        <p:nvPr/>
+      </p:nvGrpSpPr>
+      <p:grpSpPr>
+        <a:xfrm>
+          <a:off x="0" y="0"/>
+          <a:ext cx="0" cy="0"/>
+          <a:chOff x="0" y="0"/>
+          <a:chExt cx="0" cy="0"/>
+        </a:xfrm>
+      </p:grpSpPr>
+      <p:sp>
+        <p:nvSpPr>
+          <p:cNvPr id="2" name="Slide Image Placeholder 1"/>
+          <p:cNvSpPr>
+            <a:spLocks noGrp="1" noRot="1" noChangeAspect="1"/>
+          </p:cNvSpPr>
+          <p:nvPr>
+            <p:ph type="sldImg"/>
+          </p:nvPr>
+        </p:nvSpPr>
+        <p:spPr/>
+      </p:sp>
+      <p:sp>
+        <p:nvSpPr>
+          <p:cNvPr id="3" name="Notes Placeholder 2"/>
+          <p:cNvSpPr>
+            <a:spLocks noGrp="1"/>
+          </p:cNvSpPr>
+          <p:nvPr>
+            <p:ph type="body" idx="1"/>
+          </p:nvPr>
+        </p:nvSpPr>
+        <p:spPr/>
+        <p:txBody>
+          <a:bodyPr/>
+          <a:lstStyle/>
+          <a:p>
+            <a:pPr lvl="0" indent="0" marL="0">
+              <a:buNone/>
+            </a:pPr>
+            <a:r>
+              <a:rPr/>
+              <a:t>About 1.5 minutes. The point for this audience: health economists and actuaries build the same kind of model and ask different questions of it. Health economics attaches utilities and costs to states to decide what to fund; actuaries attach durations and money to states to price and reserve. Working-age ill health is a place where both questions matter: the policy question (Keep Britain Working, from Chris) and the insurance question (David’s section).</a:t>
+            </a:r>
+          </a:p>
+        </p:txBody>
+      </p:sp>
+      <p:sp>
+        <p:nvSpPr>
+          <p:cNvPr id="4" name="Slide Number Placeholder 3"/>
+          <p:cNvSpPr>
+            <a:spLocks noGrp="1"/>
+          </p:cNvSpPr>
+          <p:nvPr>
+            <p:ph type="sldNum" sz="quarter" idx="10"/>
+          </p:nvPr>
+        </p:nvSpPr>
+        <p:spPr/>
+        <p:txBody>
+          <a:bodyPr/>
+          <a:lstStyle/>
+          <a:p>
+            <a:fld id="{818DC993-C0AB-7145-A5E3-AB377573BF85}" type="slidenum">
+              <a:rPr lang="en-US"/>
+              <a:t>16</a:t>
+            </a:fld>
+            <a:endParaRPr lang="en-US"/>
+          </a:p>
+        </p:txBody>
+      </p:sp>
+    </p:spTree>
+  </p:cSld>
+</p:notes>
+</file>
+
+<file path=ppt/notesSlides/notesSlide4.xml><?xml version="1.0" encoding="utf-8"?>
+<p:notes xmlns:a="http://schemas.openxmlformats.org/drawingml/2006/main" xmlns:r="http://schemas.openxmlformats.org/officeDocument/2006/relationships" xmlns:p="http://schemas.openxmlformats.org/presentationml/2006/main">
+  <p:cSld>
+    <p:spTree>
+      <p:nvGrpSpPr>
+        <p:cNvPr id="1" name=""/>
+        <p:cNvGrpSpPr/>
+        <p:nvPr/>
+      </p:nvGrpSpPr>
+      <p:grpSpPr>
+        <a:xfrm>
+          <a:off x="0" y="0"/>
+          <a:ext cx="0" cy="0"/>
+          <a:chOff x="0" y="0"/>
+          <a:chExt cx="0" cy="0"/>
+        </a:xfrm>
+      </p:grpSpPr>
+      <p:sp>
+        <p:nvSpPr>
+          <p:cNvPr id="2" name="Slide Image Placeholder 1"/>
+          <p:cNvSpPr>
+            <a:spLocks noGrp="1" noRot="1" noChangeAspect="1"/>
+          </p:cNvSpPr>
+          <p:nvPr>
+            <p:ph type="sldImg"/>
+          </p:nvPr>
+        </p:nvSpPr>
+        <p:spPr/>
+      </p:sp>
+      <p:sp>
+        <p:nvSpPr>
+          <p:cNvPr id="3" name="Notes Placeholder 2"/>
+          <p:cNvSpPr>
+            <a:spLocks noGrp="1"/>
+          </p:cNvSpPr>
+          <p:nvPr>
+            <p:ph type="body" idx="1"/>
+          </p:nvPr>
+        </p:nvSpPr>
+        <p:spPr/>
+        <p:txBody>
+          <a:bodyPr/>
+          <a:lstStyle/>
+          <a:p>
+            <a:pPr lvl="0" indent="0" marL="0">
+              <a:buNone/>
+            </a:pPr>
+            <a:r>
+              <a:rPr/>
+              <a:t>About 2 minutes, ending on the hand-off. Survey data are the only view of the whole population, which is why every published UK HWLE estimate so far uses them (ELSA: Lynch 2022, Parker 2020; supplement). But annual waves mean the model can only be a one-year Markov chain: what happened between interviews is invisible, and there is no clock on how long someone has been sick. Actuarial time-to-event data give dated claim inceptions and recoveries, with recovery depending on how long the claim has run. Hand over: “David will show what that buys us: healthy working life expectancy from CMI income protection experience.”</a:t>
+            </a:r>
+          </a:p>
+        </p:txBody>
+      </p:sp>
+      <p:sp>
+        <p:nvSpPr>
+          <p:cNvPr id="4" name="Slide Number Placeholder 3"/>
+          <p:cNvSpPr>
+            <a:spLocks noGrp="1"/>
+          </p:cNvSpPr>
+          <p:nvPr>
+            <p:ph type="sldNum" sz="quarter" idx="10"/>
+          </p:nvPr>
+        </p:nvSpPr>
+        <p:spPr/>
+        <p:txBody>
+          <a:bodyPr/>
+          <a:lstStyle/>
+          <a:p>
+            <a:fld id="{818DC993-C0AB-7145-A5E3-AB377573BF85}" type="slidenum">
+              <a:rPr lang="en-US"/>
+              <a:t>17</a:t>
+            </a:fld>
+            <a:endParaRPr lang="en-US"/>
+          </a:p>
+        </p:txBody>
+      </p:sp>
+    </p:spTree>
+  </p:cSld>
+</p:notes>
+</file>
+
+<file path=ppt/notesSlides/notesSlide5.xml><?xml version="1.0" encoding="utf-8"?>
+<p:notes xmlns:a="http://schemas.openxmlformats.org/drawingml/2006/main" xmlns:r="http://schemas.openxmlformats.org/officeDocument/2006/relationships" xmlns:p="http://schemas.openxmlformats.org/presentationml/2006/main">
+  <p:cSld>
+    <p:spTree>
+      <p:nvGrpSpPr>
+        <p:cNvPr id="1" name=""/>
+        <p:cNvGrpSpPr/>
+        <p:nvPr/>
+      </p:nvGrpSpPr>
+      <p:grpSpPr>
+        <a:xfrm>
+          <a:off x="0" y="0"/>
+          <a:ext cx="0" cy="0"/>
+          <a:chOff x="0" y="0"/>
+          <a:chExt cx="0" cy="0"/>
+        </a:xfrm>
+      </p:grpSpPr>
+      <p:sp>
+        <p:nvSpPr>
+          <p:cNvPr id="2" name="Slide Image Placeholder 1"/>
+          <p:cNvSpPr>
+            <a:spLocks noGrp="1" noRot="1" noChangeAspect="1"/>
+          </p:cNvSpPr>
+          <p:nvPr>
+            <p:ph type="sldImg"/>
+          </p:nvPr>
+        </p:nvSpPr>
+        <p:spPr/>
+      </p:sp>
+      <p:sp>
+        <p:nvSpPr>
+          <p:cNvPr id="3" name="Notes Placeholder 2"/>
+          <p:cNvSpPr>
+            <a:spLocks noGrp="1"/>
+          </p:cNvSpPr>
+          <p:nvPr>
+            <p:ph type="body" idx="1"/>
+          </p:nvPr>
+        </p:nvSpPr>
+        <p:spPr/>
+        <p:txBody>
+          <a:bodyPr/>
+          <a:lstStyle/>
+          <a:p>
+            <a:pPr lvl="0" indent="0" marL="0">
+              <a:buNone/>
+            </a:pPr>
+            <a:r>
+              <a:rPr/>
+              <a:t>Age 20: 94% of working life to 65 spent working, 2.4% NN, 3.6% lost to death. Age 50: 90.7% / 4.9% / 4.4%.</a:t>
+            </a:r>
+          </a:p>
+        </p:txBody>
+      </p:sp>
+      <p:sp>
+        <p:nvSpPr>
+          <p:cNvPr id="4" name="Slide Number Placeholder 3"/>
+          <p:cNvSpPr>
+            <a:spLocks noGrp="1"/>
+          </p:cNvSpPr>
+          <p:nvPr>
+            <p:ph type="sldNum" sz="quarter" idx="10"/>
+          </p:nvPr>
+        </p:nvSpPr>
+        <p:spPr/>
+        <p:txBody>
+          <a:bodyPr/>
+          <a:lstStyle/>
+          <a:p>
+            <a:fld id="{818DC993-C0AB-7145-A5E3-AB377573BF85}" type="slidenum">
+              <a:rPr lang="en-US"/>
+              <a:t>43</a:t>
             </a:fld>
             <a:endParaRPr lang="en-US"/>
           </a:p>
@@ -12436,7 +12712,7 @@
             </a:pPr>
             <a:r>
               <a:rPr/>
-              <a:t>Public health approaches with survey data [JON · 5–10 min]</a:t>
+              <a:t>From survey data to administrative data [JON · 5 min]</a:t>
             </a:r>
           </a:p>
         </p:txBody>
@@ -12578,7 +12854,7 @@
         <p:spPr>
           <a:xfrm>
             <a:off x="1117601" y="405087"/>
-            <a:ext cx="14020798" cy="818882"/>
+            <a:ext cx="14020798" cy="809696"/>
           </a:xfrm>
         </p:spPr>
         <p:txBody>
@@ -12590,31 +12866,61 @@
             </a:pPr>
             <a:r>
               <a:rPr/>
-              <a:t>How HWLE has been estimated so far</a:t>
-            </a:r>
-          </a:p>
-        </p:txBody>
-      </p:sp>
-      <p:sp>
-        <p:nvSpPr>
-          <p:cNvPr id="23" name="Content Placeholder 9">
-            <a:extLst>
-              <a:ext uri="{FF2B5EF4-FFF2-40B4-BE49-F238E27FC236}">
-                <a16:creationId xmlns:a16="http://schemas.microsoft.com/office/drawing/2014/main" id="{0C532851-4697-4B02-B344-E4852AF78CBF}"/>
-              </a:ext>
-            </a:extLst>
-          </p:cNvPr>
-          <p:cNvSpPr>
-            <a:spLocks noGrp="1"/>
-          </p:cNvSpPr>
-          <p:nvPr>
-            <p:ph hasCustomPrompt="1" idx="13" sz="quarter"/>
-          </p:nvPr>
-        </p:nvSpPr>
-        <p:spPr>
-          <a:xfrm>
-            <a:off x="1104904" y="2269323"/>
-            <a:ext cx="14020800" cy="5659894"/>
+              <a:t>Multi-state models: a reminder</a:t>
+            </a:r>
+          </a:p>
+        </p:txBody>
+      </p:sp>
+      <p:pic>
+        <p:nvPicPr>
+          <p:cNvPr descr="media/bridge_states_stacked.png" id="0" name="Picture 1"/>
+          <p:cNvPicPr>
+            <a:picLocks noGrp="1" noChangeAspect="1"/>
+          </p:cNvPicPr>
+          <p:nvPr/>
+        </p:nvPicPr>
+        <p:blipFill>
+          <a:blip r:embed="rId3"/>
+          <a:stretch>
+            <a:fillRect/>
+          </a:stretch>
+        </p:blipFill>
+        <p:spPr bwMode="auto">
+          <a:xfrm>
+            <a:off x="1752600" y="2260600"/>
+            <a:ext cx="5600700" cy="5448300"/>
+          </a:xfrm>
+          <a:prstGeom prst="rect">
+            <a:avLst/>
+          </a:prstGeom>
+          <a:noFill/>
+          <a:ln w="9525">
+            <a:noFill/>
+            <a:headEnd/>
+            <a:tailEnd/>
+          </a:ln>
+        </p:spPr>
+      </p:pic>
+      <p:sp>
+        <p:nvSpPr>
+          <p:cNvPr id="9" name="Content Placeholder 9">
+            <a:extLst>
+              <a:ext uri="{FF2B5EF4-FFF2-40B4-BE49-F238E27FC236}">
+                <a16:creationId xmlns:a16="http://schemas.microsoft.com/office/drawing/2014/main" id="{8BE77E02-92D4-079E-ADD9-4455ABC3C3FA}"/>
+              </a:ext>
+            </a:extLst>
+          </p:cNvPr>
+          <p:cNvSpPr>
+            <a:spLocks noGrp="1"/>
+          </p:cNvSpPr>
+          <p:nvPr>
+            <p:ph hasCustomPrompt="1" idx="25" sz="quarter"/>
+          </p:nvPr>
+        </p:nvSpPr>
+        <p:spPr>
+          <a:xfrm>
+            <a:off x="8229600" y="2269322"/>
+            <a:ext cx="6896104" cy="5459309"/>
           </a:xfrm>
         </p:spPr>
         <p:txBody>
@@ -12626,77 +12932,59 @@
             <a:pPr lvl="0"/>
             <a:r>
               <a:rPr/>
-              <a:t>All published UK HWLE estimates use </a:t>
+              <a:t>A life table is a two-state model. Add states, and the same machinery gives </a:t>
             </a:r>
             <a:r>
               <a:rPr b="1"/>
-              <a:t>survey data</a:t>
-            </a:r>
-            <a:r>
-              <a:rPr/>
-              <a:t>, mainly ELSA (age 50+)</a:t>
+              <a:t>expected time in each state</a:t>
+            </a:r>
+            <a:r>
+              <a:rPr/>
+              <a:t>: HWLE is expected years </a:t>
+            </a:r>
+            <a:r>
+              <a:rPr i="1"/>
+              <a:t>working</a:t>
+            </a:r>
+            <a:r>
+              <a:rPr/>
+              <a:t>.</a:t>
             </a:r>
           </a:p>
           <a:p>
             <a:pPr lvl="0"/>
             <a:r>
               <a:rPr b="1"/>
-              <a:t>Sullivan method</a:t>
-            </a:r>
-            <a:r>
-              <a:rPr/>
-              <a:t>: life table × cross-sectional </a:t>
-            </a:r>
-            <a:r>
-              <a:rPr i="1"/>
-              <a:t>prevalence</a:t>
-            </a:r>
-            <a:r>
-              <a:rPr/>
-              <a:t> of health states</a:t>
+              <a:t>Absorbing</a:t>
+            </a:r>
+            <a:r>
+              <a:rPr/>
+              <a:t> states can’t be left (death, double border). </a:t>
+            </a:r>
+            <a:r>
+              <a:rPr b="1"/>
+              <a:t>Non-absorbing</a:t>
+            </a:r>
+            <a:r>
+              <a:rPr/>
+              <a:t> states can: sickness allows recovery.</a:t>
             </a:r>
           </a:p>
           <a:p>
             <a:pPr lvl="0"/>
             <a:r>
-              <a:rPr b="1"/>
-              <a:t>Multi-state (Markov) models</a:t>
-            </a:r>
-            <a:r>
-              <a:rPr/>
-              <a:t>: transition rates between states, estimated from repeated waves</a:t>
-            </a:r>
-          </a:p>
-          <a:p>
-            <a:pPr lvl="1"/>
-            <a:r>
-              <a:rPr/>
-              <a:t>Lynch et al. 2022 — 3 states, ELSA waves 2–6, n ≈ 11,500</a:t>
-            </a:r>
-          </a:p>
-          <a:p>
-            <a:pPr lvl="1"/>
-            <a:r>
-              <a:rPr/>
-              <a:t>Parker et al. 2020 — 5 states, ELSA waves 1–6, n ≈ 15,300; HWLE at 50 ≈ </a:t>
-            </a:r>
-            <a:r>
-              <a:rPr b="1"/>
-              <a:t>10.8 years</a:t>
-            </a:r>
-            <a:r>
-              <a:rPr/>
-              <a:t> for those healthy and working at 50</a:t>
-            </a:r>
-          </a:p>
-        </p:txBody>
-      </p:sp>
-      <p:sp>
-        <p:nvSpPr>
-          <p:cNvPr id="6" name="Footer Placeholder 4">
-            <a:extLst>
-              <a:ext uri="{FF2B5EF4-FFF2-40B4-BE49-F238E27FC236}">
-                <a16:creationId xmlns:a16="http://schemas.microsoft.com/office/drawing/2014/main" id="{8F9D7237-5CD7-6037-7D60-81DA36BE7AA4}"/>
+              <a:rPr/>
+              <a:t>Retirement is usually modelled as one-way, but in life it isn’t quite absorbing.</a:t>
+            </a:r>
+          </a:p>
+        </p:txBody>
+      </p:sp>
+      <p:sp>
+        <p:nvSpPr>
+          <p:cNvPr id="7" name="Footer Placeholder 4">
+            <a:extLst>
+              <a:ext uri="{FF2B5EF4-FFF2-40B4-BE49-F238E27FC236}">
+                <a16:creationId xmlns:a16="http://schemas.microsoft.com/office/drawing/2014/main" id="{6F6C5742-1F6C-A710-52FA-1248F020C691}"/>
               </a:ext>
             </a:extLst>
           </p:cNvPr>
@@ -12738,10 +13026,10 @@
       </p:sp>
       <p:sp>
         <p:nvSpPr>
-          <p:cNvPr id="7" name="Slide Number Placeholder 5">
-            <a:extLst>
-              <a:ext uri="{FF2B5EF4-FFF2-40B4-BE49-F238E27FC236}">
-                <a16:creationId xmlns:a16="http://schemas.microsoft.com/office/drawing/2014/main" id="{7B4B538E-25FF-2CD8-CF5C-A8AD3F07FE13}"/>
+          <p:cNvPr id="8" name="Slide Number Placeholder 5">
+            <a:extLst>
+              <a:ext uri="{FF2B5EF4-FFF2-40B4-BE49-F238E27FC236}">
+                <a16:creationId xmlns:a16="http://schemas.microsoft.com/office/drawing/2014/main" id="{A628090A-C45A-2639-D2CB-86DE80ECECC6}"/>
               </a:ext>
             </a:extLst>
           </p:cNvPr>
@@ -12809,126 +13097,239 @@
           <a:chExt cx="0" cy="0"/>
         </a:xfrm>
       </p:grpSpPr>
-      <p:pic>
-        <p:nvPicPr>
-          <p:cNvPr descr="media/image1.png" id="0" name="Picture 1"/>
-          <p:cNvPicPr>
-            <a:picLocks noGrp="1" noChangeAspect="1"/>
-          </p:cNvPicPr>
-          <p:nvPr/>
-        </p:nvPicPr>
-        <p:blipFill>
-          <a:blip r:embed="rId2"/>
-          <a:stretch>
-            <a:fillRect/>
-          </a:stretch>
-        </p:blipFill>
-        <p:spPr bwMode="auto">
-          <a:xfrm>
-            <a:off x="1536700" y="2260600"/>
-            <a:ext cx="6032500" cy="4940300"/>
-          </a:xfrm>
-          <a:prstGeom prst="rect">
-            <a:avLst/>
-          </a:prstGeom>
-          <a:noFill/>
-          <a:ln w="9525">
-            <a:noFill/>
-            <a:headEnd/>
-            <a:tailEnd/>
-          </a:ln>
-        </p:spPr>
-      </p:pic>
-      <p:sp>
-        <p:nvSpPr>
-          <p:cNvPr id="9" name="TextBox 3"/>
-          <p:cNvSpPr txBox="1"/>
-          <p:nvPr>
-            <p:ph idx="1"/>
-          </p:nvPr>
-        </p:nvSpPr>
-        <p:spPr>
-          <a:xfrm>
-            <a:off x="1104900" y="7200900"/>
-            <a:ext cx="6896100" cy="508000"/>
-          </a:xfrm>
-          <a:prstGeom prst="rect">
-            <a:avLst/>
-          </a:prstGeom>
-          <a:noFill/>
+      <p:sp>
+        <p:nvSpPr>
+          <p:cNvPr id="14" name="Title 1">
+            <a:extLst>
+              <a:ext uri="{FF2B5EF4-FFF2-40B4-BE49-F238E27FC236}">
+                <a16:creationId xmlns:a16="http://schemas.microsoft.com/office/drawing/2014/main" id="{EF499182-B1CD-4399-99FD-7B1CA914FD59}"/>
+              </a:ext>
+            </a:extLst>
+          </p:cNvPr>
+          <p:cNvSpPr>
+            <a:spLocks noGrp="1"/>
+          </p:cNvSpPr>
+          <p:nvPr>
+            <p:ph hasCustomPrompt="1" type="title"/>
+          </p:nvPr>
+        </p:nvSpPr>
+        <p:spPr>
+          <a:xfrm>
+            <a:off x="1117601" y="405087"/>
+            <a:ext cx="14020798" cy="809696"/>
+          </a:xfrm>
         </p:spPr>
         <p:txBody>
           <a:bodyPr/>
           <a:lstStyle/>
           <a:p>
-            <a:pPr lvl="0" indent="0" marL="0" algn="ctr">
+            <a:pPr lvl="0" indent="0" marL="0">
               <a:buNone/>
             </a:pPr>
             <a:r>
               <a:rPr/>
-              <a:t>Lynch 3-state model</a:t>
-            </a:r>
-          </a:p>
-        </p:txBody>
-      </p:sp>
-      <p:pic>
-        <p:nvPicPr>
-          <p:cNvPr descr="media/image2.png" id="0" name="Picture 1"/>
-          <p:cNvPicPr>
-            <a:picLocks noGrp="1" noChangeAspect="1"/>
-          </p:cNvPicPr>
-          <p:nvPr/>
-        </p:nvPicPr>
-        <p:blipFill>
-          <a:blip r:embed="rId3"/>
-          <a:stretch>
-            <a:fillRect/>
-          </a:stretch>
-        </p:blipFill>
-        <p:spPr bwMode="auto">
-          <a:xfrm>
-            <a:off x="8229600" y="2501900"/>
-            <a:ext cx="6896100" cy="4445000"/>
-          </a:xfrm>
-          <a:prstGeom prst="rect">
-            <a:avLst/>
-          </a:prstGeom>
-          <a:noFill/>
-          <a:ln w="9525">
-            <a:noFill/>
-            <a:headEnd/>
-            <a:tailEnd/>
-          </a:ln>
-        </p:spPr>
-      </p:pic>
-      <p:sp>
-        <p:nvSpPr>
-          <p:cNvPr id="10" name="TextBox 3"/>
-          <p:cNvSpPr txBox="1"/>
-          <p:nvPr>
-            <p:ph idx="1"/>
-          </p:nvPr>
-        </p:nvSpPr>
-        <p:spPr>
-          <a:xfrm>
-            <a:off x="8229600" y="7200900"/>
-            <a:ext cx="6896100" cy="508000"/>
-          </a:xfrm>
-          <a:prstGeom prst="rect">
-            <a:avLst/>
-          </a:prstGeom>
-          <a:noFill/>
-        </p:spPr>
-        <p:txBody>
-          <a:bodyPr/>
+              <a:t>Same machinery, two traditions</a:t>
+            </a:r>
+          </a:p>
+        </p:txBody>
+      </p:sp>
+      <p:sp>
+        <p:nvSpPr>
+          <p:cNvPr id="23" name="Content Placeholder 9">
+            <a:extLst>
+              <a:ext uri="{FF2B5EF4-FFF2-40B4-BE49-F238E27FC236}">
+                <a16:creationId xmlns:a16="http://schemas.microsoft.com/office/drawing/2014/main" id="{0C532851-4697-4B02-B344-E4852AF78CBF}"/>
+              </a:ext>
+            </a:extLst>
+          </p:cNvPr>
+          <p:cNvSpPr>
+            <a:spLocks noGrp="1"/>
+          </p:cNvSpPr>
+          <p:nvPr>
+            <p:ph hasCustomPrompt="1" idx="13" sz="quarter"/>
+          </p:nvPr>
+        </p:nvSpPr>
+        <p:spPr>
+          <a:xfrm>
+            <a:off x="1104904" y="2269323"/>
+            <a:ext cx="6896104" cy="5459310"/>
+          </a:xfrm>
+        </p:spPr>
+        <p:txBody>
+          <a:bodyPr wrap="square" rtlCol="0">
+            <a:normAutofit/>
+          </a:bodyPr>
           <a:lstStyle/>
           <a:p>
-            <a:pPr lvl="0" indent="0" marL="0" algn="ctr">
+            <a:pPr lvl="0" indent="0" marL="0">
               <a:buNone/>
             </a:pPr>
             <a:r>
-              <a:rPr/>
-              <a:t>Parker 5-state model</a:t>
+              <a:rPr b="1"/>
+              <a:t>Health economics</a:t>
+            </a:r>
+          </a:p>
+          <a:p>
+            <a:pPr lvl="0"/>
+            <a:r>
+              <a:rPr/>
+              <a:t>Markov </a:t>
+            </a:r>
+            <a:r>
+              <a:rPr i="1"/>
+              <a:t>cohort</a:t>
+            </a:r>
+            <a:r>
+              <a:rPr/>
+              <a:t> models with many states, recovery included</a:t>
+            </a:r>
+          </a:p>
+          <a:p>
+            <a:pPr lvl="0"/>
+            <a:r>
+              <a:rPr/>
+              <a:t>Each state carries a </a:t>
+            </a:r>
+            <a:r>
+              <a:rPr b="1"/>
+              <a:t>cost</a:t>
+            </a:r>
+            <a:r>
+              <a:rPr/>
+              <a:t> and a </a:t>
+            </a:r>
+            <a:r>
+              <a:rPr b="1"/>
+              <a:t>utility</a:t>
+            </a:r>
+            <a:r>
+              <a:rPr/>
+              <a:t> (quality of life)</a:t>
+            </a:r>
+          </a:p>
+          <a:p>
+            <a:pPr lvl="0"/>
+            <a:r>
+              <a:rPr/>
+              <a:t>Question: </a:t>
+            </a:r>
+            <a:r>
+              <a:rPr i="1"/>
+              <a:t>is this intervention worth paying for?</a:t>
+            </a:r>
+            <a:r>
+              <a:rPr/>
+              <a:t> (cost per QALY)</a:t>
+            </a:r>
+          </a:p>
+          <a:p>
+            <a:pPr lvl="0"/>
+            <a:r>
+              <a:rPr/>
+              <a:t>Usually parameterised from trials and </a:t>
+            </a:r>
+            <a:r>
+              <a:rPr b="1"/>
+              <a:t>surveys</a:t>
+            </a:r>
+          </a:p>
+        </p:txBody>
+      </p:sp>
+      <p:sp>
+        <p:nvSpPr>
+          <p:cNvPr id="9" name="Content Placeholder 9">
+            <a:extLst>
+              <a:ext uri="{FF2B5EF4-FFF2-40B4-BE49-F238E27FC236}">
+                <a16:creationId xmlns:a16="http://schemas.microsoft.com/office/drawing/2014/main" id="{8BE77E02-92D4-079E-ADD9-4455ABC3C3FA}"/>
+              </a:ext>
+            </a:extLst>
+          </p:cNvPr>
+          <p:cNvSpPr>
+            <a:spLocks noGrp="1"/>
+          </p:cNvSpPr>
+          <p:nvPr>
+            <p:ph hasCustomPrompt="1" idx="25" sz="quarter"/>
+          </p:nvPr>
+        </p:nvSpPr>
+        <p:spPr>
+          <a:xfrm>
+            <a:off x="8229600" y="2269322"/>
+            <a:ext cx="6896104" cy="5459309"/>
+          </a:xfrm>
+        </p:spPr>
+        <p:txBody>
+          <a:bodyPr wrap="square" rtlCol="0">
+            <a:normAutofit/>
+          </a:bodyPr>
+          <a:lstStyle/>
+          <a:p>
+            <a:pPr lvl="0" indent="0" marL="0">
+              <a:buNone/>
+            </a:pPr>
+            <a:r>
+              <a:rPr b="1"/>
+              <a:t>Actuarial</a:t>
+            </a:r>
+          </a:p>
+          <a:p>
+            <a:pPr lvl="0"/>
+            <a:r>
+              <a:rPr/>
+              <a:t>Multi-state models from </a:t>
+            </a:r>
+            <a:r>
+              <a:rPr b="1"/>
+              <a:t>dated events</a:t>
+            </a:r>
+            <a:r>
+              <a:rPr/>
+              <a:t> (time-to-event)</a:t>
+            </a:r>
+          </a:p>
+          <a:p>
+            <a:pPr lvl="0"/>
+            <a:r>
+              <a:rPr/>
+              <a:t>Rates can depend on </a:t>
+            </a:r>
+            <a:r>
+              <a:rPr b="1"/>
+              <a:t>duration</a:t>
+            </a:r>
+            <a:r>
+              <a:rPr/>
+              <a:t> in a state</a:t>
+            </a:r>
+          </a:p>
+          <a:p>
+            <a:pPr lvl="0"/>
+            <a:r>
+              <a:rPr/>
+              <a:t>Question: </a:t>
+            </a:r>
+            <a:r>
+              <a:rPr i="1"/>
+              <a:t>how long, and at what cost, in each state?</a:t>
+            </a:r>
+          </a:p>
+          <a:p>
+            <a:pPr lvl="0"/>
+            <a:r>
+              <a:rPr/>
+              <a:t>Usually parameterised from </a:t>
+            </a:r>
+            <a:r>
+              <a:rPr b="1"/>
+              <a:t>experience data</a:t>
+            </a:r>
+          </a:p>
+          <a:p>
+            <a:pPr lvl="0" indent="0" marL="0">
+              <a:buNone/>
+            </a:pPr>
+            <a:r>
+              <a:rPr i="1"/>
+              <a:t>HWLE sits between them: a public-health question answered with actuarial tools.</a:t>
             </a:r>
           </a:p>
         </p:txBody>
@@ -13070,7 +13471,7 @@
         <p:spPr>
           <a:xfrm>
             <a:off x="1117601" y="405087"/>
-            <a:ext cx="14020798" cy="818882"/>
+            <a:ext cx="14020798" cy="809696"/>
           </a:xfrm>
         </p:spPr>
         <p:txBody>
@@ -13082,7 +13483,7 @@
             </a:pPr>
             <a:r>
               <a:rPr/>
-              <a:t>Modelling transitions in UKHLS (Understanding Society)</a:t>
+              <a:t>What survey data give us, and what they force on us</a:t>
             </a:r>
           </a:p>
         </p:txBody>
@@ -13106,7 +13507,7 @@
         <p:spPr>
           <a:xfrm>
             <a:off x="1104904" y="2269323"/>
-            <a:ext cx="14020800" cy="5659894"/>
+            <a:ext cx="6896104" cy="5459310"/>
           </a:xfrm>
         </p:spPr>
         <p:txBody>
@@ -13115,81 +13516,170 @@
           </a:bodyPr>
           <a:lstStyle/>
           <a:p>
-            <a:pPr lvl="0"/>
-            <a:r>
-              <a:rPr/>
-              <a:t>Household panel, waves 1–13 (2009–2022), all working ages — not just 50+</a:t>
-            </a:r>
-          </a:p>
-          <a:p>
-            <a:pPr lvl="0"/>
-            <a:r>
-              <a:rPr/>
-              <a:t>Economic status: employed / unemployed / long-term sick / student / carer / retired / other</a:t>
-            </a:r>
-          </a:p>
-          <a:p>
-            <a:pPr lvl="0"/>
-            <a:r>
-              <a:rPr/>
-              <a:t>Multinomial model of </a:t>
-            </a:r>
-            <a:r>
-              <a:rPr i="1"/>
-              <a:t>next-wave</a:t>
-            </a:r>
-            <a:r>
-              <a:rPr/>
-              <a:t> status given </a:t>
-            </a:r>
-            <a:r>
-              <a:rPr i="1"/>
-              <a:t>this-wave</a:t>
-            </a:r>
-            <a:r>
-              <a:rPr/>
-              <a:t> status, age, sex — a Markov chain from survey data</a:t>
-            </a:r>
-          </a:p>
-          <a:p>
-            <a:pPr lvl="0"/>
-            <a:r>
-              <a:rPr/>
-              <a:t>Add health (SF-12 mental &amp; physical scores, limiting illness) and ask </a:t>
-            </a:r>
-            <a:r>
-              <a:rPr b="1"/>
-              <a:t>counterfactual</a:t>
-            </a:r>
-            <a:r>
-              <a:rPr/>
-              <a:t> questions: what if health were better?</a:t>
-            </a:r>
-          </a:p>
-          <a:p>
-            <a:pPr lvl="1"/>
-            <a:r>
-              <a:rPr/>
-              <a:t>e.g. improving mental and physical health by 1 SD → ~30% fewer long-term sick</a:t>
-            </a:r>
-          </a:p>
-          <a:p>
             <a:pPr lvl="0" indent="0" marL="0">
               <a:buNone/>
             </a:pPr>
             <a:r>
-              <a:rPr/>
-              <a:t>TODO: one figure — transition matrix or PAF-style bar chart from reports/ifoa/ work.</a:t>
-            </a:r>
-          </a:p>
-        </p:txBody>
-      </p:sp>
-      <p:sp>
-        <p:nvSpPr>
-          <p:cNvPr id="6" name="Footer Placeholder 4">
-            <a:extLst>
-              <a:ext uri="{FF2B5EF4-FFF2-40B4-BE49-F238E27FC236}">
-                <a16:creationId xmlns:a16="http://schemas.microsoft.com/office/drawing/2014/main" id="{8F9D7237-5CD7-6037-7D60-81DA36BE7AA4}"/>
+              <a:rPr b="1"/>
+              <a:t>Surveys give us</a:t>
+            </a:r>
+            <a:r>
+              <a:rPr/>
+              <a:t> (ELSA, Understanding Society)</a:t>
+            </a:r>
+          </a:p>
+          <a:p>
+            <a:pPr lvl="0"/>
+            <a:r>
+              <a:rPr/>
+              <a:t>The whole population, including people </a:t>
+            </a:r>
+            <a:r>
+              <a:rPr i="1"/>
+              <a:t>not</a:t>
+            </a:r>
+            <a:r>
+              <a:rPr/>
+              <a:t> working or insured</a:t>
+            </a:r>
+          </a:p>
+          <a:p>
+            <a:pPr lvl="0"/>
+            <a:r>
+              <a:rPr/>
+              <a:t>Health </a:t>
+            </a:r>
+            <a:r>
+              <a:rPr i="1"/>
+              <a:t>and</a:t>
+            </a:r>
+            <a:r>
+              <a:rPr/>
+              <a:t> work status, observed together</a:t>
+            </a:r>
+          </a:p>
+          <a:p>
+            <a:pPr lvl="0"/>
+            <a:r>
+              <a:rPr/>
+              <a:t>Accessible, well understood, long-running</a:t>
+            </a:r>
+          </a:p>
+        </p:txBody>
+      </p:sp>
+      <p:sp>
+        <p:nvSpPr>
+          <p:cNvPr id="9" name="Content Placeholder 9">
+            <a:extLst>
+              <a:ext uri="{FF2B5EF4-FFF2-40B4-BE49-F238E27FC236}">
+                <a16:creationId xmlns:a16="http://schemas.microsoft.com/office/drawing/2014/main" id="{8BE77E02-92D4-079E-ADD9-4455ABC3C3FA}"/>
+              </a:ext>
+            </a:extLst>
+          </p:cNvPr>
+          <p:cNvSpPr>
+            <a:spLocks noGrp="1"/>
+          </p:cNvSpPr>
+          <p:nvPr>
+            <p:ph hasCustomPrompt="1" idx="25" sz="quarter"/>
+          </p:nvPr>
+        </p:nvSpPr>
+        <p:spPr>
+          <a:xfrm>
+            <a:off x="8229600" y="2269322"/>
+            <a:ext cx="6896104" cy="5459309"/>
+          </a:xfrm>
+        </p:spPr>
+        <p:txBody>
+          <a:bodyPr wrap="square" rtlCol="0">
+            <a:normAutofit/>
+          </a:bodyPr>
+          <a:lstStyle/>
+          <a:p>
+            <a:pPr lvl="0" indent="0" marL="0">
+              <a:buNone/>
+            </a:pPr>
+            <a:r>
+              <a:rPr b="1"/>
+              <a:t>Surveys force on us</a:t>
+            </a:r>
+          </a:p>
+          <a:p>
+            <a:pPr lvl="0"/>
+            <a:r>
+              <a:rPr/>
+              <a:t>Roughly </a:t>
+            </a:r>
+            <a:r>
+              <a:rPr b="1"/>
+              <a:t>annual waves</a:t>
+            </a:r>
+            <a:r>
+              <a:rPr/>
+              <a:t>: status at snapshots, not dated events</a:t>
+            </a:r>
+          </a:p>
+          <a:p>
+            <a:pPr lvl="0"/>
+            <a:r>
+              <a:rPr/>
+              <a:t>So: </a:t>
+            </a:r>
+            <a:r>
+              <a:rPr b="1"/>
+              <a:t>one-year Markov steps</a:t>
+            </a:r>
+            <a:r>
+              <a:rPr/>
+              <a:t>; moves between waves are unseen</a:t>
+            </a:r>
+          </a:p>
+          <a:p>
+            <a:pPr lvl="0"/>
+            <a:r>
+              <a:rPr/>
+              <a:t>No </a:t>
+            </a:r>
+            <a:r>
+              <a:rPr b="1"/>
+              <a:t>duration</a:t>
+            </a:r>
+            <a:r>
+              <a:rPr/>
+              <a:t> since onset, so recovery can’t depend on it</a:t>
+            </a:r>
+          </a:p>
+          <a:p>
+            <a:pPr lvl="0"/>
+            <a:r>
+              <a:rPr/>
+              <a:t>Self-reported states; tens of thousands of people at best</a:t>
+            </a:r>
+          </a:p>
+          <a:p>
+            <a:pPr lvl="0" indent="0" marL="0">
+              <a:buNone/>
+            </a:pPr>
+            <a:r>
+              <a:rPr/>
+              <a:t>→ Administrative data relax these. </a:t>
+            </a:r>
+            <a:r>
+              <a:rPr b="1"/>
+              <a:t>Over to David:</a:t>
+            </a:r>
+            <a:r>
+              <a:rPr/>
+              <a:t> HWLE from insurers’ claims.</a:t>
+            </a:r>
+          </a:p>
+        </p:txBody>
+      </p:sp>
+      <p:sp>
+        <p:nvSpPr>
+          <p:cNvPr id="7" name="Footer Placeholder 4">
+            <a:extLst>
+              <a:ext uri="{FF2B5EF4-FFF2-40B4-BE49-F238E27FC236}">
+                <a16:creationId xmlns:a16="http://schemas.microsoft.com/office/drawing/2014/main" id="{6F6C5742-1F6C-A710-52FA-1248F020C691}"/>
               </a:ext>
             </a:extLst>
           </p:cNvPr>
@@ -13231,10 +13721,10 @@
       </p:sp>
       <p:sp>
         <p:nvSpPr>
-          <p:cNvPr id="7" name="Slide Number Placeholder 5">
-            <a:extLst>
-              <a:ext uri="{FF2B5EF4-FFF2-40B4-BE49-F238E27FC236}">
-                <a16:creationId xmlns:a16="http://schemas.microsoft.com/office/drawing/2014/main" id="{7B4B538E-25FF-2CD8-CF5C-A8AD3F07FE13}"/>
+          <p:cNvPr id="8" name="Slide Number Placeholder 5">
+            <a:extLst>
+              <a:ext uri="{FF2B5EF4-FFF2-40B4-BE49-F238E27FC236}">
+                <a16:creationId xmlns:a16="http://schemas.microsoft.com/office/drawing/2014/main" id="{A628090A-C45A-2639-D2CB-86DE80ECECC6}"/>
               </a:ext>
             </a:extLst>
           </p:cNvPr>
@@ -13321,7 +13811,7 @@
         <p:spPr>
           <a:xfrm>
             <a:off x="1117601" y="405087"/>
-            <a:ext cx="14020798" cy="809696"/>
+            <a:ext cx="14020798" cy="818882"/>
           </a:xfrm>
         </p:spPr>
         <p:txBody>
@@ -13333,7 +13823,7 @@
             </a:pPr>
             <a:r>
               <a:rPr/>
-              <a:t>What survey data can and cannot do</a:t>
+              <a:t>❓ Questions — Survey approaches</a:t>
             </a:r>
           </a:p>
         </p:txBody>
@@ -13357,7 +13847,7 @@
         <p:spPr>
           <a:xfrm>
             <a:off x="1104904" y="2269323"/>
-            <a:ext cx="6896104" cy="5459310"/>
+            <a:ext cx="14020800" cy="5659894"/>
           </a:xfrm>
         </p:spPr>
         <p:txBody>
@@ -13366,132 +13856,71 @@
           </a:bodyPr>
           <a:lstStyle/>
           <a:p>
-            <a:pPr lvl="0" indent="0" marL="0">
-              <a:buNone/>
-            </a:pPr>
+            <a:pPr lvl="0"/>
+            <a:r>
+              <a:rPr/>
+              <a:t>☒ 5 or 10 minutes? </a:t>
+            </a:r>
             <a:r>
               <a:rPr b="1"/>
-              <a:t>Strengths</a:t>
+              <a:t>5, three slides</a:t>
+            </a:r>
+            <a:r>
+              <a:rPr/>
+              <a:t> (agreed with David and Chris, 11 Sep).</a:t>
             </a:r>
           </a:p>
           <a:p>
             <a:pPr lvl="0"/>
             <a:r>
               <a:rPr/>
-              <a:t>Exists, well understood, accessible</a:t>
+              <a:t>☒ “Current approaches” heading dropped (11 Sep). Lynch/Parker literature slide and the UKHLS counterfactual slide moved to Supplement · Survey approaches.</a:t>
             </a:r>
           </a:p>
           <a:p>
             <a:pPr lvl="0"/>
             <a:r>
               <a:rPr/>
-              <a:t>Representative of the whole population</a:t>
+              <a:t>☒ Multi-state modelling explained </a:t>
+            </a:r>
+            <a:r>
+              <a:rPr b="1"/>
+              <a:t>once, here</a:t>
+            </a:r>
+            <a:r>
+              <a:rPr/>
+              <a:t>, as a reminder; David’s section uses it without re-explaining.</a:t>
             </a:r>
           </a:p>
           <a:p>
             <a:pPr lvl="0"/>
             <a:r>
               <a:rPr/>
-              <a:t>Covers people </a:t>
-            </a:r>
-            <a:r>
-              <a:rPr i="1"/>
-              <a:t>not</a:t>
-            </a:r>
-            <a:r>
-              <a:rPr/>
-              <a:t> currently working</a:t>
+              <a:t>☐ David: does the hand-off line match your HWLE definition (expected years working, 50 to 65, partial expectancy)? Reword to suit.</a:t>
             </a:r>
           </a:p>
           <a:p>
             <a:pPr lvl="0"/>
             <a:r>
               <a:rPr/>
-              <a:t>Observes health </a:t>
-            </a:r>
-            <a:r>
-              <a:rPr i="1"/>
-              <a:t>while</a:t>
-            </a:r>
-            <a:r>
-              <a:rPr/>
-              <a:t> working</a:t>
-            </a:r>
-          </a:p>
-        </p:txBody>
-      </p:sp>
-      <p:sp>
-        <p:nvSpPr>
-          <p:cNvPr id="9" name="Content Placeholder 9">
-            <a:extLst>
-              <a:ext uri="{FF2B5EF4-FFF2-40B4-BE49-F238E27FC236}">
-                <a16:creationId xmlns:a16="http://schemas.microsoft.com/office/drawing/2014/main" id="{8BE77E02-92D4-079E-ADD9-4455ABC3C3FA}"/>
-              </a:ext>
-            </a:extLst>
-          </p:cNvPr>
-          <p:cNvSpPr>
-            <a:spLocks noGrp="1"/>
-          </p:cNvSpPr>
-          <p:nvPr>
-            <p:ph hasCustomPrompt="1" idx="25" sz="quarter"/>
-          </p:nvPr>
-        </p:nvSpPr>
-        <p:spPr>
-          <a:xfrm>
-            <a:off x="8229600" y="2269322"/>
-            <a:ext cx="6896104" cy="5459309"/>
-          </a:xfrm>
-        </p:spPr>
-        <p:txBody>
-          <a:bodyPr wrap="square" rtlCol="0">
-            <a:normAutofit/>
-          </a:bodyPr>
-          <a:lstStyle/>
-          <a:p>
-            <a:pPr lvl="0" indent="0" marL="0">
-              <a:buNone/>
-            </a:pPr>
-            <a:r>
-              <a:rPr b="1"/>
-              <a:t>Weaknesses</a:t>
+              <a:t>☐ Triangulation message (survey ≈ 12.5 yrs vs CMI ≈ 13.5 yrs): stays in David’s comparison slide.</a:t>
             </a:r>
           </a:p>
           <a:p>
             <a:pPr lvl="0"/>
             <a:r>
               <a:rPr/>
-              <a:t>Self-reported health and work status</a:t>
-            </a:r>
-          </a:p>
-          <a:p>
-            <a:pPr lvl="0"/>
-            <a:r>
-              <a:rPr/>
-              <a:t>Prevalence at annual snapshots, not dated events</a:t>
-            </a:r>
-          </a:p>
-          <a:p>
-            <a:pPr lvl="0"/>
-            <a:r>
-              <a:rPr/>
-              <a:t>Transitions within a year unobserved</a:t>
-            </a:r>
-          </a:p>
-          <a:p>
-            <a:pPr lvl="0"/>
-            <a:r>
-              <a:rPr/>
-              <a:t>Tens of thousands of respondents at best</a:t>
-            </a:r>
-          </a:p>
-        </p:txBody>
-      </p:sp>
-      <p:sp>
-        <p:nvSpPr>
-          <p:cNvPr id="7" name="Footer Placeholder 4">
-            <a:extLst>
-              <a:ext uri="{FF2B5EF4-FFF2-40B4-BE49-F238E27FC236}">
-                <a16:creationId xmlns:a16="http://schemas.microsoft.com/office/drawing/2014/main" id="{6F6C5742-1F6C-A710-52FA-1248F020C691}"/>
+              <a:t>☐ Health-economics column: add one worked example (e.g. a return-to-work intervention’s cost per QALY) or keep generic?</a:t>
+            </a:r>
+          </a:p>
+        </p:txBody>
+      </p:sp>
+      <p:sp>
+        <p:nvSpPr>
+          <p:cNvPr id="6" name="Footer Placeholder 4">
+            <a:extLst>
+              <a:ext uri="{FF2B5EF4-FFF2-40B4-BE49-F238E27FC236}">
+                <a16:creationId xmlns:a16="http://schemas.microsoft.com/office/drawing/2014/main" id="{8F9D7237-5CD7-6037-7D60-81DA36BE7AA4}"/>
               </a:ext>
             </a:extLst>
           </p:cNvPr>
@@ -13533,10 +13962,10 @@
       </p:sp>
       <p:sp>
         <p:nvSpPr>
-          <p:cNvPr id="8" name="Slide Number Placeholder 5">
-            <a:extLst>
-              <a:ext uri="{FF2B5EF4-FFF2-40B4-BE49-F238E27FC236}">
-                <a16:creationId xmlns:a16="http://schemas.microsoft.com/office/drawing/2014/main" id="{A628090A-C45A-2639-D2CB-86DE80ECECC6}"/>
+          <p:cNvPr id="7" name="Slide Number Placeholder 5">
+            <a:extLst>
+              <a:ext uri="{FF2B5EF4-FFF2-40B4-BE49-F238E27FC236}">
+                <a16:creationId xmlns:a16="http://schemas.microsoft.com/office/drawing/2014/main" id="{7B4B538E-25FF-2CD8-CF5C-A8AD3F07FE13}"/>
               </a:ext>
             </a:extLst>
           </p:cNvPr>
@@ -13606,30 +14035,28 @@
       </p:grpSpPr>
       <p:sp>
         <p:nvSpPr>
-          <p:cNvPr id="23" name="Content Placeholder 9">
-            <a:extLst>
-              <a:ext uri="{FF2B5EF4-FFF2-40B4-BE49-F238E27FC236}">
-                <a16:creationId xmlns:a16="http://schemas.microsoft.com/office/drawing/2014/main" id="{0C532851-4697-4B02-B344-E4852AF78CBF}"/>
-              </a:ext>
-            </a:extLst>
-          </p:cNvPr>
-          <p:cNvSpPr>
-            <a:spLocks noGrp="1"/>
-          </p:cNvSpPr>
-          <p:nvPr>
-            <p:ph hasCustomPrompt="1" idx="13" sz="quarter"/>
-          </p:nvPr>
-        </p:nvSpPr>
-        <p:spPr>
-          <a:xfrm>
-            <a:off x="1104904" y="2269323"/>
-            <a:ext cx="14020800" cy="5659894"/>
-          </a:xfrm>
-        </p:spPr>
-        <p:txBody>
-          <a:bodyPr wrap="square" rtlCol="0">
-            <a:normAutofit/>
-          </a:bodyPr>
+          <p:cNvPr id="97" name="Title 1">
+            <a:extLst>
+              <a:ext uri="{FF2B5EF4-FFF2-40B4-BE49-F238E27FC236}">
+                <a16:creationId xmlns:a16="http://schemas.microsoft.com/office/drawing/2014/main" id="{EF499182-B1CD-4399-99FD-7B1CA914FD59}"/>
+              </a:ext>
+            </a:extLst>
+          </p:cNvPr>
+          <p:cNvSpPr>
+            <a:spLocks noGrp="1"/>
+          </p:cNvSpPr>
+          <p:nvPr>
+            <p:ph hasCustomPrompt="1" type="title"/>
+          </p:nvPr>
+        </p:nvSpPr>
+        <p:spPr>
+          <a:xfrm>
+            <a:off x="1500000" y="3400000"/>
+            <a:ext cx="13256000" cy="2200000"/>
+          </a:xfrm>
+        </p:spPr>
+        <p:txBody>
+          <a:bodyPr/>
           <a:lstStyle/>
           <a:p>
             <a:pPr lvl="0" indent="0" marL="0">
@@ -13637,25 +14064,17 @@
             </a:pPr>
             <a:r>
               <a:rPr/>
-              <a:t>→ Hand-over: can </a:t>
-            </a:r>
-            <a:r>
-              <a:rPr i="1"/>
-              <a:t>administrative</a:t>
-            </a:r>
-            <a:r>
-              <a:rPr/>
-              <a:t> data do better?</a:t>
-            </a:r>
-          </a:p>
-        </p:txBody>
-      </p:sp>
-      <p:sp>
-        <p:nvSpPr>
-          <p:cNvPr id="6" name="Footer Placeholder 4">
-            <a:extLst>
-              <a:ext uri="{FF2B5EF4-FFF2-40B4-BE49-F238E27FC236}">
-                <a16:creationId xmlns:a16="http://schemas.microsoft.com/office/drawing/2014/main" id="{8F9D7237-5CD7-6037-7D60-81DA36BE7AA4}"/>
+              <a:t>HWLE estimates with CMI rates [DAVID · 10 min]</a:t>
+            </a:r>
+          </a:p>
+        </p:txBody>
+      </p:sp>
+      <p:sp>
+        <p:nvSpPr>
+          <p:cNvPr id="8" name="Footer Placeholder 4">
+            <a:extLst>
+              <a:ext uri="{FF2B5EF4-FFF2-40B4-BE49-F238E27FC236}">
+                <a16:creationId xmlns:a16="http://schemas.microsoft.com/office/drawing/2014/main" id="{15C406F6-FE38-14E0-8BF8-B9AC42B3EF15}"/>
               </a:ext>
             </a:extLst>
           </p:cNvPr>
@@ -13681,7 +14100,7 @@
             <a:lvl1pPr algn="r">
               <a:defRPr sz="1600">
                 <a:solidFill>
-                  <a:schemeClr val="tx1"/>
+                  <a:schemeClr val="bg1"/>
                 </a:solidFill>
               </a:defRPr>
             </a:lvl1pPr>
@@ -13697,10 +14116,10 @@
       </p:sp>
       <p:sp>
         <p:nvSpPr>
-          <p:cNvPr id="7" name="Slide Number Placeholder 5">
-            <a:extLst>
-              <a:ext uri="{FF2B5EF4-FFF2-40B4-BE49-F238E27FC236}">
-                <a16:creationId xmlns:a16="http://schemas.microsoft.com/office/drawing/2014/main" id="{7B4B538E-25FF-2CD8-CF5C-A8AD3F07FE13}"/>
+          <p:cNvPr id="9" name="Slide Number Placeholder 5">
+            <a:extLst>
+              <a:ext uri="{FF2B5EF4-FFF2-40B4-BE49-F238E27FC236}">
+                <a16:creationId xmlns:a16="http://schemas.microsoft.com/office/drawing/2014/main" id="{C18B60AF-E1FE-C3E6-C9A3-0721F1D08E6F}"/>
               </a:ext>
             </a:extLst>
           </p:cNvPr>
@@ -13720,7 +14139,7 @@
             <a:avLst/>
           </a:prstGeom>
           <a:solidFill>
-            <a:schemeClr val="tx1"/>
+            <a:schemeClr val="bg1"/>
           </a:solidFill>
         </p:spPr>
         <p:txBody>
@@ -13729,7 +14148,7 @@
             <a:lvl1pPr algn="ctr">
               <a:defRPr b="1" i="0" sz="1200">
                 <a:solidFill>
-                  <a:schemeClr val="bg1"/>
+                  <a:schemeClr val="tx1"/>
                 </a:solidFill>
                 <a:latin charset="0" panose="020B0604020202020204" pitchFamily="34" typeface="Arial"/>
                 <a:cs charset="0" panose="020B0604020202020204" pitchFamily="34" typeface="Arial"/>
@@ -13941,393 +14360,6 @@
         <p:spPr>
           <a:xfrm>
             <a:off x="1117601" y="405087"/>
-            <a:ext cx="14020798" cy="818882"/>
-          </a:xfrm>
-        </p:spPr>
-        <p:txBody>
-          <a:bodyPr/>
-          <a:lstStyle/>
-          <a:p>
-            <a:pPr lvl="0" indent="0" marL="0">
-              <a:buNone/>
-            </a:pPr>
-            <a:r>
-              <a:rPr/>
-              <a:t>❓ Questions — Survey approaches</a:t>
-            </a:r>
-          </a:p>
-        </p:txBody>
-      </p:sp>
-      <p:sp>
-        <p:nvSpPr>
-          <p:cNvPr id="23" name="Content Placeholder 9">
-            <a:extLst>
-              <a:ext uri="{FF2B5EF4-FFF2-40B4-BE49-F238E27FC236}">
-                <a16:creationId xmlns:a16="http://schemas.microsoft.com/office/drawing/2014/main" id="{0C532851-4697-4B02-B344-E4852AF78CBF}"/>
-              </a:ext>
-            </a:extLst>
-          </p:cNvPr>
-          <p:cNvSpPr>
-            <a:spLocks noGrp="1"/>
-          </p:cNvSpPr>
-          <p:nvPr>
-            <p:ph hasCustomPrompt="1" idx="13" sz="quarter"/>
-          </p:nvPr>
-        </p:nvSpPr>
-        <p:spPr>
-          <a:xfrm>
-            <a:off x="1104904" y="2269323"/>
-            <a:ext cx="14020800" cy="5659894"/>
-          </a:xfrm>
-        </p:spPr>
-        <p:txBody>
-          <a:bodyPr wrap="square" rtlCol="0">
-            <a:normAutofit/>
-          </a:bodyPr>
-          <a:lstStyle/>
-          <a:p>
-            <a:pPr lvl="0"/>
-            <a:r>
-              <a:rPr/>
-              <a:t>☐ 5 or 10 minutes? Three slides fits 5–7 min; add a UKHLS results slide if 10.</a:t>
-            </a:r>
-          </a:p>
-          <a:p>
-            <a:pPr lvl="0"/>
-            <a:r>
-              <a:rPr/>
-              <a:t>☐ Are the Lynch/Parker figures OK to reproduce, or redraw schematically?</a:t>
-            </a:r>
-          </a:p>
-          <a:p>
-            <a:pPr lvl="0"/>
-            <a:r>
-              <a:rPr/>
-              <a:t>☐ Which UKHLS figure to show — transition table (03_feedback_response) or a counterfactual bar chart?</a:t>
-            </a:r>
-          </a:p>
-          <a:p>
-            <a:pPr lvl="0"/>
-            <a:r>
-              <a:rPr/>
-              <a:t>☐ Keep the “strengths/weaknesses” as the bridge into David’s section, or let David make the admin-data case himself?</a:t>
-            </a:r>
-          </a:p>
-          <a:p>
-            <a:pPr lvl="0"/>
-            <a:r>
-              <a:rPr/>
-              <a:t>☐ Where does the </a:t>
-            </a:r>
-            <a:r>
-              <a:rPr b="1"/>
-              <a:t>triangulation</a:t>
-            </a:r>
-            <a:r>
-              <a:rPr/>
-              <a:t> message go — here (survey ≈ 12.5 yrs vs CMI ≈ 13.5 yrs, same direction) or in David’s comparison slide?</a:t>
-            </a:r>
-          </a:p>
-          <a:p>
-            <a:pPr lvl="0"/>
-            <a:r>
-              <a:rPr/>
-              <a:t>☐ Multi-state modelling explained here (UKHLS Markov model) or in David’s section — not both.</a:t>
-            </a:r>
-          </a:p>
-        </p:txBody>
-      </p:sp>
-      <p:sp>
-        <p:nvSpPr>
-          <p:cNvPr id="6" name="Footer Placeholder 4">
-            <a:extLst>
-              <a:ext uri="{FF2B5EF4-FFF2-40B4-BE49-F238E27FC236}">
-                <a16:creationId xmlns:a16="http://schemas.microsoft.com/office/drawing/2014/main" id="{8F9D7237-5CD7-6037-7D60-81DA36BE7AA4}"/>
-              </a:ext>
-            </a:extLst>
-          </p:cNvPr>
-          <p:cNvSpPr>
-            <a:spLocks noGrp="1"/>
-          </p:cNvSpPr>
-          <p:nvPr>
-            <p:ph idx="3" sz="quarter" type="ftr"/>
-          </p:nvPr>
-        </p:nvSpPr>
-        <p:spPr>
-          <a:xfrm>
-            <a:off x="1117600" y="8382533"/>
-            <a:ext cx="11368098" cy="486833"/>
-          </a:xfrm>
-          <a:prstGeom prst="rect">
-            <a:avLst/>
-          </a:prstGeom>
-        </p:spPr>
-        <p:txBody>
-          <a:bodyPr anchor="ctr" bIns="45720" lIns="91440" rIns="91440" rtlCol="0" tIns="45720" vert="horz"/>
-          <a:lstStyle>
-            <a:lvl1pPr algn="r">
-              <a:defRPr sz="1600">
-                <a:solidFill>
-                  <a:schemeClr val="tx1"/>
-                </a:solidFill>
-              </a:defRPr>
-            </a:lvl1pPr>
-          </a:lstStyle>
-          <a:p>
-            <a:r>
-              <a:rPr lang="en-GB"/>
-              <a:t>IFoA Life Conference</a:t>
-            </a:r>
-            <a:endParaRPr dirty="0" lang="en-GB"/>
-          </a:p>
-        </p:txBody>
-      </p:sp>
-      <p:sp>
-        <p:nvSpPr>
-          <p:cNvPr id="7" name="Slide Number Placeholder 5">
-            <a:extLst>
-              <a:ext uri="{FF2B5EF4-FFF2-40B4-BE49-F238E27FC236}">
-                <a16:creationId xmlns:a16="http://schemas.microsoft.com/office/drawing/2014/main" id="{7B4B538E-25FF-2CD8-CF5C-A8AD3F07FE13}"/>
-              </a:ext>
-            </a:extLst>
-          </p:cNvPr>
-          <p:cNvSpPr>
-            <a:spLocks noGrp="1"/>
-          </p:cNvSpPr>
-          <p:nvPr>
-            <p:ph idx="4" sz="quarter" type="sldNum"/>
-          </p:nvPr>
-        </p:nvSpPr>
-        <p:spPr>
-          <a:xfrm>
-            <a:off x="14573177" y="8382533"/>
-            <a:ext cx="529680" cy="486833"/>
-          </a:xfrm>
-          <a:prstGeom prst="rect">
-            <a:avLst/>
-          </a:prstGeom>
-          <a:solidFill>
-            <a:schemeClr val="tx1"/>
-          </a:solidFill>
-        </p:spPr>
-        <p:txBody>
-          <a:bodyPr anchor="ctr" bIns="45720" lIns="91440" rIns="91440" rtlCol="0" tIns="45720" vert="horz"/>
-          <a:lstStyle>
-            <a:lvl1pPr algn="ctr">
-              <a:defRPr b="1" i="0" sz="1200">
-                <a:solidFill>
-                  <a:schemeClr val="bg1"/>
-                </a:solidFill>
-                <a:latin charset="0" panose="020B0604020202020204" pitchFamily="34" typeface="Arial"/>
-                <a:cs charset="0" panose="020B0604020202020204" pitchFamily="34" typeface="Arial"/>
-              </a:defRPr>
-            </a:lvl1pPr>
-          </a:lstStyle>
-          <a:p>
-            <a:fld id="{40FC62D0-A2F2-4BF8-8DAC-E86C11000EC3}" type="slidenum">
-              <a:rPr lang="en-GB" smtClean="0"/>
-              <a:pPr/>
-              <a:t>‹#›</a:t>
-            </a:fld>
-            <a:endParaRPr dirty="0" lang="en-GB"/>
-          </a:p>
-        </p:txBody>
-      </p:sp>
-    </p:spTree>
-  </p:cSld>
-</p:sld>
-</file>
-
-<file path=ppt/slides/slide21.xml><?xml version="1.0" encoding="utf-8"?>
-<p:sld xmlns:a="http://schemas.openxmlformats.org/drawingml/2006/main" xmlns:r="http://schemas.openxmlformats.org/officeDocument/2006/relationships" xmlns:p="http://schemas.openxmlformats.org/presentationml/2006/main">
-  <p:cSld>
-    <p:spTree>
-      <p:nvGrpSpPr>
-        <p:cNvPr id="1" name=""/>
-        <p:cNvGrpSpPr/>
-        <p:nvPr/>
-      </p:nvGrpSpPr>
-      <p:grpSpPr>
-        <a:xfrm>
-          <a:off x="0" y="0"/>
-          <a:ext cx="0" cy="0"/>
-          <a:chOff x="0" y="0"/>
-          <a:chExt cx="0" cy="0"/>
-        </a:xfrm>
-      </p:grpSpPr>
-      <p:sp>
-        <p:nvSpPr>
-          <p:cNvPr id="97" name="Title 1">
-            <a:extLst>
-              <a:ext uri="{FF2B5EF4-FFF2-40B4-BE49-F238E27FC236}">
-                <a16:creationId xmlns:a16="http://schemas.microsoft.com/office/drawing/2014/main" id="{EF499182-B1CD-4399-99FD-7B1CA914FD59}"/>
-              </a:ext>
-            </a:extLst>
-          </p:cNvPr>
-          <p:cNvSpPr>
-            <a:spLocks noGrp="1"/>
-          </p:cNvSpPr>
-          <p:nvPr>
-            <p:ph hasCustomPrompt="1" type="title"/>
-          </p:nvPr>
-        </p:nvSpPr>
-        <p:spPr>
-          <a:xfrm>
-            <a:off x="1500000" y="3400000"/>
-            <a:ext cx="13256000" cy="2200000"/>
-          </a:xfrm>
-        </p:spPr>
-        <p:txBody>
-          <a:bodyPr/>
-          <a:lstStyle/>
-          <a:p>
-            <a:pPr lvl="0" indent="0" marL="0">
-              <a:buNone/>
-            </a:pPr>
-            <a:r>
-              <a:rPr/>
-              <a:t>HWLE estimates with CMI rates [DAVID · 10 min]</a:t>
-            </a:r>
-          </a:p>
-        </p:txBody>
-      </p:sp>
-      <p:sp>
-        <p:nvSpPr>
-          <p:cNvPr id="8" name="Footer Placeholder 4">
-            <a:extLst>
-              <a:ext uri="{FF2B5EF4-FFF2-40B4-BE49-F238E27FC236}">
-                <a16:creationId xmlns:a16="http://schemas.microsoft.com/office/drawing/2014/main" id="{15C406F6-FE38-14E0-8BF8-B9AC42B3EF15}"/>
-              </a:ext>
-            </a:extLst>
-          </p:cNvPr>
-          <p:cNvSpPr>
-            <a:spLocks noGrp="1"/>
-          </p:cNvSpPr>
-          <p:nvPr>
-            <p:ph idx="3" sz="quarter" type="ftr"/>
-          </p:nvPr>
-        </p:nvSpPr>
-        <p:spPr>
-          <a:xfrm>
-            <a:off x="1117600" y="8382533"/>
-            <a:ext cx="11368098" cy="486833"/>
-          </a:xfrm>
-          <a:prstGeom prst="rect">
-            <a:avLst/>
-          </a:prstGeom>
-        </p:spPr>
-        <p:txBody>
-          <a:bodyPr anchor="ctr" bIns="45720" lIns="91440" rIns="91440" rtlCol="0" tIns="45720" vert="horz"/>
-          <a:lstStyle>
-            <a:lvl1pPr algn="r">
-              <a:defRPr sz="1600">
-                <a:solidFill>
-                  <a:schemeClr val="bg1"/>
-                </a:solidFill>
-              </a:defRPr>
-            </a:lvl1pPr>
-          </a:lstStyle>
-          <a:p>
-            <a:r>
-              <a:rPr lang="en-GB"/>
-              <a:t>IFoA Life Conference</a:t>
-            </a:r>
-            <a:endParaRPr dirty="0" lang="en-GB"/>
-          </a:p>
-        </p:txBody>
-      </p:sp>
-      <p:sp>
-        <p:nvSpPr>
-          <p:cNvPr id="9" name="Slide Number Placeholder 5">
-            <a:extLst>
-              <a:ext uri="{FF2B5EF4-FFF2-40B4-BE49-F238E27FC236}">
-                <a16:creationId xmlns:a16="http://schemas.microsoft.com/office/drawing/2014/main" id="{C18B60AF-E1FE-C3E6-C9A3-0721F1D08E6F}"/>
-              </a:ext>
-            </a:extLst>
-          </p:cNvPr>
-          <p:cNvSpPr>
-            <a:spLocks noGrp="1"/>
-          </p:cNvSpPr>
-          <p:nvPr>
-            <p:ph idx="4" sz="quarter" type="sldNum"/>
-          </p:nvPr>
-        </p:nvSpPr>
-        <p:spPr>
-          <a:xfrm>
-            <a:off x="14573177" y="8382533"/>
-            <a:ext cx="529680" cy="486833"/>
-          </a:xfrm>
-          <a:prstGeom prst="rect">
-            <a:avLst/>
-          </a:prstGeom>
-          <a:solidFill>
-            <a:schemeClr val="bg1"/>
-          </a:solidFill>
-        </p:spPr>
-        <p:txBody>
-          <a:bodyPr anchor="ctr" bIns="45720" lIns="91440" rIns="91440" rtlCol="0" tIns="45720" vert="horz"/>
-          <a:lstStyle>
-            <a:lvl1pPr algn="ctr">
-              <a:defRPr b="1" i="0" sz="1200">
-                <a:solidFill>
-                  <a:schemeClr val="tx1"/>
-                </a:solidFill>
-                <a:latin charset="0" panose="020B0604020202020204" pitchFamily="34" typeface="Arial"/>
-                <a:cs charset="0" panose="020B0604020202020204" pitchFamily="34" typeface="Arial"/>
-              </a:defRPr>
-            </a:lvl1pPr>
-          </a:lstStyle>
-          <a:p>
-            <a:fld id="{40FC62D0-A2F2-4BF8-8DAC-E86C11000EC3}" type="slidenum">
-              <a:rPr lang="en-GB" smtClean="0"/>
-              <a:pPr/>
-              <a:t>‹#›</a:t>
-            </a:fld>
-            <a:endParaRPr dirty="0" lang="en-GB"/>
-          </a:p>
-        </p:txBody>
-      </p:sp>
-    </p:spTree>
-  </p:cSld>
-</p:sld>
-</file>
-
-<file path=ppt/slides/slide22.xml><?xml version="1.0" encoding="utf-8"?>
-<p:sld xmlns:a="http://schemas.openxmlformats.org/drawingml/2006/main" xmlns:r="http://schemas.openxmlformats.org/officeDocument/2006/relationships" xmlns:p="http://schemas.openxmlformats.org/presentationml/2006/main">
-  <p:cSld>
-    <p:spTree>
-      <p:nvGrpSpPr>
-        <p:cNvPr id="1" name=""/>
-        <p:cNvGrpSpPr/>
-        <p:nvPr/>
-      </p:nvGrpSpPr>
-      <p:grpSpPr>
-        <a:xfrm>
-          <a:off x="0" y="0"/>
-          <a:ext cx="0" cy="0"/>
-          <a:chOff x="0" y="0"/>
-          <a:chExt cx="0" cy="0"/>
-        </a:xfrm>
-      </p:grpSpPr>
-      <p:sp>
-        <p:nvSpPr>
-          <p:cNvPr id="14" name="Title 1">
-            <a:extLst>
-              <a:ext uri="{FF2B5EF4-FFF2-40B4-BE49-F238E27FC236}">
-                <a16:creationId xmlns:a16="http://schemas.microsoft.com/office/drawing/2014/main" id="{EF499182-B1CD-4399-99FD-7B1CA914FD59}"/>
-              </a:ext>
-            </a:extLst>
-          </p:cNvPr>
-          <p:cNvSpPr>
-            <a:spLocks noGrp="1"/>
-          </p:cNvSpPr>
-          <p:nvPr>
-            <p:ph hasCustomPrompt="1" type="title"/>
-          </p:nvPr>
-        </p:nvSpPr>
-        <p:spPr>
-          <a:xfrm>
-            <a:off x="1117601" y="405087"/>
             <a:ext cx="14020798" cy="809696"/>
           </a:xfrm>
         </p:spPr>
@@ -14596,7 +14628,7 @@
 </p:sld>
 </file>
 
-<file path=ppt/slides/slide23.xml><?xml version="1.0" encoding="utf-8"?>
+<file path=ppt/slides/slide21.xml><?xml version="1.0" encoding="utf-8"?>
 <p:sld xmlns:a="http://schemas.openxmlformats.org/drawingml/2006/main" xmlns:r="http://schemas.openxmlformats.org/officeDocument/2006/relationships" xmlns:p="http://schemas.openxmlformats.org/presentationml/2006/main">
   <p:cSld>
     <p:spTree>
@@ -14986,7 +15018,7 @@
 </p:sld>
 </file>
 
-<file path=ppt/slides/slide24.xml><?xml version="1.0" encoding="utf-8"?>
+<file path=ppt/slides/slide22.xml><?xml version="1.0" encoding="utf-8"?>
 <p:sld xmlns:a="http://schemas.openxmlformats.org/drawingml/2006/main" xmlns:r="http://schemas.openxmlformats.org/officeDocument/2006/relationships" xmlns:p="http://schemas.openxmlformats.org/presentationml/2006/main">
   <p:cSld>
     <p:spTree>
@@ -15163,7 +15195,7 @@
 </p:sld>
 </file>
 
-<file path=ppt/slides/slide25.xml><?xml version="1.0" encoding="utf-8"?>
+<file path=ppt/slides/slide23.xml><?xml version="1.0" encoding="utf-8"?>
 <p:sld xmlns:a="http://schemas.openxmlformats.org/drawingml/2006/main" xmlns:r="http://schemas.openxmlformats.org/officeDocument/2006/relationships" xmlns:p="http://schemas.openxmlformats.org/presentationml/2006/main">
   <p:cSld>
     <p:spTree>
@@ -15892,6 +15924,417 @@
 </p:sld>
 </file>
 
+<file path=ppt/slides/slide24.xml><?xml version="1.0" encoding="utf-8"?>
+<p:sld xmlns:a="http://schemas.openxmlformats.org/drawingml/2006/main" xmlns:r="http://schemas.openxmlformats.org/officeDocument/2006/relationships" xmlns:p="http://schemas.openxmlformats.org/presentationml/2006/main">
+  <p:cSld>
+    <p:spTree>
+      <p:nvGrpSpPr>
+        <p:cNvPr id="1" name=""/>
+        <p:cNvGrpSpPr/>
+        <p:nvPr/>
+      </p:nvGrpSpPr>
+      <p:grpSpPr>
+        <a:xfrm>
+          <a:off x="0" y="0"/>
+          <a:ext cx="0" cy="0"/>
+          <a:chOff x="0" y="0"/>
+          <a:chExt cx="0" cy="0"/>
+        </a:xfrm>
+      </p:grpSpPr>
+      <p:sp>
+        <p:nvSpPr>
+          <p:cNvPr id="23" name="Content Placeholder 9">
+            <a:extLst>
+              <a:ext uri="{FF2B5EF4-FFF2-40B4-BE49-F238E27FC236}">
+                <a16:creationId xmlns:a16="http://schemas.microsoft.com/office/drawing/2014/main" id="{0C532851-4697-4B02-B344-E4852AF78CBF}"/>
+              </a:ext>
+            </a:extLst>
+          </p:cNvPr>
+          <p:cNvSpPr>
+            <a:spLocks noGrp="1"/>
+          </p:cNvSpPr>
+          <p:nvPr>
+            <p:ph hasCustomPrompt="1" idx="13" sz="quarter"/>
+          </p:nvPr>
+        </p:nvSpPr>
+        <p:spPr>
+          <a:xfrm>
+            <a:off x="1104904" y="2269323"/>
+            <a:ext cx="14020800" cy="5659894"/>
+          </a:xfrm>
+        </p:spPr>
+        <p:txBody>
+          <a:bodyPr wrap="square" rtlCol="0">
+            <a:normAutofit/>
+          </a:bodyPr>
+          <a:lstStyle/>
+          <a:p>
+            <a:pPr lvl="0" indent="0" marL="0">
+              <a:buNone/>
+            </a:pPr>
+            <a:r>
+              <a:rPr/>
+              <a:t>Of 15 years: </a:t>
+            </a:r>
+            <a:r>
+              <a:rPr b="1"/>
+              <a:t>13.1–13.8 yrs working</a:t>
+            </a:r>
+            <a:r>
+              <a:rPr/>
+              <a:t>, </a:t>
+            </a:r>
+            <a:r>
+              <a:rPr b="1"/>
+              <a:t>0.4–1.2 yrs not-healthy-not-working</a:t>
+            </a:r>
+            <a:r>
+              <a:rPr/>
+              <a:t>, remainder deaths. Men &gt; women; OC2 &gt; OC1 &gt; OC3 &gt; OC4. Data centred on 2011; female OC3/OC4 thin.</a:t>
+            </a:r>
+          </a:p>
+        </p:txBody>
+      </p:sp>
+      <p:sp>
+        <p:nvSpPr>
+          <p:cNvPr id="6" name="Footer Placeholder 4">
+            <a:extLst>
+              <a:ext uri="{FF2B5EF4-FFF2-40B4-BE49-F238E27FC236}">
+                <a16:creationId xmlns:a16="http://schemas.microsoft.com/office/drawing/2014/main" id="{8F9D7237-5CD7-6037-7D60-81DA36BE7AA4}"/>
+              </a:ext>
+            </a:extLst>
+          </p:cNvPr>
+          <p:cNvSpPr>
+            <a:spLocks noGrp="1"/>
+          </p:cNvSpPr>
+          <p:nvPr>
+            <p:ph idx="3" sz="quarter" type="ftr"/>
+          </p:nvPr>
+        </p:nvSpPr>
+        <p:spPr>
+          <a:xfrm>
+            <a:off x="1117600" y="8382533"/>
+            <a:ext cx="11368098" cy="486833"/>
+          </a:xfrm>
+          <a:prstGeom prst="rect">
+            <a:avLst/>
+          </a:prstGeom>
+        </p:spPr>
+        <p:txBody>
+          <a:bodyPr anchor="ctr" bIns="45720" lIns="91440" rIns="91440" rtlCol="0" tIns="45720" vert="horz"/>
+          <a:lstStyle>
+            <a:lvl1pPr algn="r">
+              <a:defRPr sz="1600">
+                <a:solidFill>
+                  <a:schemeClr val="tx1"/>
+                </a:solidFill>
+              </a:defRPr>
+            </a:lvl1pPr>
+          </a:lstStyle>
+          <a:p>
+            <a:r>
+              <a:rPr lang="en-GB"/>
+              <a:t>IFoA Life Conference</a:t>
+            </a:r>
+            <a:endParaRPr dirty="0" lang="en-GB"/>
+          </a:p>
+        </p:txBody>
+      </p:sp>
+      <p:sp>
+        <p:nvSpPr>
+          <p:cNvPr id="7" name="Slide Number Placeholder 5">
+            <a:extLst>
+              <a:ext uri="{FF2B5EF4-FFF2-40B4-BE49-F238E27FC236}">
+                <a16:creationId xmlns:a16="http://schemas.microsoft.com/office/drawing/2014/main" id="{7B4B538E-25FF-2CD8-CF5C-A8AD3F07FE13}"/>
+              </a:ext>
+            </a:extLst>
+          </p:cNvPr>
+          <p:cNvSpPr>
+            <a:spLocks noGrp="1"/>
+          </p:cNvSpPr>
+          <p:nvPr>
+            <p:ph idx="4" sz="quarter" type="sldNum"/>
+          </p:nvPr>
+        </p:nvSpPr>
+        <p:spPr>
+          <a:xfrm>
+            <a:off x="14573177" y="8382533"/>
+            <a:ext cx="529680" cy="486833"/>
+          </a:xfrm>
+          <a:prstGeom prst="rect">
+            <a:avLst/>
+          </a:prstGeom>
+          <a:solidFill>
+            <a:schemeClr val="tx1"/>
+          </a:solidFill>
+        </p:spPr>
+        <p:txBody>
+          <a:bodyPr anchor="ctr" bIns="45720" lIns="91440" rIns="91440" rtlCol="0" tIns="45720" vert="horz"/>
+          <a:lstStyle>
+            <a:lvl1pPr algn="ctr">
+              <a:defRPr b="1" i="0" sz="1200">
+                <a:solidFill>
+                  <a:schemeClr val="bg1"/>
+                </a:solidFill>
+                <a:latin charset="0" panose="020B0604020202020204" pitchFamily="34" typeface="Arial"/>
+                <a:cs charset="0" panose="020B0604020202020204" pitchFamily="34" typeface="Arial"/>
+              </a:defRPr>
+            </a:lvl1pPr>
+          </a:lstStyle>
+          <a:p>
+            <a:fld id="{40FC62D0-A2F2-4BF8-8DAC-E86C11000EC3}" type="slidenum">
+              <a:rPr lang="en-GB" smtClean="0"/>
+              <a:pPr/>
+              <a:t>‹#›</a:t>
+            </a:fld>
+            <a:endParaRPr dirty="0" lang="en-GB"/>
+          </a:p>
+        </p:txBody>
+      </p:sp>
+    </p:spTree>
+  </p:cSld>
+</p:sld>
+</file>
+
+<file path=ppt/slides/slide25.xml><?xml version="1.0" encoding="utf-8"?>
+<p:sld xmlns:a="http://schemas.openxmlformats.org/drawingml/2006/main" xmlns:r="http://schemas.openxmlformats.org/officeDocument/2006/relationships" xmlns:p="http://schemas.openxmlformats.org/presentationml/2006/main">
+  <p:cSld>
+    <p:spTree>
+      <p:nvGrpSpPr>
+        <p:cNvPr id="1" name=""/>
+        <p:cNvGrpSpPr/>
+        <p:nvPr/>
+      </p:nvGrpSpPr>
+      <p:grpSpPr>
+        <a:xfrm>
+          <a:off x="0" y="0"/>
+          <a:ext cx="0" cy="0"/>
+          <a:chOff x="0" y="0"/>
+          <a:chExt cx="0" cy="0"/>
+        </a:xfrm>
+      </p:grpSpPr>
+      <p:sp>
+        <p:nvSpPr>
+          <p:cNvPr id="14" name="Title 1">
+            <a:extLst>
+              <a:ext uri="{FF2B5EF4-FFF2-40B4-BE49-F238E27FC236}">
+                <a16:creationId xmlns:a16="http://schemas.microsoft.com/office/drawing/2014/main" id="{EF499182-B1CD-4399-99FD-7B1CA914FD59}"/>
+              </a:ext>
+            </a:extLst>
+          </p:cNvPr>
+          <p:cNvSpPr>
+            <a:spLocks noGrp="1"/>
+          </p:cNvSpPr>
+          <p:nvPr>
+            <p:ph hasCustomPrompt="1" type="title"/>
+          </p:nvPr>
+        </p:nvSpPr>
+        <p:spPr>
+          <a:xfrm>
+            <a:off x="1117601" y="405087"/>
+            <a:ext cx="14020798" cy="818882"/>
+          </a:xfrm>
+        </p:spPr>
+        <p:txBody>
+          <a:bodyPr/>
+          <a:lstStyle/>
+          <a:p>
+            <a:pPr lvl="0" indent="0" marL="0">
+              <a:buNone/>
+            </a:pPr>
+            <a:r>
+              <a:rPr/>
+              <a:t>How does it compare, and what are the caveats?</a:t>
+            </a:r>
+          </a:p>
+        </p:txBody>
+      </p:sp>
+      <p:sp>
+        <p:nvSpPr>
+          <p:cNvPr id="23" name="Content Placeholder 9">
+            <a:extLst>
+              <a:ext uri="{FF2B5EF4-FFF2-40B4-BE49-F238E27FC236}">
+                <a16:creationId xmlns:a16="http://schemas.microsoft.com/office/drawing/2014/main" id="{0C532851-4697-4B02-B344-E4852AF78CBF}"/>
+              </a:ext>
+            </a:extLst>
+          </p:cNvPr>
+          <p:cNvSpPr>
+            <a:spLocks noGrp="1"/>
+          </p:cNvSpPr>
+          <p:nvPr>
+            <p:ph hasCustomPrompt="1" idx="13" sz="quarter"/>
+          </p:nvPr>
+        </p:nvSpPr>
+        <p:spPr>
+          <a:xfrm>
+            <a:off x="1104904" y="2269323"/>
+            <a:ext cx="14020800" cy="5659894"/>
+          </a:xfrm>
+        </p:spPr>
+        <p:txBody>
+          <a:bodyPr wrap="square" rtlCol="0">
+            <a:normAutofit/>
+          </a:bodyPr>
+          <a:lstStyle/>
+          <a:p>
+            <a:pPr lvl="0"/>
+            <a:r>
+              <a:rPr/>
+              <a:t>Parker (ELSA, survey): ≈ </a:t>
+            </a:r>
+            <a:r>
+              <a:rPr b="1"/>
+              <a:t>12.5 yrs</a:t>
+            </a:r>
+            <a:r>
+              <a:rPr/>
+              <a:t> working from 50 (10.8 healthy + 1.7 not-healthy-but-working) vs. our </a:t>
+            </a:r>
+            <a:r>
+              <a:rPr b="1"/>
+              <a:t>13.3–13.8</a:t>
+            </a:r>
+            <a:r>
+              <a:rPr/>
+              <a:t> — direction expected: insured lives, ≥4-week claims, capped at 65</a:t>
+            </a:r>
+          </a:p>
+          <a:p>
+            <a:pPr lvl="0"/>
+            <a:r>
+              <a:rPr b="1"/>
+              <a:t>Strengths</a:t>
+            </a:r>
+            <a:r>
+              <a:rPr/>
+              <a:t>: objective dated events; incidence not prevalence; duration-dependent recovery; explicit retirement age; large exposure</a:t>
+            </a:r>
+          </a:p>
+          <a:p>
+            <a:pPr lvl="0"/>
+            <a:r>
+              <a:rPr b="1"/>
+              <a:t>Caveats</a:t>
+            </a:r>
+            <a:r>
+              <a:rPr/>
+              <a:t>: insured segment, not the population; claims as proxy for sickness; excluded conditions; everyone starts working; yearly steps; rates restricted to CMI subscribers</a:t>
+            </a:r>
+          </a:p>
+          <a:p>
+            <a:pPr lvl="0"/>
+            <a:r>
+              <a:rPr b="1"/>
+              <a:t>Uses</a:t>
+            </a:r>
+            <a:r>
+              <a:rPr/>
+              <a:t>: HWPLE as an intuitive summary of a morbidity basis; benchmarking IP assumptions; pensions projections allowing for sickness; policy on SPA and benefits</a:t>
+            </a:r>
+          </a:p>
+        </p:txBody>
+      </p:sp>
+      <p:sp>
+        <p:nvSpPr>
+          <p:cNvPr id="6" name="Footer Placeholder 4">
+            <a:extLst>
+              <a:ext uri="{FF2B5EF4-FFF2-40B4-BE49-F238E27FC236}">
+                <a16:creationId xmlns:a16="http://schemas.microsoft.com/office/drawing/2014/main" id="{8F9D7237-5CD7-6037-7D60-81DA36BE7AA4}"/>
+              </a:ext>
+            </a:extLst>
+          </p:cNvPr>
+          <p:cNvSpPr>
+            <a:spLocks noGrp="1"/>
+          </p:cNvSpPr>
+          <p:nvPr>
+            <p:ph idx="3" sz="quarter" type="ftr"/>
+          </p:nvPr>
+        </p:nvSpPr>
+        <p:spPr>
+          <a:xfrm>
+            <a:off x="1117600" y="8382533"/>
+            <a:ext cx="11368098" cy="486833"/>
+          </a:xfrm>
+          <a:prstGeom prst="rect">
+            <a:avLst/>
+          </a:prstGeom>
+        </p:spPr>
+        <p:txBody>
+          <a:bodyPr anchor="ctr" bIns="45720" lIns="91440" rIns="91440" rtlCol="0" tIns="45720" vert="horz"/>
+          <a:lstStyle>
+            <a:lvl1pPr algn="r">
+              <a:defRPr sz="1600">
+                <a:solidFill>
+                  <a:schemeClr val="tx1"/>
+                </a:solidFill>
+              </a:defRPr>
+            </a:lvl1pPr>
+          </a:lstStyle>
+          <a:p>
+            <a:r>
+              <a:rPr lang="en-GB"/>
+              <a:t>IFoA Life Conference</a:t>
+            </a:r>
+            <a:endParaRPr dirty="0" lang="en-GB"/>
+          </a:p>
+        </p:txBody>
+      </p:sp>
+      <p:sp>
+        <p:nvSpPr>
+          <p:cNvPr id="7" name="Slide Number Placeholder 5">
+            <a:extLst>
+              <a:ext uri="{FF2B5EF4-FFF2-40B4-BE49-F238E27FC236}">
+                <a16:creationId xmlns:a16="http://schemas.microsoft.com/office/drawing/2014/main" id="{7B4B538E-25FF-2CD8-CF5C-A8AD3F07FE13}"/>
+              </a:ext>
+            </a:extLst>
+          </p:cNvPr>
+          <p:cNvSpPr>
+            <a:spLocks noGrp="1"/>
+          </p:cNvSpPr>
+          <p:nvPr>
+            <p:ph idx="4" sz="quarter" type="sldNum"/>
+          </p:nvPr>
+        </p:nvSpPr>
+        <p:spPr>
+          <a:xfrm>
+            <a:off x="14573177" y="8382533"/>
+            <a:ext cx="529680" cy="486833"/>
+          </a:xfrm>
+          <a:prstGeom prst="rect">
+            <a:avLst/>
+          </a:prstGeom>
+          <a:solidFill>
+            <a:schemeClr val="tx1"/>
+          </a:solidFill>
+        </p:spPr>
+        <p:txBody>
+          <a:bodyPr anchor="ctr" bIns="45720" lIns="91440" rIns="91440" rtlCol="0" tIns="45720" vert="horz"/>
+          <a:lstStyle>
+            <a:lvl1pPr algn="ctr">
+              <a:defRPr b="1" i="0" sz="1200">
+                <a:solidFill>
+                  <a:schemeClr val="bg1"/>
+                </a:solidFill>
+                <a:latin charset="0" panose="020B0604020202020204" pitchFamily="34" typeface="Arial"/>
+                <a:cs charset="0" panose="020B0604020202020204" pitchFamily="34" typeface="Arial"/>
+              </a:defRPr>
+            </a:lvl1pPr>
+          </a:lstStyle>
+          <a:p>
+            <a:fld id="{40FC62D0-A2F2-4BF8-8DAC-E86C11000EC3}" type="slidenum">
+              <a:rPr lang="en-GB" smtClean="0"/>
+              <a:pPr/>
+              <a:t>‹#›</a:t>
+            </a:fld>
+            <a:endParaRPr dirty="0" lang="en-GB"/>
+          </a:p>
+        </p:txBody>
+      </p:sp>
+    </p:spTree>
+  </p:cSld>
+</p:sld>
+</file>
+
 <file path=ppt/slides/slide26.xml><?xml version="1.0" encoding="utf-8"?>
 <p:sld xmlns:a="http://schemas.openxmlformats.org/drawingml/2006/main" xmlns:r="http://schemas.openxmlformats.org/officeDocument/2006/relationships" xmlns:p="http://schemas.openxmlformats.org/presentationml/2006/main">
   <p:cSld>
@@ -15911,6 +16354,42 @@
       </p:grpSpPr>
       <p:sp>
         <p:nvSpPr>
+          <p:cNvPr id="14" name="Title 1">
+            <a:extLst>
+              <a:ext uri="{FF2B5EF4-FFF2-40B4-BE49-F238E27FC236}">
+                <a16:creationId xmlns:a16="http://schemas.microsoft.com/office/drawing/2014/main" id="{EF499182-B1CD-4399-99FD-7B1CA914FD59}"/>
+              </a:ext>
+            </a:extLst>
+          </p:cNvPr>
+          <p:cNvSpPr>
+            <a:spLocks noGrp="1"/>
+          </p:cNvSpPr>
+          <p:nvPr>
+            <p:ph hasCustomPrompt="1" type="title"/>
+          </p:nvPr>
+        </p:nvSpPr>
+        <p:spPr>
+          <a:xfrm>
+            <a:off x="1117601" y="405087"/>
+            <a:ext cx="14020798" cy="818882"/>
+          </a:xfrm>
+        </p:spPr>
+        <p:txBody>
+          <a:bodyPr/>
+          <a:lstStyle/>
+          <a:p>
+            <a:pPr lvl="0" indent="0" marL="0">
+              <a:buNone/>
+            </a:pPr>
+            <a:r>
+              <a:rPr/>
+              <a:t>❓ Questions — CMI section</a:t>
+            </a:r>
+          </a:p>
+        </p:txBody>
+      </p:sp>
+      <p:sp>
+        <p:nvSpPr>
           <p:cNvPr id="23" name="Content Placeholder 9">
             <a:extLst>
               <a:ext uri="{FF2B5EF4-FFF2-40B4-BE49-F238E27FC236}">
@@ -15937,28 +16416,45 @@
           </a:bodyPr>
           <a:lstStyle/>
           <a:p>
-            <a:pPr lvl="0" indent="0" marL="0">
-              <a:buNone/>
-            </a:pPr>
-            <a:r>
-              <a:rPr/>
-              <a:t>Of 15 years: </a:t>
-            </a:r>
-            <a:r>
-              <a:rPr b="1"/>
-              <a:t>13.1–13.8 yrs working</a:t>
-            </a:r>
-            <a:r>
-              <a:rPr/>
-              <a:t>, </a:t>
-            </a:r>
-            <a:r>
-              <a:rPr b="1"/>
-              <a:t>0.4–1.2 yrs not-healthy-not-working</a:t>
-            </a:r>
-            <a:r>
-              <a:rPr/>
-              <a:t>, remainder deaths. Men &gt; women; OC2 &gt; OC1 &gt; OC3 &gt; OC4. Data centred on 2011; female OC3/OC4 thin.</a:t>
+            <a:pPr lvl="0"/>
+            <a:r>
+              <a:rPr/>
+              <a:t>☒ By-age chart moved to Supplement; section now 4 slides. Fold back if David wants it for 10 min.</a:t>
+            </a:r>
+          </a:p>
+          <a:p>
+            <a:pPr lvl="0"/>
+            <a:r>
+              <a:rPr/>
+              <a:t>☐ Who redraws the HWP Tool 4-state diagram, and in what tool?</a:t>
+            </a:r>
+          </a:p>
+          <a:p>
+            <a:pPr lvl="0"/>
+            <a:r>
+              <a:rPr/>
+              <a:t>☐ OC1 &lt; OC2: offer hypotheses on the slide (selection, own-occupation definitions, mental-health claims in OC1) or “further work”?</a:t>
+            </a:r>
+          </a:p>
+          <a:p>
+            <a:pPr lvl="0"/>
+            <a:r>
+              <a:rPr/>
+              <a:t>☐ Is the Parker “10.81 + 1.67 = 12.5” comparison fair enough to put on a slide? Sanity-check with lead author.</a:t>
+            </a:r>
+          </a:p>
+          <a:p>
+            <a:pPr lvl="0"/>
+            <a:r>
+              <a:rPr/>
+              <a:t>☐ Combine comparison + caveats + uses on one slide (as drafted) or split into two?</a:t>
+            </a:r>
+          </a:p>
+          <a:p>
+            <a:pPr lvl="0"/>
+            <a:r>
+              <a:rPr/>
+              <a:t>☐ Confirm CMI is happy with the data-volume figures being shown.</a:t>
             </a:r>
           </a:p>
         </p:txBody>
@@ -16112,7 +16608,7 @@
             </a:pPr>
             <a:r>
               <a:rPr/>
-              <a:t>How does it compare, and what are the caveats?</a:t>
+              <a:t>Next steps for the Working Party [ALL · Q&amp;A 10 min]</a:t>
             </a:r>
           </a:p>
         </p:txBody>
@@ -16148,56 +16644,50 @@
             <a:pPr lvl="0"/>
             <a:r>
               <a:rPr/>
-              <a:t>Parker (ELSA, survey): ≈ </a:t>
+              <a:t>Monthly time steps; SPA evolution and early-retirement scenarios</a:t>
+            </a:r>
+          </a:p>
+          <a:p>
+            <a:pPr lvl="0"/>
+            <a:r>
+              <a:rPr/>
+              <a:t>Trends over successive CMI investigation periods; more granular cohorts</a:t>
+            </a:r>
+          </a:p>
+          <a:p>
+            <a:pPr lvl="0"/>
+            <a:r>
+              <a:rPr/>
+              <a:t>Survey-based benchmarks (ELSA, </a:t>
             </a:r>
             <a:r>
               <a:rPr b="1"/>
-              <a:t>12.5 yrs</a:t>
-            </a:r>
-            <a:r>
-              <a:rPr/>
-              <a:t> working from 50 (10.8 healthy + 1.7 not-healthy-but-working) vs. our </a:t>
-            </a:r>
+              <a:t>UKHLS</a:t>
+            </a:r>
+            <a:r>
+              <a:rPr/>
+              <a:t>) for the whole working-age population</a:t>
+            </a:r>
+          </a:p>
+          <a:p>
+            <a:pPr lvl="0"/>
+            <a:r>
+              <a:rPr/>
+              <a:t>Starting states other than “working”</a:t>
+            </a:r>
+          </a:p>
+          <a:p>
+            <a:pPr lvl="0"/>
+            <a:r>
+              <a:rPr/>
+              <a:t>Public-authority sickness/incapacity benefit data; international comparisons</a:t>
+            </a:r>
+          </a:p>
+          <a:p>
+            <a:pPr lvl="0"/>
             <a:r>
               <a:rPr b="1"/>
-              <a:t>13.3–13.8</a:t>
-            </a:r>
-            <a:r>
-              <a:rPr/>
-              <a:t> — direction expected: insured lives, ≥4-week claims, capped at 65</a:t>
-            </a:r>
-          </a:p>
-          <a:p>
-            <a:pPr lvl="0"/>
-            <a:r>
-              <a:rPr b="1"/>
-              <a:t>Strengths</a:t>
-            </a:r>
-            <a:r>
-              <a:rPr/>
-              <a:t>: objective dated events; incidence not prevalence; duration-dependent recovery; explicit retirement age; large exposure</a:t>
-            </a:r>
-          </a:p>
-          <a:p>
-            <a:pPr lvl="0"/>
-            <a:r>
-              <a:rPr b="1"/>
-              <a:t>Caveats</a:t>
-            </a:r>
-            <a:r>
-              <a:rPr/>
-              <a:t>: insured segment, not the population; claims as proxy for sickness; excluded conditions; everyone starts working; yearly steps; rates restricted to CMI subscribers</a:t>
-            </a:r>
-          </a:p>
-          <a:p>
-            <a:pPr lvl="0"/>
-            <a:r>
-              <a:rPr b="1"/>
-              <a:t>Uses</a:t>
-            </a:r>
-            <a:r>
-              <a:rPr/>
-              <a:t>: HWPLE as an intuitive summary of a morbidity basis; benchmarking IP assumptions; pensions projections allowing for sickness; policy on SPA and benefits</a:t>
+              <a:t>Questions?</a:t>
             </a:r>
           </a:p>
         </p:txBody>
@@ -16351,7 +16841,7 @@
             </a:pPr>
             <a:r>
               <a:rPr/>
-              <a:t>❓ Questions — CMI section</a:t>
+              <a:t>Thank you</a:t>
             </a:r>
           </a:p>
         </p:txBody>
@@ -16384,45 +16874,38 @@
           </a:bodyPr>
           <a:lstStyle/>
           <a:p>
-            <a:pPr lvl="0"/>
-            <a:r>
-              <a:rPr/>
-              <a:t>☒ By-age chart moved to Supplement; section now 4 slides. Fold back if David wants it for 10 min.</a:t>
-            </a:r>
-          </a:p>
-          <a:p>
-            <a:pPr lvl="0"/>
-            <a:r>
-              <a:rPr/>
-              <a:t>☐ Who redraws the HWP Tool 4-state diagram, and in what tool?</a:t>
-            </a:r>
-          </a:p>
-          <a:p>
-            <a:pPr lvl="0"/>
-            <a:r>
-              <a:rPr/>
-              <a:t>☐ OC1 &lt; OC2: offer hypotheses on the slide (selection, own-occupation definitions, mental-health claims in OC1) or “further work”?</a:t>
-            </a:r>
-          </a:p>
-          <a:p>
-            <a:pPr lvl="0"/>
-            <a:r>
-              <a:rPr/>
-              <a:t>☐ Is the Parker “10.81 + 1.67 = 12.5” comparison fair enough to put on a slide? Sanity-check with lead author.</a:t>
-            </a:r>
-          </a:p>
-          <a:p>
-            <a:pPr lvl="0"/>
-            <a:r>
-              <a:rPr/>
-              <a:t>☐ Combine comparison + caveats + uses on one slide (as drafted) or split into two?</a:t>
-            </a:r>
-          </a:p>
-          <a:p>
-            <a:pPr lvl="0"/>
-            <a:r>
-              <a:rPr/>
-              <a:t>☐ Confirm CMI is happy with the data-volume figures being shown.</a:t>
+            <a:pPr lvl="0" indent="0" marL="0">
+              <a:buNone/>
+            </a:pPr>
+            <a:r>
+              <a:rPr/>
+              <a:t>IFoA Healthy Workforce Working Party</a:t>
+            </a:r>
+          </a:p>
+          <a:p>
+            <a:pPr lvl="0" indent="0" marL="0">
+              <a:buNone/>
+            </a:pPr>
+            <a:r>
+              <a:rPr/>
+              <a:t>Correspondence: David Beddows, c/o professional.communities@actuaries.org.uk</a:t>
+            </a:r>
+          </a:p>
+          <a:p>
+            <a:pPr lvl="0" indent="0" marL="0">
+              <a:buNone/>
+            </a:pPr>
+            <a:r>
+              <a:rPr/>
+              <a:t>Paper: </a:t>
+            </a:r>
+            <a:r>
+              <a:rPr i="1"/>
+              <a:t>Healthy working life expectancy methods</a:t>
+            </a:r>
+            <a:r>
+              <a:rPr/>
+              <a:t> (IFoA HWWP, 2026) · Public HWP Tool</a:t>
             </a:r>
           </a:p>
         </p:txBody>
@@ -16576,7 +17059,7 @@
             </a:pPr>
             <a:r>
               <a:rPr/>
-              <a:t>Next steps for the Working Party [ALL · Q&amp;A 10 min]</a:t>
+              <a:t>❓ Questions — Close</a:t>
             </a:r>
           </a:p>
         </p:txBody>
@@ -16612,50 +17095,28 @@
             <a:pPr lvl="0"/>
             <a:r>
               <a:rPr/>
-              <a:t>Monthly time steps; SPA evolution and early-retirement scenarios</a:t>
+              <a:t>☐ Prioritise three “next steps” or keep all?</a:t>
             </a:r>
           </a:p>
           <a:p>
             <a:pPr lvl="0"/>
             <a:r>
               <a:rPr/>
-              <a:t>Trends over successive CMI investigation periods; more granular cohorts</a:t>
+              <a:t>☐ Name a next deliverable and date (v2 tool? journal submission?)</a:t>
             </a:r>
           </a:p>
           <a:p>
             <a:pPr lvl="0"/>
             <a:r>
               <a:rPr/>
-              <a:t>Survey-based benchmarks (ELSA, </a:t>
-            </a:r>
-            <a:r>
-              <a:rPr b="1"/>
-              <a:t>UKHLS</a:t>
-            </a:r>
-            <a:r>
-              <a:rPr/>
-              <a:t>) for the whole working-age population</a:t>
+              <a:t>☐ Contact details: David only, or all presenters? QR code to the paper?</a:t>
             </a:r>
           </a:p>
           <a:p>
             <a:pPr lvl="0"/>
             <a:r>
               <a:rPr/>
-              <a:t>Starting states other than “working”</a:t>
-            </a:r>
-          </a:p>
-          <a:p>
-            <a:pPr lvl="0"/>
-            <a:r>
-              <a:rPr/>
-              <a:t>Public-authority sickness/incapacity benefit data; international comparisons</a:t>
-            </a:r>
-          </a:p>
-          <a:p>
-            <a:pPr lvl="0"/>
-            <a:r>
-              <a:rPr b="1"/>
-              <a:t>Questions?</a:t>
+              <a:t>☐ Merge “next steps” into the “thank you” slide to save one?</a:t>
             </a:r>
           </a:p>
         </p:txBody>
@@ -17157,7 +17618,7 @@
       </p:grpSpPr>
       <p:sp>
         <p:nvSpPr>
-          <p:cNvPr id="14" name="Title 1">
+          <p:cNvPr id="97" name="Title 1">
             <a:extLst>
               <a:ext uri="{FF2B5EF4-FFF2-40B4-BE49-F238E27FC236}">
                 <a16:creationId xmlns:a16="http://schemas.microsoft.com/office/drawing/2014/main" id="{EF499182-B1CD-4399-99FD-7B1CA914FD59}"/>
@@ -17173,8 +17634,8 @@
         </p:nvSpPr>
         <p:spPr>
           <a:xfrm>
-            <a:off x="1117601" y="405087"/>
-            <a:ext cx="14020798" cy="818882"/>
+            <a:off x="1500000" y="3400000"/>
+            <a:ext cx="13256000" cy="2200000"/>
           </a:xfrm>
         </p:spPr>
         <p:txBody>
@@ -17186,81 +17647,17 @@
             </a:pPr>
             <a:r>
               <a:rPr/>
-              <a:t>Thank you</a:t>
-            </a:r>
-          </a:p>
-        </p:txBody>
-      </p:sp>
-      <p:sp>
-        <p:nvSpPr>
-          <p:cNvPr id="23" name="Content Placeholder 9">
-            <a:extLst>
-              <a:ext uri="{FF2B5EF4-FFF2-40B4-BE49-F238E27FC236}">
-                <a16:creationId xmlns:a16="http://schemas.microsoft.com/office/drawing/2014/main" id="{0C532851-4697-4B02-B344-E4852AF78CBF}"/>
-              </a:ext>
-            </a:extLst>
-          </p:cNvPr>
-          <p:cNvSpPr>
-            <a:spLocks noGrp="1"/>
-          </p:cNvSpPr>
-          <p:nvPr>
-            <p:ph hasCustomPrompt="1" idx="13" sz="quarter"/>
-          </p:nvPr>
-        </p:nvSpPr>
-        <p:spPr>
-          <a:xfrm>
-            <a:off x="1104904" y="2269323"/>
-            <a:ext cx="14020800" cy="5659894"/>
-          </a:xfrm>
-        </p:spPr>
-        <p:txBody>
-          <a:bodyPr wrap="square" rtlCol="0">
-            <a:normAutofit/>
-          </a:bodyPr>
-          <a:lstStyle/>
-          <a:p>
-            <a:pPr lvl="0" indent="0" marL="0">
-              <a:buNone/>
-            </a:pPr>
-            <a:r>
-              <a:rPr/>
-              <a:t>IFoA Healthy Workforce Working Party</a:t>
-            </a:r>
-          </a:p>
-          <a:p>
-            <a:pPr lvl="0" indent="0" marL="0">
-              <a:buNone/>
-            </a:pPr>
-            <a:r>
-              <a:rPr/>
-              <a:t>Correspondence: David Beddows, c/o professional.communities@actuaries.org.uk</a:t>
-            </a:r>
-          </a:p>
-          <a:p>
-            <a:pPr lvl="0" indent="0" marL="0">
-              <a:buNone/>
-            </a:pPr>
-            <a:r>
-              <a:rPr/>
-              <a:t>Paper: </a:t>
-            </a:r>
-            <a:r>
-              <a:rPr i="1"/>
-              <a:t>Healthy working life expectancy methods</a:t>
-            </a:r>
-            <a:r>
-              <a:rPr/>
-              <a:t> (IFoA HWWP, 2026) · Public HWP Tool</a:t>
-            </a:r>
-          </a:p>
-        </p:txBody>
-      </p:sp>
-      <p:sp>
-        <p:nvSpPr>
-          <p:cNvPr id="6" name="Footer Placeholder 4">
-            <a:extLst>
-              <a:ext uri="{FF2B5EF4-FFF2-40B4-BE49-F238E27FC236}">
-                <a16:creationId xmlns:a16="http://schemas.microsoft.com/office/drawing/2014/main" id="{8F9D7237-5CD7-6037-7D60-81DA36BE7AA4}"/>
+              <a:t>SUPPLEMENT — material held back from the main deck</a:t>
+            </a:r>
+          </a:p>
+        </p:txBody>
+      </p:sp>
+      <p:sp>
+        <p:nvSpPr>
+          <p:cNvPr id="8" name="Footer Placeholder 4">
+            <a:extLst>
+              <a:ext uri="{FF2B5EF4-FFF2-40B4-BE49-F238E27FC236}">
+                <a16:creationId xmlns:a16="http://schemas.microsoft.com/office/drawing/2014/main" id="{15C406F6-FE38-14E0-8BF8-B9AC42B3EF15}"/>
               </a:ext>
             </a:extLst>
           </p:cNvPr>
@@ -17286,7 +17683,7 @@
             <a:lvl1pPr algn="r">
               <a:defRPr sz="1600">
                 <a:solidFill>
-                  <a:schemeClr val="tx1"/>
+                  <a:schemeClr val="bg1"/>
                 </a:solidFill>
               </a:defRPr>
             </a:lvl1pPr>
@@ -17302,10 +17699,10 @@
       </p:sp>
       <p:sp>
         <p:nvSpPr>
-          <p:cNvPr id="7" name="Slide Number Placeholder 5">
-            <a:extLst>
-              <a:ext uri="{FF2B5EF4-FFF2-40B4-BE49-F238E27FC236}">
-                <a16:creationId xmlns:a16="http://schemas.microsoft.com/office/drawing/2014/main" id="{7B4B538E-25FF-2CD8-CF5C-A8AD3F07FE13}"/>
+          <p:cNvPr id="9" name="Slide Number Placeholder 5">
+            <a:extLst>
+              <a:ext uri="{FF2B5EF4-FFF2-40B4-BE49-F238E27FC236}">
+                <a16:creationId xmlns:a16="http://schemas.microsoft.com/office/drawing/2014/main" id="{C18B60AF-E1FE-C3E6-C9A3-0721F1D08E6F}"/>
               </a:ext>
             </a:extLst>
           </p:cNvPr>
@@ -17325,7 +17722,7 @@
             <a:avLst/>
           </a:prstGeom>
           <a:solidFill>
-            <a:schemeClr val="tx1"/>
+            <a:schemeClr val="bg1"/>
           </a:solidFill>
         </p:spPr>
         <p:txBody>
@@ -17334,7 +17731,7 @@
             <a:lvl1pPr algn="ctr">
               <a:defRPr b="1" i="0" sz="1200">
                 <a:solidFill>
-                  <a:schemeClr val="bg1"/>
+                  <a:schemeClr val="tx1"/>
                 </a:solidFill>
                 <a:latin charset="0" panose="020B0604020202020204" pitchFamily="34" typeface="Arial"/>
                 <a:cs charset="0" panose="020B0604020202020204" pitchFamily="34" typeface="Arial"/>
@@ -17404,7 +17801,7 @@
             </a:pPr>
             <a:r>
               <a:rPr/>
-              <a:t>❓ Questions — Close</a:t>
+              <a:t>❓ Supplement — fold-back review</a:t>
             </a:r>
           </a:p>
         </p:txBody>
@@ -17440,28 +17837,41 @@
             <a:pPr lvl="0"/>
             <a:r>
               <a:rPr/>
-              <a:t>☐ Prioritise three “next steps” or keep all?</a:t>
+              <a:t>☐ Go through each supplement slide and mark: </a:t>
+            </a:r>
+            <a:r>
+              <a:rPr b="1"/>
+              <a:t>promote</a:t>
+            </a:r>
+            <a:r>
+              <a:rPr/>
+              <a:t> / </a:t>
+            </a:r>
+            <a:r>
+              <a:rPr b="1"/>
+              <a:t>appendix</a:t>
+            </a:r>
+            <a:r>
+              <a:rPr/>
+              <a:t> / </a:t>
+            </a:r>
+            <a:r>
+              <a:rPr b="1"/>
+              <a:t>delete</a:t>
             </a:r>
           </a:p>
           <a:p>
             <a:pPr lvl="0"/>
             <a:r>
               <a:rPr/>
-              <a:t>☐ Name a next deliverable and date (v2 tool? journal submission?)</a:t>
+              <a:t>☐ Anything promoted must displace something — main target is ~12 content slides</a:t>
             </a:r>
           </a:p>
           <a:p>
             <a:pPr lvl="0"/>
             <a:r>
               <a:rPr/>
-              <a:t>☐ Contact details: David only, or all presenters? QR code to the paper?</a:t>
-            </a:r>
-          </a:p>
-          <a:p>
-            <a:pPr lvl="0"/>
-            <a:r>
-              <a:rPr/>
-              <a:t>☐ Merge “next steps” into the “thank you” slide to save one?</a:t>
+              <a:t>☐ Anything in main that is really supplementary detail → move down here</a:t>
             </a:r>
           </a:p>
         </p:txBody>
@@ -17615,7 +18025,7 @@
             </a:pPr>
             <a:r>
               <a:rPr/>
-              <a:t>SUPPLEMENT — material held back from the main deck</a:t>
+              <a:t>Supplement · Why this matters</a:t>
             </a:r>
           </a:p>
         </p:txBody>
@@ -17769,7 +18179,7 @@
             </a:pPr>
             <a:r>
               <a:rPr/>
-              <a:t>❓ Supplement — fold-back review</a:t>
+              <a:t>What we can — and cannot — measure</a:t>
             </a:r>
           </a:p>
         </p:txBody>
@@ -17805,41 +18215,39 @@
             <a:pPr lvl="0"/>
             <a:r>
               <a:rPr/>
-              <a:t>☐ Go through each supplement slide and mark: </a:t>
-            </a:r>
+              <a:t>Life expectancy: two states, well measured</a:t>
+            </a:r>
+          </a:p>
+          <a:p>
+            <a:pPr lvl="0"/>
+            <a:r>
+              <a:rPr/>
+              <a:t>Healthy life expectancy: needs a definition of “healthy”</a:t>
+            </a:r>
+          </a:p>
+          <a:p>
+            <a:pPr lvl="0"/>
+            <a:r>
+              <a:rPr/>
+              <a:t>Working life expectancy: needs a definition of “working”</a:t>
+            </a:r>
+          </a:p>
+          <a:p>
+            <a:pPr lvl="0"/>
             <a:r>
               <a:rPr b="1"/>
-              <a:t>promote</a:t>
-            </a:r>
-            <a:r>
-              <a:rPr/>
-              <a:t> / </a:t>
-            </a:r>
-            <a:r>
-              <a:rPr b="1"/>
-              <a:t>appendix</a:t>
-            </a:r>
-            <a:r>
-              <a:rPr/>
-              <a:t> / </a:t>
-            </a:r>
-            <a:r>
-              <a:rPr b="1"/>
-              <a:t>delete</a:t>
+              <a:t>Healthy working life expectancy</a:t>
+            </a:r>
+            <a:r>
+              <a:rPr/>
+              <a:t>: both — and the data to observe the transitions</a:t>
             </a:r>
           </a:p>
           <a:p>
             <a:pPr lvl="0"/>
             <a:r>
               <a:rPr/>
-              <a:t>☐ Anything promoted must displace something — main target is ~12 content slides</a:t>
-            </a:r>
-          </a:p>
-          <a:p>
-            <a:pPr lvl="0"/>
-            <a:r>
-              <a:rPr/>
-              <a:t>☐ Anything in main that is really supplementary detail → move down here</a:t>
+              <a:t>Systematic review (Parker et al. 2020a): “no current and reliable estimates” for the UK</a:t>
             </a:r>
           </a:p>
         </p:txBody>
@@ -17946,382 +18354,6 @@
 </file>
 
 <file path=ppt/slides/slide34.xml><?xml version="1.0" encoding="utf-8"?>
-<p:sld xmlns:a="http://schemas.openxmlformats.org/drawingml/2006/main" xmlns:r="http://schemas.openxmlformats.org/officeDocument/2006/relationships" xmlns:p="http://schemas.openxmlformats.org/presentationml/2006/main">
-  <p:cSld>
-    <p:spTree>
-      <p:nvGrpSpPr>
-        <p:cNvPr id="1" name=""/>
-        <p:cNvGrpSpPr/>
-        <p:nvPr/>
-      </p:nvGrpSpPr>
-      <p:grpSpPr>
-        <a:xfrm>
-          <a:off x="0" y="0"/>
-          <a:ext cx="0" cy="0"/>
-          <a:chOff x="0" y="0"/>
-          <a:chExt cx="0" cy="0"/>
-        </a:xfrm>
-      </p:grpSpPr>
-      <p:sp>
-        <p:nvSpPr>
-          <p:cNvPr id="97" name="Title 1">
-            <a:extLst>
-              <a:ext uri="{FF2B5EF4-FFF2-40B4-BE49-F238E27FC236}">
-                <a16:creationId xmlns:a16="http://schemas.microsoft.com/office/drawing/2014/main" id="{EF499182-B1CD-4399-99FD-7B1CA914FD59}"/>
-              </a:ext>
-            </a:extLst>
-          </p:cNvPr>
-          <p:cNvSpPr>
-            <a:spLocks noGrp="1"/>
-          </p:cNvSpPr>
-          <p:nvPr>
-            <p:ph hasCustomPrompt="1" type="title"/>
-          </p:nvPr>
-        </p:nvSpPr>
-        <p:spPr>
-          <a:xfrm>
-            <a:off x="1500000" y="3400000"/>
-            <a:ext cx="13256000" cy="2200000"/>
-          </a:xfrm>
-        </p:spPr>
-        <p:txBody>
-          <a:bodyPr/>
-          <a:lstStyle/>
-          <a:p>
-            <a:pPr lvl="0" indent="0" marL="0">
-              <a:buNone/>
-            </a:pPr>
-            <a:r>
-              <a:rPr/>
-              <a:t>Supplement · Why this matters</a:t>
-            </a:r>
-          </a:p>
-        </p:txBody>
-      </p:sp>
-      <p:sp>
-        <p:nvSpPr>
-          <p:cNvPr id="8" name="Footer Placeholder 4">
-            <a:extLst>
-              <a:ext uri="{FF2B5EF4-FFF2-40B4-BE49-F238E27FC236}">
-                <a16:creationId xmlns:a16="http://schemas.microsoft.com/office/drawing/2014/main" id="{15C406F6-FE38-14E0-8BF8-B9AC42B3EF15}"/>
-              </a:ext>
-            </a:extLst>
-          </p:cNvPr>
-          <p:cNvSpPr>
-            <a:spLocks noGrp="1"/>
-          </p:cNvSpPr>
-          <p:nvPr>
-            <p:ph idx="3" sz="quarter" type="ftr"/>
-          </p:nvPr>
-        </p:nvSpPr>
-        <p:spPr>
-          <a:xfrm>
-            <a:off x="1117600" y="8382533"/>
-            <a:ext cx="11368098" cy="486833"/>
-          </a:xfrm>
-          <a:prstGeom prst="rect">
-            <a:avLst/>
-          </a:prstGeom>
-        </p:spPr>
-        <p:txBody>
-          <a:bodyPr anchor="ctr" bIns="45720" lIns="91440" rIns="91440" rtlCol="0" tIns="45720" vert="horz"/>
-          <a:lstStyle>
-            <a:lvl1pPr algn="r">
-              <a:defRPr sz="1600">
-                <a:solidFill>
-                  <a:schemeClr val="bg1"/>
-                </a:solidFill>
-              </a:defRPr>
-            </a:lvl1pPr>
-          </a:lstStyle>
-          <a:p>
-            <a:r>
-              <a:rPr lang="en-GB"/>
-              <a:t>IFoA Life Conference</a:t>
-            </a:r>
-            <a:endParaRPr dirty="0" lang="en-GB"/>
-          </a:p>
-        </p:txBody>
-      </p:sp>
-      <p:sp>
-        <p:nvSpPr>
-          <p:cNvPr id="9" name="Slide Number Placeholder 5">
-            <a:extLst>
-              <a:ext uri="{FF2B5EF4-FFF2-40B4-BE49-F238E27FC236}">
-                <a16:creationId xmlns:a16="http://schemas.microsoft.com/office/drawing/2014/main" id="{C18B60AF-E1FE-C3E6-C9A3-0721F1D08E6F}"/>
-              </a:ext>
-            </a:extLst>
-          </p:cNvPr>
-          <p:cNvSpPr>
-            <a:spLocks noGrp="1"/>
-          </p:cNvSpPr>
-          <p:nvPr>
-            <p:ph idx="4" sz="quarter" type="sldNum"/>
-          </p:nvPr>
-        </p:nvSpPr>
-        <p:spPr>
-          <a:xfrm>
-            <a:off x="14573177" y="8382533"/>
-            <a:ext cx="529680" cy="486833"/>
-          </a:xfrm>
-          <a:prstGeom prst="rect">
-            <a:avLst/>
-          </a:prstGeom>
-          <a:solidFill>
-            <a:schemeClr val="bg1"/>
-          </a:solidFill>
-        </p:spPr>
-        <p:txBody>
-          <a:bodyPr anchor="ctr" bIns="45720" lIns="91440" rIns="91440" rtlCol="0" tIns="45720" vert="horz"/>
-          <a:lstStyle>
-            <a:lvl1pPr algn="ctr">
-              <a:defRPr b="1" i="0" sz="1200">
-                <a:solidFill>
-                  <a:schemeClr val="tx1"/>
-                </a:solidFill>
-                <a:latin charset="0" panose="020B0604020202020204" pitchFamily="34" typeface="Arial"/>
-                <a:cs charset="0" panose="020B0604020202020204" pitchFamily="34" typeface="Arial"/>
-              </a:defRPr>
-            </a:lvl1pPr>
-          </a:lstStyle>
-          <a:p>
-            <a:fld id="{40FC62D0-A2F2-4BF8-8DAC-E86C11000EC3}" type="slidenum">
-              <a:rPr lang="en-GB" smtClean="0"/>
-              <a:pPr/>
-              <a:t>‹#›</a:t>
-            </a:fld>
-            <a:endParaRPr dirty="0" lang="en-GB"/>
-          </a:p>
-        </p:txBody>
-      </p:sp>
-    </p:spTree>
-  </p:cSld>
-</p:sld>
-</file>
-
-<file path=ppt/slides/slide35.xml><?xml version="1.0" encoding="utf-8"?>
-<p:sld xmlns:a="http://schemas.openxmlformats.org/drawingml/2006/main" xmlns:r="http://schemas.openxmlformats.org/officeDocument/2006/relationships" xmlns:p="http://schemas.openxmlformats.org/presentationml/2006/main">
-  <p:cSld>
-    <p:spTree>
-      <p:nvGrpSpPr>
-        <p:cNvPr id="1" name=""/>
-        <p:cNvGrpSpPr/>
-        <p:nvPr/>
-      </p:nvGrpSpPr>
-      <p:grpSpPr>
-        <a:xfrm>
-          <a:off x="0" y="0"/>
-          <a:ext cx="0" cy="0"/>
-          <a:chOff x="0" y="0"/>
-          <a:chExt cx="0" cy="0"/>
-        </a:xfrm>
-      </p:grpSpPr>
-      <p:sp>
-        <p:nvSpPr>
-          <p:cNvPr id="14" name="Title 1">
-            <a:extLst>
-              <a:ext uri="{FF2B5EF4-FFF2-40B4-BE49-F238E27FC236}">
-                <a16:creationId xmlns:a16="http://schemas.microsoft.com/office/drawing/2014/main" id="{EF499182-B1CD-4399-99FD-7B1CA914FD59}"/>
-              </a:ext>
-            </a:extLst>
-          </p:cNvPr>
-          <p:cNvSpPr>
-            <a:spLocks noGrp="1"/>
-          </p:cNvSpPr>
-          <p:nvPr>
-            <p:ph hasCustomPrompt="1" type="title"/>
-          </p:nvPr>
-        </p:nvSpPr>
-        <p:spPr>
-          <a:xfrm>
-            <a:off x="1117601" y="405087"/>
-            <a:ext cx="14020798" cy="818882"/>
-          </a:xfrm>
-        </p:spPr>
-        <p:txBody>
-          <a:bodyPr/>
-          <a:lstStyle/>
-          <a:p>
-            <a:pPr lvl="0" indent="0" marL="0">
-              <a:buNone/>
-            </a:pPr>
-            <a:r>
-              <a:rPr/>
-              <a:t>What we can — and cannot — measure</a:t>
-            </a:r>
-          </a:p>
-        </p:txBody>
-      </p:sp>
-      <p:sp>
-        <p:nvSpPr>
-          <p:cNvPr id="23" name="Content Placeholder 9">
-            <a:extLst>
-              <a:ext uri="{FF2B5EF4-FFF2-40B4-BE49-F238E27FC236}">
-                <a16:creationId xmlns:a16="http://schemas.microsoft.com/office/drawing/2014/main" id="{0C532851-4697-4B02-B344-E4852AF78CBF}"/>
-              </a:ext>
-            </a:extLst>
-          </p:cNvPr>
-          <p:cNvSpPr>
-            <a:spLocks noGrp="1"/>
-          </p:cNvSpPr>
-          <p:nvPr>
-            <p:ph hasCustomPrompt="1" idx="13" sz="quarter"/>
-          </p:nvPr>
-        </p:nvSpPr>
-        <p:spPr>
-          <a:xfrm>
-            <a:off x="1104904" y="2269323"/>
-            <a:ext cx="14020800" cy="5659894"/>
-          </a:xfrm>
-        </p:spPr>
-        <p:txBody>
-          <a:bodyPr wrap="square" rtlCol="0">
-            <a:normAutofit/>
-          </a:bodyPr>
-          <a:lstStyle/>
-          <a:p>
-            <a:pPr lvl="0"/>
-            <a:r>
-              <a:rPr/>
-              <a:t>Life expectancy: two states, well measured</a:t>
-            </a:r>
-          </a:p>
-          <a:p>
-            <a:pPr lvl="0"/>
-            <a:r>
-              <a:rPr/>
-              <a:t>Healthy life expectancy: needs a definition of “healthy”</a:t>
-            </a:r>
-          </a:p>
-          <a:p>
-            <a:pPr lvl="0"/>
-            <a:r>
-              <a:rPr/>
-              <a:t>Working life expectancy: needs a definition of “working”</a:t>
-            </a:r>
-          </a:p>
-          <a:p>
-            <a:pPr lvl="0"/>
-            <a:r>
-              <a:rPr b="1"/>
-              <a:t>Healthy working life expectancy</a:t>
-            </a:r>
-            <a:r>
-              <a:rPr/>
-              <a:t>: both — and the data to observe the transitions</a:t>
-            </a:r>
-          </a:p>
-          <a:p>
-            <a:pPr lvl="0"/>
-            <a:r>
-              <a:rPr/>
-              <a:t>Systematic review (Parker et al. 2020a): “no current and reliable estimates” for the UK</a:t>
-            </a:r>
-          </a:p>
-        </p:txBody>
-      </p:sp>
-      <p:sp>
-        <p:nvSpPr>
-          <p:cNvPr id="6" name="Footer Placeholder 4">
-            <a:extLst>
-              <a:ext uri="{FF2B5EF4-FFF2-40B4-BE49-F238E27FC236}">
-                <a16:creationId xmlns:a16="http://schemas.microsoft.com/office/drawing/2014/main" id="{8F9D7237-5CD7-6037-7D60-81DA36BE7AA4}"/>
-              </a:ext>
-            </a:extLst>
-          </p:cNvPr>
-          <p:cNvSpPr>
-            <a:spLocks noGrp="1"/>
-          </p:cNvSpPr>
-          <p:nvPr>
-            <p:ph idx="3" sz="quarter" type="ftr"/>
-          </p:nvPr>
-        </p:nvSpPr>
-        <p:spPr>
-          <a:xfrm>
-            <a:off x="1117600" y="8382533"/>
-            <a:ext cx="11368098" cy="486833"/>
-          </a:xfrm>
-          <a:prstGeom prst="rect">
-            <a:avLst/>
-          </a:prstGeom>
-        </p:spPr>
-        <p:txBody>
-          <a:bodyPr anchor="ctr" bIns="45720" lIns="91440" rIns="91440" rtlCol="0" tIns="45720" vert="horz"/>
-          <a:lstStyle>
-            <a:lvl1pPr algn="r">
-              <a:defRPr sz="1600">
-                <a:solidFill>
-                  <a:schemeClr val="tx1"/>
-                </a:solidFill>
-              </a:defRPr>
-            </a:lvl1pPr>
-          </a:lstStyle>
-          <a:p>
-            <a:r>
-              <a:rPr lang="en-GB"/>
-              <a:t>IFoA Life Conference</a:t>
-            </a:r>
-            <a:endParaRPr dirty="0" lang="en-GB"/>
-          </a:p>
-        </p:txBody>
-      </p:sp>
-      <p:sp>
-        <p:nvSpPr>
-          <p:cNvPr id="7" name="Slide Number Placeholder 5">
-            <a:extLst>
-              <a:ext uri="{FF2B5EF4-FFF2-40B4-BE49-F238E27FC236}">
-                <a16:creationId xmlns:a16="http://schemas.microsoft.com/office/drawing/2014/main" id="{7B4B538E-25FF-2CD8-CF5C-A8AD3F07FE13}"/>
-              </a:ext>
-            </a:extLst>
-          </p:cNvPr>
-          <p:cNvSpPr>
-            <a:spLocks noGrp="1"/>
-          </p:cNvSpPr>
-          <p:nvPr>
-            <p:ph idx="4" sz="quarter" type="sldNum"/>
-          </p:nvPr>
-        </p:nvSpPr>
-        <p:spPr>
-          <a:xfrm>
-            <a:off x="14573177" y="8382533"/>
-            <a:ext cx="529680" cy="486833"/>
-          </a:xfrm>
-          <a:prstGeom prst="rect">
-            <a:avLst/>
-          </a:prstGeom>
-          <a:solidFill>
-            <a:schemeClr val="tx1"/>
-          </a:solidFill>
-        </p:spPr>
-        <p:txBody>
-          <a:bodyPr anchor="ctr" bIns="45720" lIns="91440" rIns="91440" rtlCol="0" tIns="45720" vert="horz"/>
-          <a:lstStyle>
-            <a:lvl1pPr algn="ctr">
-              <a:defRPr b="1" i="0" sz="1200">
-                <a:solidFill>
-                  <a:schemeClr val="bg1"/>
-                </a:solidFill>
-                <a:latin charset="0" panose="020B0604020202020204" pitchFamily="34" typeface="Arial"/>
-                <a:cs charset="0" panose="020B0604020202020204" pitchFamily="34" typeface="Arial"/>
-              </a:defRPr>
-            </a:lvl1pPr>
-          </a:lstStyle>
-          <a:p>
-            <a:fld id="{40FC62D0-A2F2-4BF8-8DAC-E86C11000EC3}" type="slidenum">
-              <a:rPr lang="en-GB" smtClean="0"/>
-              <a:pPr/>
-              <a:t>‹#›</a:t>
-            </a:fld>
-            <a:endParaRPr dirty="0" lang="en-GB"/>
-          </a:p>
-        </p:txBody>
-      </p:sp>
-    </p:spTree>
-  </p:cSld>
-</p:sld>
-</file>
-
-<file path=ppt/slides/slide36.xml><?xml version="1.0" encoding="utf-8"?>
 <p:sld xmlns:a="http://schemas.openxmlformats.org/drawingml/2006/main" xmlns:r="http://schemas.openxmlformats.org/officeDocument/2006/relationships" xmlns:p="http://schemas.openxmlformats.org/presentationml/2006/main">
   <p:cSld>
     <p:spTree>
@@ -19043,6 +19075,410 @@
 </p:sld>
 </file>
 
+<file path=ppt/slides/slide35.xml><?xml version="1.0" encoding="utf-8"?>
+<p:sld xmlns:a="http://schemas.openxmlformats.org/drawingml/2006/main" xmlns:r="http://schemas.openxmlformats.org/officeDocument/2006/relationships" xmlns:p="http://schemas.openxmlformats.org/presentationml/2006/main">
+  <p:cSld>
+    <p:spTree>
+      <p:nvGrpSpPr>
+        <p:cNvPr id="1" name=""/>
+        <p:cNvGrpSpPr/>
+        <p:nvPr/>
+      </p:nvGrpSpPr>
+      <p:grpSpPr>
+        <a:xfrm>
+          <a:off x="0" y="0"/>
+          <a:ext cx="0" cy="0"/>
+          <a:chOff x="0" y="0"/>
+          <a:chExt cx="0" cy="0"/>
+        </a:xfrm>
+      </p:grpSpPr>
+      <p:sp>
+        <p:nvSpPr>
+          <p:cNvPr id="97" name="Title 1">
+            <a:extLst>
+              <a:ext uri="{FF2B5EF4-FFF2-40B4-BE49-F238E27FC236}">
+                <a16:creationId xmlns:a16="http://schemas.microsoft.com/office/drawing/2014/main" id="{EF499182-B1CD-4399-99FD-7B1CA914FD59}"/>
+              </a:ext>
+            </a:extLst>
+          </p:cNvPr>
+          <p:cNvSpPr>
+            <a:spLocks noGrp="1"/>
+          </p:cNvSpPr>
+          <p:nvPr>
+            <p:ph hasCustomPrompt="1" type="title"/>
+          </p:nvPr>
+        </p:nvSpPr>
+        <p:spPr>
+          <a:xfrm>
+            <a:off x="1500000" y="3400000"/>
+            <a:ext cx="13256000" cy="2200000"/>
+          </a:xfrm>
+        </p:spPr>
+        <p:txBody>
+          <a:bodyPr/>
+          <a:lstStyle/>
+          <a:p>
+            <a:pPr lvl="0" indent="0" marL="0">
+              <a:buNone/>
+            </a:pPr>
+            <a:r>
+              <a:rPr/>
+              <a:t>Supplement · Survey approaches</a:t>
+            </a:r>
+          </a:p>
+        </p:txBody>
+      </p:sp>
+      <p:sp>
+        <p:nvSpPr>
+          <p:cNvPr id="8" name="Footer Placeholder 4">
+            <a:extLst>
+              <a:ext uri="{FF2B5EF4-FFF2-40B4-BE49-F238E27FC236}">
+                <a16:creationId xmlns:a16="http://schemas.microsoft.com/office/drawing/2014/main" id="{15C406F6-FE38-14E0-8BF8-B9AC42B3EF15}"/>
+              </a:ext>
+            </a:extLst>
+          </p:cNvPr>
+          <p:cNvSpPr>
+            <a:spLocks noGrp="1"/>
+          </p:cNvSpPr>
+          <p:nvPr>
+            <p:ph idx="3" sz="quarter" type="ftr"/>
+          </p:nvPr>
+        </p:nvSpPr>
+        <p:spPr>
+          <a:xfrm>
+            <a:off x="1117600" y="8382533"/>
+            <a:ext cx="11368098" cy="486833"/>
+          </a:xfrm>
+          <a:prstGeom prst="rect">
+            <a:avLst/>
+          </a:prstGeom>
+        </p:spPr>
+        <p:txBody>
+          <a:bodyPr anchor="ctr" bIns="45720" lIns="91440" rIns="91440" rtlCol="0" tIns="45720" vert="horz"/>
+          <a:lstStyle>
+            <a:lvl1pPr algn="r">
+              <a:defRPr sz="1600">
+                <a:solidFill>
+                  <a:schemeClr val="bg1"/>
+                </a:solidFill>
+              </a:defRPr>
+            </a:lvl1pPr>
+          </a:lstStyle>
+          <a:p>
+            <a:r>
+              <a:rPr lang="en-GB"/>
+              <a:t>IFoA Life Conference</a:t>
+            </a:r>
+            <a:endParaRPr dirty="0" lang="en-GB"/>
+          </a:p>
+        </p:txBody>
+      </p:sp>
+      <p:sp>
+        <p:nvSpPr>
+          <p:cNvPr id="9" name="Slide Number Placeholder 5">
+            <a:extLst>
+              <a:ext uri="{FF2B5EF4-FFF2-40B4-BE49-F238E27FC236}">
+                <a16:creationId xmlns:a16="http://schemas.microsoft.com/office/drawing/2014/main" id="{C18B60AF-E1FE-C3E6-C9A3-0721F1D08E6F}"/>
+              </a:ext>
+            </a:extLst>
+          </p:cNvPr>
+          <p:cNvSpPr>
+            <a:spLocks noGrp="1"/>
+          </p:cNvSpPr>
+          <p:nvPr>
+            <p:ph idx="4" sz="quarter" type="sldNum"/>
+          </p:nvPr>
+        </p:nvSpPr>
+        <p:spPr>
+          <a:xfrm>
+            <a:off x="14573177" y="8382533"/>
+            <a:ext cx="529680" cy="486833"/>
+          </a:xfrm>
+          <a:prstGeom prst="rect">
+            <a:avLst/>
+          </a:prstGeom>
+          <a:solidFill>
+            <a:schemeClr val="bg1"/>
+          </a:solidFill>
+        </p:spPr>
+        <p:txBody>
+          <a:bodyPr anchor="ctr" bIns="45720" lIns="91440" rIns="91440" rtlCol="0" tIns="45720" vert="horz"/>
+          <a:lstStyle>
+            <a:lvl1pPr algn="ctr">
+              <a:defRPr b="1" i="0" sz="1200">
+                <a:solidFill>
+                  <a:schemeClr val="tx1"/>
+                </a:solidFill>
+                <a:latin charset="0" panose="020B0604020202020204" pitchFamily="34" typeface="Arial"/>
+                <a:cs charset="0" panose="020B0604020202020204" pitchFamily="34" typeface="Arial"/>
+              </a:defRPr>
+            </a:lvl1pPr>
+          </a:lstStyle>
+          <a:p>
+            <a:fld id="{40FC62D0-A2F2-4BF8-8DAC-E86C11000EC3}" type="slidenum">
+              <a:rPr lang="en-GB" smtClean="0"/>
+              <a:pPr/>
+              <a:t>‹#›</a:t>
+            </a:fld>
+            <a:endParaRPr dirty="0" lang="en-GB"/>
+          </a:p>
+        </p:txBody>
+      </p:sp>
+    </p:spTree>
+  </p:cSld>
+</p:sld>
+</file>
+
+<file path=ppt/slides/slide36.xml><?xml version="1.0" encoding="utf-8"?>
+<p:sld xmlns:a="http://schemas.openxmlformats.org/drawingml/2006/main" xmlns:r="http://schemas.openxmlformats.org/officeDocument/2006/relationships" xmlns:p="http://schemas.openxmlformats.org/presentationml/2006/main">
+  <p:cSld>
+    <p:spTree>
+      <p:nvGrpSpPr>
+        <p:cNvPr id="1" name=""/>
+        <p:cNvGrpSpPr/>
+        <p:nvPr/>
+      </p:nvGrpSpPr>
+      <p:grpSpPr>
+        <a:xfrm>
+          <a:off x="0" y="0"/>
+          <a:ext cx="0" cy="0"/>
+          <a:chOff x="0" y="0"/>
+          <a:chExt cx="0" cy="0"/>
+        </a:xfrm>
+      </p:grpSpPr>
+      <p:sp>
+        <p:nvSpPr>
+          <p:cNvPr id="14" name="Title 1">
+            <a:extLst>
+              <a:ext uri="{FF2B5EF4-FFF2-40B4-BE49-F238E27FC236}">
+                <a16:creationId xmlns:a16="http://schemas.microsoft.com/office/drawing/2014/main" id="{EF499182-B1CD-4399-99FD-7B1CA914FD59}"/>
+              </a:ext>
+            </a:extLst>
+          </p:cNvPr>
+          <p:cNvSpPr>
+            <a:spLocks noGrp="1"/>
+          </p:cNvSpPr>
+          <p:nvPr>
+            <p:ph hasCustomPrompt="1" type="title"/>
+          </p:nvPr>
+        </p:nvSpPr>
+        <p:spPr>
+          <a:xfrm>
+            <a:off x="1117601" y="405087"/>
+            <a:ext cx="14020798" cy="818882"/>
+          </a:xfrm>
+        </p:spPr>
+        <p:txBody>
+          <a:bodyPr/>
+          <a:lstStyle/>
+          <a:p>
+            <a:pPr lvl="0" indent="0" marL="0">
+              <a:buNone/>
+            </a:pPr>
+            <a:r>
+              <a:rPr/>
+              <a:t>Survey-based HWLE so far (ELSA)</a:t>
+            </a:r>
+          </a:p>
+        </p:txBody>
+      </p:sp>
+      <p:sp>
+        <p:nvSpPr>
+          <p:cNvPr id="23" name="Content Placeholder 9">
+            <a:extLst>
+              <a:ext uri="{FF2B5EF4-FFF2-40B4-BE49-F238E27FC236}">
+                <a16:creationId xmlns:a16="http://schemas.microsoft.com/office/drawing/2014/main" id="{0C532851-4697-4B02-B344-E4852AF78CBF}"/>
+              </a:ext>
+            </a:extLst>
+          </p:cNvPr>
+          <p:cNvSpPr>
+            <a:spLocks noGrp="1"/>
+          </p:cNvSpPr>
+          <p:nvPr>
+            <p:ph hasCustomPrompt="1" idx="13" sz="quarter"/>
+          </p:nvPr>
+        </p:nvSpPr>
+        <p:spPr>
+          <a:xfrm>
+            <a:off x="1104904" y="2269323"/>
+            <a:ext cx="14020800" cy="5659894"/>
+          </a:xfrm>
+        </p:spPr>
+        <p:txBody>
+          <a:bodyPr wrap="square" rtlCol="0">
+            <a:normAutofit/>
+          </a:bodyPr>
+          <a:lstStyle/>
+          <a:p>
+            <a:pPr lvl="0"/>
+            <a:r>
+              <a:rPr/>
+              <a:t>All published UK HWLE estimates use </a:t>
+            </a:r>
+            <a:r>
+              <a:rPr b="1"/>
+              <a:t>survey data</a:t>
+            </a:r>
+            <a:r>
+              <a:rPr/>
+              <a:t>, mainly ELSA (age 50+)</a:t>
+            </a:r>
+          </a:p>
+          <a:p>
+            <a:pPr lvl="0"/>
+            <a:r>
+              <a:rPr b="1"/>
+              <a:t>Sullivan method</a:t>
+            </a:r>
+            <a:r>
+              <a:rPr/>
+              <a:t>: life table × cross-sectional </a:t>
+            </a:r>
+            <a:r>
+              <a:rPr i="1"/>
+              <a:t>prevalence</a:t>
+            </a:r>
+            <a:r>
+              <a:rPr/>
+              <a:t> of health states</a:t>
+            </a:r>
+          </a:p>
+          <a:p>
+            <a:pPr lvl="0"/>
+            <a:r>
+              <a:rPr b="1"/>
+              <a:t>Multi-state (Markov) models</a:t>
+            </a:r>
+            <a:r>
+              <a:rPr/>
+              <a:t>: transition rates between states, estimated from repeated waves</a:t>
+            </a:r>
+          </a:p>
+          <a:p>
+            <a:pPr lvl="1"/>
+            <a:r>
+              <a:rPr/>
+              <a:t>Lynch et al. 2022 — 3 states, ELSA waves 2–6, n ≈ 11,500</a:t>
+            </a:r>
+          </a:p>
+          <a:p>
+            <a:pPr lvl="1"/>
+            <a:r>
+              <a:rPr/>
+              <a:t>Parker et al. 2020 — 5 states, ELSA waves 1–6, n ≈ 15,300; HWLE at 50 ≈ </a:t>
+            </a:r>
+            <a:r>
+              <a:rPr b="1"/>
+              <a:t>10.8 years</a:t>
+            </a:r>
+            <a:r>
+              <a:rPr/>
+              <a:t> for those healthy and working at 50</a:t>
+            </a:r>
+          </a:p>
+        </p:txBody>
+      </p:sp>
+      <p:sp>
+        <p:nvSpPr>
+          <p:cNvPr id="6" name="Footer Placeholder 4">
+            <a:extLst>
+              <a:ext uri="{FF2B5EF4-FFF2-40B4-BE49-F238E27FC236}">
+                <a16:creationId xmlns:a16="http://schemas.microsoft.com/office/drawing/2014/main" id="{8F9D7237-5CD7-6037-7D60-81DA36BE7AA4}"/>
+              </a:ext>
+            </a:extLst>
+          </p:cNvPr>
+          <p:cNvSpPr>
+            <a:spLocks noGrp="1"/>
+          </p:cNvSpPr>
+          <p:nvPr>
+            <p:ph idx="3" sz="quarter" type="ftr"/>
+          </p:nvPr>
+        </p:nvSpPr>
+        <p:spPr>
+          <a:xfrm>
+            <a:off x="1117600" y="8382533"/>
+            <a:ext cx="11368098" cy="486833"/>
+          </a:xfrm>
+          <a:prstGeom prst="rect">
+            <a:avLst/>
+          </a:prstGeom>
+        </p:spPr>
+        <p:txBody>
+          <a:bodyPr anchor="ctr" bIns="45720" lIns="91440" rIns="91440" rtlCol="0" tIns="45720" vert="horz"/>
+          <a:lstStyle>
+            <a:lvl1pPr algn="r">
+              <a:defRPr sz="1600">
+                <a:solidFill>
+                  <a:schemeClr val="tx1"/>
+                </a:solidFill>
+              </a:defRPr>
+            </a:lvl1pPr>
+          </a:lstStyle>
+          <a:p>
+            <a:r>
+              <a:rPr lang="en-GB"/>
+              <a:t>IFoA Life Conference</a:t>
+            </a:r>
+            <a:endParaRPr dirty="0" lang="en-GB"/>
+          </a:p>
+        </p:txBody>
+      </p:sp>
+      <p:sp>
+        <p:nvSpPr>
+          <p:cNvPr id="7" name="Slide Number Placeholder 5">
+            <a:extLst>
+              <a:ext uri="{FF2B5EF4-FFF2-40B4-BE49-F238E27FC236}">
+                <a16:creationId xmlns:a16="http://schemas.microsoft.com/office/drawing/2014/main" id="{7B4B538E-25FF-2CD8-CF5C-A8AD3F07FE13}"/>
+              </a:ext>
+            </a:extLst>
+          </p:cNvPr>
+          <p:cNvSpPr>
+            <a:spLocks noGrp="1"/>
+          </p:cNvSpPr>
+          <p:nvPr>
+            <p:ph idx="4" sz="quarter" type="sldNum"/>
+          </p:nvPr>
+        </p:nvSpPr>
+        <p:spPr>
+          <a:xfrm>
+            <a:off x="14573177" y="8382533"/>
+            <a:ext cx="529680" cy="486833"/>
+          </a:xfrm>
+          <a:prstGeom prst="rect">
+            <a:avLst/>
+          </a:prstGeom>
+          <a:solidFill>
+            <a:schemeClr val="tx1"/>
+          </a:solidFill>
+        </p:spPr>
+        <p:txBody>
+          <a:bodyPr anchor="ctr" bIns="45720" lIns="91440" rIns="91440" rtlCol="0" tIns="45720" vert="horz"/>
+          <a:lstStyle>
+            <a:lvl1pPr algn="ctr">
+              <a:defRPr b="1" i="0" sz="1200">
+                <a:solidFill>
+                  <a:schemeClr val="bg1"/>
+                </a:solidFill>
+                <a:latin charset="0" panose="020B0604020202020204" pitchFamily="34" typeface="Arial"/>
+                <a:cs charset="0" panose="020B0604020202020204" pitchFamily="34" typeface="Arial"/>
+              </a:defRPr>
+            </a:lvl1pPr>
+          </a:lstStyle>
+          <a:p>
+            <a:fld id="{40FC62D0-A2F2-4BF8-8DAC-E86C11000EC3}" type="slidenum">
+              <a:rPr lang="en-GB" smtClean="0"/>
+              <a:pPr/>
+              <a:t>‹#›</a:t>
+            </a:fld>
+            <a:endParaRPr dirty="0" lang="en-GB"/>
+          </a:p>
+        </p:txBody>
+      </p:sp>
+    </p:spTree>
+  </p:cSld>
+</p:sld>
+</file>
+
 <file path=ppt/slides/slide37.xml><?xml version="1.0" encoding="utf-8"?>
 <p:sld xmlns:a="http://schemas.openxmlformats.org/drawingml/2006/main" xmlns:r="http://schemas.openxmlformats.org/officeDocument/2006/relationships" xmlns:p="http://schemas.openxmlformats.org/presentationml/2006/main">
   <p:cSld>
@@ -19060,48 +19496,136 @@
           <a:chExt cx="0" cy="0"/>
         </a:xfrm>
       </p:grpSpPr>
-      <p:sp>
-        <p:nvSpPr>
-          <p:cNvPr id="97" name="Title 1">
-            <a:extLst>
-              <a:ext uri="{FF2B5EF4-FFF2-40B4-BE49-F238E27FC236}">
-                <a16:creationId xmlns:a16="http://schemas.microsoft.com/office/drawing/2014/main" id="{EF499182-B1CD-4399-99FD-7B1CA914FD59}"/>
-              </a:ext>
-            </a:extLst>
-          </p:cNvPr>
-          <p:cNvSpPr>
-            <a:spLocks noGrp="1"/>
-          </p:cNvSpPr>
-          <p:nvPr>
-            <p:ph hasCustomPrompt="1" type="title"/>
-          </p:nvPr>
-        </p:nvSpPr>
-        <p:spPr>
-          <a:xfrm>
-            <a:off x="1500000" y="3400000"/>
-            <a:ext cx="13256000" cy="2200000"/>
-          </a:xfrm>
+      <p:pic>
+        <p:nvPicPr>
+          <p:cNvPr descr="media/image1.png" id="0" name="Picture 1"/>
+          <p:cNvPicPr>
+            <a:picLocks noGrp="1" noChangeAspect="1"/>
+          </p:cNvPicPr>
+          <p:nvPr/>
+        </p:nvPicPr>
+        <p:blipFill>
+          <a:blip r:embed="rId2"/>
+          <a:stretch>
+            <a:fillRect/>
+          </a:stretch>
+        </p:blipFill>
+        <p:spPr bwMode="auto">
+          <a:xfrm>
+            <a:off x="1536700" y="2260600"/>
+            <a:ext cx="6032500" cy="4940300"/>
+          </a:xfrm>
+          <a:prstGeom prst="rect">
+            <a:avLst/>
+          </a:prstGeom>
+          <a:noFill/>
+          <a:ln w="9525">
+            <a:noFill/>
+            <a:headEnd/>
+            <a:tailEnd/>
+          </a:ln>
+        </p:spPr>
+      </p:pic>
+      <p:sp>
+        <p:nvSpPr>
+          <p:cNvPr id="9" name="TextBox 3"/>
+          <p:cNvSpPr txBox="1"/>
+          <p:nvPr>
+            <p:ph idx="1"/>
+          </p:nvPr>
+        </p:nvSpPr>
+        <p:spPr>
+          <a:xfrm>
+            <a:off x="1104900" y="7200900"/>
+            <a:ext cx="6896100" cy="508000"/>
+          </a:xfrm>
+          <a:prstGeom prst="rect">
+            <a:avLst/>
+          </a:prstGeom>
+          <a:noFill/>
         </p:spPr>
         <p:txBody>
           <a:bodyPr/>
           <a:lstStyle/>
           <a:p>
-            <a:pPr lvl="0" indent="0" marL="0">
+            <a:pPr lvl="0" indent="0" marL="0" algn="ctr">
               <a:buNone/>
             </a:pPr>
             <a:r>
               <a:rPr/>
-              <a:t>Supplement · Survey approaches</a:t>
-            </a:r>
-          </a:p>
-        </p:txBody>
-      </p:sp>
-      <p:sp>
-        <p:nvSpPr>
-          <p:cNvPr id="8" name="Footer Placeholder 4">
-            <a:extLst>
-              <a:ext uri="{FF2B5EF4-FFF2-40B4-BE49-F238E27FC236}">
-                <a16:creationId xmlns:a16="http://schemas.microsoft.com/office/drawing/2014/main" id="{15C406F6-FE38-14E0-8BF8-B9AC42B3EF15}"/>
+              <a:t>Lynch 3-state model</a:t>
+            </a:r>
+          </a:p>
+        </p:txBody>
+      </p:sp>
+      <p:pic>
+        <p:nvPicPr>
+          <p:cNvPr descr="media/image2.png" id="0" name="Picture 1"/>
+          <p:cNvPicPr>
+            <a:picLocks noGrp="1" noChangeAspect="1"/>
+          </p:cNvPicPr>
+          <p:nvPr/>
+        </p:nvPicPr>
+        <p:blipFill>
+          <a:blip r:embed="rId3"/>
+          <a:stretch>
+            <a:fillRect/>
+          </a:stretch>
+        </p:blipFill>
+        <p:spPr bwMode="auto">
+          <a:xfrm>
+            <a:off x="8229600" y="2501900"/>
+            <a:ext cx="6896100" cy="4445000"/>
+          </a:xfrm>
+          <a:prstGeom prst="rect">
+            <a:avLst/>
+          </a:prstGeom>
+          <a:noFill/>
+          <a:ln w="9525">
+            <a:noFill/>
+            <a:headEnd/>
+            <a:tailEnd/>
+          </a:ln>
+        </p:spPr>
+      </p:pic>
+      <p:sp>
+        <p:nvSpPr>
+          <p:cNvPr id="10" name="TextBox 3"/>
+          <p:cNvSpPr txBox="1"/>
+          <p:nvPr>
+            <p:ph idx="1"/>
+          </p:nvPr>
+        </p:nvSpPr>
+        <p:spPr>
+          <a:xfrm>
+            <a:off x="8229600" y="7200900"/>
+            <a:ext cx="6896100" cy="508000"/>
+          </a:xfrm>
+          <a:prstGeom prst="rect">
+            <a:avLst/>
+          </a:prstGeom>
+          <a:noFill/>
+        </p:spPr>
+        <p:txBody>
+          <a:bodyPr/>
+          <a:lstStyle/>
+          <a:p>
+            <a:pPr lvl="0" indent="0" marL="0" algn="ctr">
+              <a:buNone/>
+            </a:pPr>
+            <a:r>
+              <a:rPr/>
+              <a:t>Parker 5-state model</a:t>
+            </a:r>
+          </a:p>
+        </p:txBody>
+      </p:sp>
+      <p:sp>
+        <p:nvSpPr>
+          <p:cNvPr id="7" name="Footer Placeholder 4">
+            <a:extLst>
+              <a:ext uri="{FF2B5EF4-FFF2-40B4-BE49-F238E27FC236}">
+                <a16:creationId xmlns:a16="http://schemas.microsoft.com/office/drawing/2014/main" id="{6F6C5742-1F6C-A710-52FA-1248F020C691}"/>
               </a:ext>
             </a:extLst>
           </p:cNvPr>
@@ -19127,7 +19651,7 @@
             <a:lvl1pPr algn="r">
               <a:defRPr sz="1600">
                 <a:solidFill>
-                  <a:schemeClr val="bg1"/>
+                  <a:schemeClr val="tx1"/>
                 </a:solidFill>
               </a:defRPr>
             </a:lvl1pPr>
@@ -19143,10 +19667,10 @@
       </p:sp>
       <p:sp>
         <p:nvSpPr>
-          <p:cNvPr id="9" name="Slide Number Placeholder 5">
-            <a:extLst>
-              <a:ext uri="{FF2B5EF4-FFF2-40B4-BE49-F238E27FC236}">
-                <a16:creationId xmlns:a16="http://schemas.microsoft.com/office/drawing/2014/main" id="{C18B60AF-E1FE-C3E6-C9A3-0721F1D08E6F}"/>
+          <p:cNvPr id="8" name="Slide Number Placeholder 5">
+            <a:extLst>
+              <a:ext uri="{FF2B5EF4-FFF2-40B4-BE49-F238E27FC236}">
+                <a16:creationId xmlns:a16="http://schemas.microsoft.com/office/drawing/2014/main" id="{A628090A-C45A-2639-D2CB-86DE80ECECC6}"/>
               </a:ext>
             </a:extLst>
           </p:cNvPr>
@@ -19166,7 +19690,7 @@
             <a:avLst/>
           </a:prstGeom>
           <a:solidFill>
-            <a:schemeClr val="bg1"/>
+            <a:schemeClr val="tx1"/>
           </a:solidFill>
         </p:spPr>
         <p:txBody>
@@ -19175,7 +19699,7 @@
             <a:lvl1pPr algn="ctr">
               <a:defRPr b="1" i="0" sz="1200">
                 <a:solidFill>
-                  <a:schemeClr val="tx1"/>
+                  <a:schemeClr val="bg1"/>
                 </a:solidFill>
                 <a:latin charset="0" panose="020B0604020202020204" pitchFamily="34" typeface="Arial"/>
                 <a:cs charset="0" panose="020B0604020202020204" pitchFamily="34" typeface="Arial"/>
@@ -19233,7 +19757,7 @@
         <p:spPr>
           <a:xfrm>
             <a:off x="1117601" y="405087"/>
-            <a:ext cx="14020798" cy="809696"/>
+            <a:ext cx="14020798" cy="818882"/>
           </a:xfrm>
         </p:spPr>
         <p:txBody>
@@ -19245,7 +19769,7 @@
             </a:pPr>
             <a:r>
               <a:rPr/>
-              <a:t>Administrative vs. survey data — full trade-offs</a:t>
+              <a:t>Modelling transitions in UKHLS (Understanding Society)</a:t>
             </a:r>
           </a:p>
         </p:txBody>
@@ -19269,7 +19793,7 @@
         <p:spPr>
           <a:xfrm>
             <a:off x="1104904" y="2269323"/>
-            <a:ext cx="6896104" cy="5459310"/>
+            <a:ext cx="14020800" cy="5659894"/>
           </a:xfrm>
         </p:spPr>
         <p:txBody>
@@ -19278,123 +19802,81 @@
           </a:bodyPr>
           <a:lstStyle/>
           <a:p>
+            <a:pPr lvl="0"/>
+            <a:r>
+              <a:rPr/>
+              <a:t>Household panel, waves 1–13 (2009–2022), all working ages — not just 50+</a:t>
+            </a:r>
+          </a:p>
+          <a:p>
+            <a:pPr lvl="0"/>
+            <a:r>
+              <a:rPr/>
+              <a:t>Economic status: employed / unemployed / long-term sick / student / carer / retired / other</a:t>
+            </a:r>
+          </a:p>
+          <a:p>
+            <a:pPr lvl="0"/>
+            <a:r>
+              <a:rPr/>
+              <a:t>Multinomial model of </a:t>
+            </a:r>
+            <a:r>
+              <a:rPr i="1"/>
+              <a:t>next-wave</a:t>
+            </a:r>
+            <a:r>
+              <a:rPr/>
+              <a:t> status given </a:t>
+            </a:r>
+            <a:r>
+              <a:rPr i="1"/>
+              <a:t>this-wave</a:t>
+            </a:r>
+            <a:r>
+              <a:rPr/>
+              <a:t> status, age, sex — a Markov chain from survey data</a:t>
+            </a:r>
+          </a:p>
+          <a:p>
+            <a:pPr lvl="0"/>
+            <a:r>
+              <a:rPr/>
+              <a:t>Add health (SF-12 mental &amp; physical scores, limiting illness) and ask </a:t>
+            </a:r>
+            <a:r>
+              <a:rPr b="1"/>
+              <a:t>counterfactual</a:t>
+            </a:r>
+            <a:r>
+              <a:rPr/>
+              <a:t> questions: what if health were better?</a:t>
+            </a:r>
+          </a:p>
+          <a:p>
+            <a:pPr lvl="1"/>
+            <a:r>
+              <a:rPr/>
+              <a:t>e.g. improving mental and physical health by 1 SD → ~30% fewer long-term sick</a:t>
+            </a:r>
+          </a:p>
+          <a:p>
             <a:pPr lvl="0" indent="0" marL="0">
               <a:buNone/>
             </a:pPr>
             <a:r>
-              <a:rPr b="1"/>
-              <a:t>Administrative — for</a:t>
-            </a:r>
-          </a:p>
-          <a:p>
-            <a:pPr lvl="0"/>
-            <a:r>
-              <a:rPr/>
-              <a:t>Objective events, not self-report</a:t>
-            </a:r>
-          </a:p>
-          <a:p>
-            <a:pPr lvl="0"/>
-            <a:r>
-              <a:rPr/>
-              <a:t>Incidence, not prevalence</a:t>
-            </a:r>
-          </a:p>
-          <a:p>
-            <a:pPr lvl="0"/>
-            <a:r>
-              <a:rPr/>
-              <a:t>Exact dates → accurate exposure by age and duration</a:t>
-            </a:r>
-          </a:p>
-          <a:p>
-            <a:pPr lvl="0"/>
-            <a:r>
-              <a:rPr/>
-              <a:t>Sub-annual transitions observable</a:t>
-            </a:r>
-          </a:p>
-          <a:p>
-            <a:pPr lvl="0"/>
-            <a:r>
-              <a:rPr/>
-              <a:t>Hundreds of thousands of lives/yr</a:t>
-            </a:r>
-          </a:p>
-        </p:txBody>
-      </p:sp>
-      <p:sp>
-        <p:nvSpPr>
-          <p:cNvPr id="9" name="Content Placeholder 9">
-            <a:extLst>
-              <a:ext uri="{FF2B5EF4-FFF2-40B4-BE49-F238E27FC236}">
-                <a16:creationId xmlns:a16="http://schemas.microsoft.com/office/drawing/2014/main" id="{8BE77E02-92D4-079E-ADD9-4455ABC3C3FA}"/>
-              </a:ext>
-            </a:extLst>
-          </p:cNvPr>
-          <p:cNvSpPr>
-            <a:spLocks noGrp="1"/>
-          </p:cNvSpPr>
-          <p:nvPr>
-            <p:ph hasCustomPrompt="1" idx="25" sz="quarter"/>
-          </p:nvPr>
-        </p:nvSpPr>
-        <p:spPr>
-          <a:xfrm>
-            <a:off x="8229600" y="2269322"/>
-            <a:ext cx="6896104" cy="5459309"/>
-          </a:xfrm>
-        </p:spPr>
-        <p:txBody>
-          <a:bodyPr wrap="square" rtlCol="0">
-            <a:normAutofit/>
-          </a:bodyPr>
-          <a:lstStyle/>
-          <a:p>
-            <a:pPr lvl="0" indent="0" marL="0">
-              <a:buNone/>
-            </a:pPr>
-            <a:r>
-              <a:rPr b="1"/>
-              <a:t>Survey — for</a:t>
-            </a:r>
-          </a:p>
-          <a:p>
-            <a:pPr lvl="0"/>
-            <a:r>
-              <a:rPr/>
-              <a:t>Exists, well understood, accessible</a:t>
-            </a:r>
-          </a:p>
-          <a:p>
-            <a:pPr lvl="0"/>
-            <a:r>
-              <a:rPr/>
-              <a:t>More representative of the population</a:t>
-            </a:r>
-          </a:p>
-          <a:p>
-            <a:pPr lvl="0"/>
-            <a:r>
-              <a:rPr/>
-              <a:t>Covers people not currently working</a:t>
-            </a:r>
-          </a:p>
-          <a:p>
-            <a:pPr lvl="0"/>
-            <a:r>
-              <a:rPr/>
-              <a:t>Captures health while working</a:t>
-            </a:r>
-          </a:p>
-        </p:txBody>
-      </p:sp>
-      <p:sp>
-        <p:nvSpPr>
-          <p:cNvPr id="7" name="Footer Placeholder 4">
-            <a:extLst>
-              <a:ext uri="{FF2B5EF4-FFF2-40B4-BE49-F238E27FC236}">
-                <a16:creationId xmlns:a16="http://schemas.microsoft.com/office/drawing/2014/main" id="{6F6C5742-1F6C-A710-52FA-1248F020C691}"/>
+              <a:rPr/>
+              <a:t>TODO: one figure — transition matrix or PAF-style bar chart from reports/ifoa/ work.</a:t>
+            </a:r>
+          </a:p>
+        </p:txBody>
+      </p:sp>
+      <p:sp>
+        <p:nvSpPr>
+          <p:cNvPr id="6" name="Footer Placeholder 4">
+            <a:extLst>
+              <a:ext uri="{FF2B5EF4-FFF2-40B4-BE49-F238E27FC236}">
+                <a16:creationId xmlns:a16="http://schemas.microsoft.com/office/drawing/2014/main" id="{8F9D7237-5CD7-6037-7D60-81DA36BE7AA4}"/>
               </a:ext>
             </a:extLst>
           </p:cNvPr>
@@ -19436,10 +19918,10 @@
       </p:sp>
       <p:sp>
         <p:nvSpPr>
-          <p:cNvPr id="8" name="Slide Number Placeholder 5">
-            <a:extLst>
-              <a:ext uri="{FF2B5EF4-FFF2-40B4-BE49-F238E27FC236}">
-                <a16:creationId xmlns:a16="http://schemas.microsoft.com/office/drawing/2014/main" id="{A628090A-C45A-2639-D2CB-86DE80ECECC6}"/>
+          <p:cNvPr id="7" name="Slide Number Placeholder 5">
+            <a:extLst>
+              <a:ext uri="{FF2B5EF4-FFF2-40B4-BE49-F238E27FC236}">
+                <a16:creationId xmlns:a16="http://schemas.microsoft.com/office/drawing/2014/main" id="{7B4B538E-25FF-2CD8-CF5C-A8AD3F07FE13}"/>
               </a:ext>
             </a:extLst>
           </p:cNvPr>
@@ -19491,6 +19973,954 @@
 </file>
 
 <file path=ppt/slides/slide39.xml><?xml version="1.0" encoding="utf-8"?>
+<p:sld xmlns:a="http://schemas.openxmlformats.org/drawingml/2006/main" xmlns:r="http://schemas.openxmlformats.org/officeDocument/2006/relationships" xmlns:p="http://schemas.openxmlformats.org/presentationml/2006/main">
+  <p:cSld>
+    <p:spTree>
+      <p:nvGrpSpPr>
+        <p:cNvPr id="1" name=""/>
+        <p:cNvGrpSpPr/>
+        <p:nvPr/>
+      </p:nvGrpSpPr>
+      <p:grpSpPr>
+        <a:xfrm>
+          <a:off x="0" y="0"/>
+          <a:ext cx="0" cy="0"/>
+          <a:chOff x="0" y="0"/>
+          <a:chExt cx="0" cy="0"/>
+        </a:xfrm>
+      </p:grpSpPr>
+      <p:sp>
+        <p:nvSpPr>
+          <p:cNvPr id="14" name="Title 1">
+            <a:extLst>
+              <a:ext uri="{FF2B5EF4-FFF2-40B4-BE49-F238E27FC236}">
+                <a16:creationId xmlns:a16="http://schemas.microsoft.com/office/drawing/2014/main" id="{EF499182-B1CD-4399-99FD-7B1CA914FD59}"/>
+              </a:ext>
+            </a:extLst>
+          </p:cNvPr>
+          <p:cNvSpPr>
+            <a:spLocks noGrp="1"/>
+          </p:cNvSpPr>
+          <p:nvPr>
+            <p:ph hasCustomPrompt="1" type="title"/>
+          </p:nvPr>
+        </p:nvSpPr>
+        <p:spPr>
+          <a:xfrm>
+            <a:off x="1117601" y="405087"/>
+            <a:ext cx="14020798" cy="809696"/>
+          </a:xfrm>
+        </p:spPr>
+        <p:txBody>
+          <a:bodyPr/>
+          <a:lstStyle/>
+          <a:p>
+            <a:pPr lvl="0" indent="0" marL="0">
+              <a:buNone/>
+            </a:pPr>
+            <a:r>
+              <a:rPr/>
+              <a:t>What survey data can and cannot do</a:t>
+            </a:r>
+          </a:p>
+        </p:txBody>
+      </p:sp>
+      <p:sp>
+        <p:nvSpPr>
+          <p:cNvPr id="23" name="Content Placeholder 9">
+            <a:extLst>
+              <a:ext uri="{FF2B5EF4-FFF2-40B4-BE49-F238E27FC236}">
+                <a16:creationId xmlns:a16="http://schemas.microsoft.com/office/drawing/2014/main" id="{0C532851-4697-4B02-B344-E4852AF78CBF}"/>
+              </a:ext>
+            </a:extLst>
+          </p:cNvPr>
+          <p:cNvSpPr>
+            <a:spLocks noGrp="1"/>
+          </p:cNvSpPr>
+          <p:nvPr>
+            <p:ph hasCustomPrompt="1" idx="13" sz="quarter"/>
+          </p:nvPr>
+        </p:nvSpPr>
+        <p:spPr>
+          <a:xfrm>
+            <a:off x="1104904" y="2269323"/>
+            <a:ext cx="6896104" cy="5459310"/>
+          </a:xfrm>
+        </p:spPr>
+        <p:txBody>
+          <a:bodyPr wrap="square" rtlCol="0">
+            <a:normAutofit/>
+          </a:bodyPr>
+          <a:lstStyle/>
+          <a:p>
+            <a:pPr lvl="0" indent="0" marL="0">
+              <a:buNone/>
+            </a:pPr>
+            <a:r>
+              <a:rPr b="1"/>
+              <a:t>Strengths</a:t>
+            </a:r>
+          </a:p>
+          <a:p>
+            <a:pPr lvl="0"/>
+            <a:r>
+              <a:rPr/>
+              <a:t>Exists, well understood, accessible</a:t>
+            </a:r>
+          </a:p>
+          <a:p>
+            <a:pPr lvl="0"/>
+            <a:r>
+              <a:rPr/>
+              <a:t>Representative of the whole population</a:t>
+            </a:r>
+          </a:p>
+          <a:p>
+            <a:pPr lvl="0"/>
+            <a:r>
+              <a:rPr/>
+              <a:t>Covers people </a:t>
+            </a:r>
+            <a:r>
+              <a:rPr i="1"/>
+              <a:t>not</a:t>
+            </a:r>
+            <a:r>
+              <a:rPr/>
+              <a:t> currently working</a:t>
+            </a:r>
+          </a:p>
+          <a:p>
+            <a:pPr lvl="0"/>
+            <a:r>
+              <a:rPr/>
+              <a:t>Observes health </a:t>
+            </a:r>
+            <a:r>
+              <a:rPr i="1"/>
+              <a:t>while</a:t>
+            </a:r>
+            <a:r>
+              <a:rPr/>
+              <a:t> working</a:t>
+            </a:r>
+          </a:p>
+        </p:txBody>
+      </p:sp>
+      <p:sp>
+        <p:nvSpPr>
+          <p:cNvPr id="9" name="Content Placeholder 9">
+            <a:extLst>
+              <a:ext uri="{FF2B5EF4-FFF2-40B4-BE49-F238E27FC236}">
+                <a16:creationId xmlns:a16="http://schemas.microsoft.com/office/drawing/2014/main" id="{8BE77E02-92D4-079E-ADD9-4455ABC3C3FA}"/>
+              </a:ext>
+            </a:extLst>
+          </p:cNvPr>
+          <p:cNvSpPr>
+            <a:spLocks noGrp="1"/>
+          </p:cNvSpPr>
+          <p:nvPr>
+            <p:ph hasCustomPrompt="1" idx="25" sz="quarter"/>
+          </p:nvPr>
+        </p:nvSpPr>
+        <p:spPr>
+          <a:xfrm>
+            <a:off x="8229600" y="2269322"/>
+            <a:ext cx="6896104" cy="5459309"/>
+          </a:xfrm>
+        </p:spPr>
+        <p:txBody>
+          <a:bodyPr wrap="square" rtlCol="0">
+            <a:normAutofit/>
+          </a:bodyPr>
+          <a:lstStyle/>
+          <a:p>
+            <a:pPr lvl="0" indent="0" marL="0">
+              <a:buNone/>
+            </a:pPr>
+            <a:r>
+              <a:rPr b="1"/>
+              <a:t>Weaknesses</a:t>
+            </a:r>
+          </a:p>
+          <a:p>
+            <a:pPr lvl="0"/>
+            <a:r>
+              <a:rPr/>
+              <a:t>Self-reported health and work status</a:t>
+            </a:r>
+          </a:p>
+          <a:p>
+            <a:pPr lvl="0"/>
+            <a:r>
+              <a:rPr/>
+              <a:t>Prevalence at annual snapshots, not dated events</a:t>
+            </a:r>
+          </a:p>
+          <a:p>
+            <a:pPr lvl="0"/>
+            <a:r>
+              <a:rPr/>
+              <a:t>Transitions within a year unobserved</a:t>
+            </a:r>
+          </a:p>
+          <a:p>
+            <a:pPr lvl="0"/>
+            <a:r>
+              <a:rPr/>
+              <a:t>Tens of thousands of respondents at best</a:t>
+            </a:r>
+          </a:p>
+        </p:txBody>
+      </p:sp>
+      <p:sp>
+        <p:nvSpPr>
+          <p:cNvPr id="7" name="Footer Placeholder 4">
+            <a:extLst>
+              <a:ext uri="{FF2B5EF4-FFF2-40B4-BE49-F238E27FC236}">
+                <a16:creationId xmlns:a16="http://schemas.microsoft.com/office/drawing/2014/main" id="{6F6C5742-1F6C-A710-52FA-1248F020C691}"/>
+              </a:ext>
+            </a:extLst>
+          </p:cNvPr>
+          <p:cNvSpPr>
+            <a:spLocks noGrp="1"/>
+          </p:cNvSpPr>
+          <p:nvPr>
+            <p:ph idx="3" sz="quarter" type="ftr"/>
+          </p:nvPr>
+        </p:nvSpPr>
+        <p:spPr>
+          <a:xfrm>
+            <a:off x="1117600" y="8382533"/>
+            <a:ext cx="11368098" cy="486833"/>
+          </a:xfrm>
+          <a:prstGeom prst="rect">
+            <a:avLst/>
+          </a:prstGeom>
+        </p:spPr>
+        <p:txBody>
+          <a:bodyPr anchor="ctr" bIns="45720" lIns="91440" rIns="91440" rtlCol="0" tIns="45720" vert="horz"/>
+          <a:lstStyle>
+            <a:lvl1pPr algn="r">
+              <a:defRPr sz="1600">
+                <a:solidFill>
+                  <a:schemeClr val="tx1"/>
+                </a:solidFill>
+              </a:defRPr>
+            </a:lvl1pPr>
+          </a:lstStyle>
+          <a:p>
+            <a:r>
+              <a:rPr lang="en-GB"/>
+              <a:t>IFoA Life Conference</a:t>
+            </a:r>
+            <a:endParaRPr dirty="0" lang="en-GB"/>
+          </a:p>
+        </p:txBody>
+      </p:sp>
+      <p:sp>
+        <p:nvSpPr>
+          <p:cNvPr id="8" name="Slide Number Placeholder 5">
+            <a:extLst>
+              <a:ext uri="{FF2B5EF4-FFF2-40B4-BE49-F238E27FC236}">
+                <a16:creationId xmlns:a16="http://schemas.microsoft.com/office/drawing/2014/main" id="{A628090A-C45A-2639-D2CB-86DE80ECECC6}"/>
+              </a:ext>
+            </a:extLst>
+          </p:cNvPr>
+          <p:cNvSpPr>
+            <a:spLocks noGrp="1"/>
+          </p:cNvSpPr>
+          <p:nvPr>
+            <p:ph idx="4" sz="quarter" type="sldNum"/>
+          </p:nvPr>
+        </p:nvSpPr>
+        <p:spPr>
+          <a:xfrm>
+            <a:off x="14573177" y="8382533"/>
+            <a:ext cx="529680" cy="486833"/>
+          </a:xfrm>
+          <a:prstGeom prst="rect">
+            <a:avLst/>
+          </a:prstGeom>
+          <a:solidFill>
+            <a:schemeClr val="tx1"/>
+          </a:solidFill>
+        </p:spPr>
+        <p:txBody>
+          <a:bodyPr anchor="ctr" bIns="45720" lIns="91440" rIns="91440" rtlCol="0" tIns="45720" vert="horz"/>
+          <a:lstStyle>
+            <a:lvl1pPr algn="ctr">
+              <a:defRPr b="1" i="0" sz="1200">
+                <a:solidFill>
+                  <a:schemeClr val="bg1"/>
+                </a:solidFill>
+                <a:latin charset="0" panose="020B0604020202020204" pitchFamily="34" typeface="Arial"/>
+                <a:cs charset="0" panose="020B0604020202020204" pitchFamily="34" typeface="Arial"/>
+              </a:defRPr>
+            </a:lvl1pPr>
+          </a:lstStyle>
+          <a:p>
+            <a:fld id="{40FC62D0-A2F2-4BF8-8DAC-E86C11000EC3}" type="slidenum">
+              <a:rPr lang="en-GB" smtClean="0"/>
+              <a:pPr/>
+              <a:t>‹#›</a:t>
+            </a:fld>
+            <a:endParaRPr dirty="0" lang="en-GB"/>
+          </a:p>
+        </p:txBody>
+      </p:sp>
+    </p:spTree>
+  </p:cSld>
+</p:sld>
+</file>
+
+<file path=ppt/slides/slide4.xml><?xml version="1.0" encoding="utf-8"?>
+<p:sld xmlns:a="http://schemas.openxmlformats.org/drawingml/2006/main" xmlns:r="http://schemas.openxmlformats.org/officeDocument/2006/relationships" xmlns:p="http://schemas.openxmlformats.org/presentationml/2006/main">
+  <p:cSld>
+    <p:spTree>
+      <p:nvGrpSpPr>
+        <p:cNvPr id="1" name=""/>
+        <p:cNvGrpSpPr/>
+        <p:nvPr/>
+      </p:nvGrpSpPr>
+      <p:grpSpPr>
+        <a:xfrm>
+          <a:off x="0" y="0"/>
+          <a:ext cx="0" cy="0"/>
+          <a:chOff x="0" y="0"/>
+          <a:chExt cx="0" cy="0"/>
+        </a:xfrm>
+      </p:grpSpPr>
+      <p:sp>
+        <p:nvSpPr>
+          <p:cNvPr id="14" name="Title 1">
+            <a:extLst>
+              <a:ext uri="{FF2B5EF4-FFF2-40B4-BE49-F238E27FC236}">
+                <a16:creationId xmlns:a16="http://schemas.microsoft.com/office/drawing/2014/main" id="{EF499182-B1CD-4399-99FD-7B1CA914FD59}"/>
+              </a:ext>
+            </a:extLst>
+          </p:cNvPr>
+          <p:cNvSpPr>
+            <a:spLocks noGrp="1"/>
+          </p:cNvSpPr>
+          <p:nvPr>
+            <p:ph hasCustomPrompt="1" type="title"/>
+          </p:nvPr>
+        </p:nvSpPr>
+        <p:spPr>
+          <a:xfrm>
+            <a:off x="1117601" y="405087"/>
+            <a:ext cx="14020798" cy="818882"/>
+          </a:xfrm>
+        </p:spPr>
+        <p:txBody>
+          <a:bodyPr/>
+          <a:lstStyle/>
+          <a:p>
+            <a:pPr lvl="0" indent="0" marL="0">
+              <a:buNone/>
+            </a:pPr>
+            <a:r>
+              <a:rPr/>
+              <a:t>❓ Audience and pitch</a:t>
+            </a:r>
+          </a:p>
+        </p:txBody>
+      </p:sp>
+      <p:sp>
+        <p:nvSpPr>
+          <p:cNvPr id="23" name="Content Placeholder 9">
+            <a:extLst>
+              <a:ext uri="{FF2B5EF4-FFF2-40B4-BE49-F238E27FC236}">
+                <a16:creationId xmlns:a16="http://schemas.microsoft.com/office/drawing/2014/main" id="{0C532851-4697-4B02-B344-E4852AF78CBF}"/>
+              </a:ext>
+            </a:extLst>
+          </p:cNvPr>
+          <p:cNvSpPr>
+            <a:spLocks noGrp="1"/>
+          </p:cNvSpPr>
+          <p:nvPr>
+            <p:ph hasCustomPrompt="1" idx="13" sz="quarter"/>
+          </p:nvPr>
+        </p:nvSpPr>
+        <p:spPr>
+          <a:xfrm>
+            <a:off x="1104904" y="2269323"/>
+            <a:ext cx="14020800" cy="5659894"/>
+          </a:xfrm>
+        </p:spPr>
+        <p:txBody>
+          <a:bodyPr wrap="square" rtlCol="0">
+            <a:normAutofit/>
+          </a:bodyPr>
+          <a:lstStyle/>
+          <a:p>
+            <a:pPr lvl="0"/>
+            <a:r>
+              <a:rPr/>
+              <a:t>☒ </a:t>
+            </a:r>
+            <a:r>
+              <a:rPr b="1"/>
+              <a:t>Assumed audience</a:t>
+            </a:r>
+          </a:p>
+          <a:p>
+            <a:pPr lvl="1"/>
+            <a:r>
+              <a:rPr/>
+              <a:t>Mostly life and health actuaries.</a:t>
+            </a:r>
+          </a:p>
+          <a:p>
+            <a:pPr lvl="0"/>
+            <a:r>
+              <a:rPr/>
+              <a:t>☐ </a:t>
+            </a:r>
+            <a:r>
+              <a:rPr b="1"/>
+              <a:t>Core message</a:t>
+            </a:r>
+            <a:r>
+              <a:rPr/>
+              <a:t> — choose ONE to lead with (or a (d) of our own):</a:t>
+            </a:r>
+          </a:p>
+          <a:p>
+            <a:pPr lvl="1" indent="-609585" marL="1219170">
+              <a:buAutoNum type="alphaLcParenBoth"/>
+            </a:pPr>
+            <a:r>
+              <a:rPr/>
+              <a:t>“Admin data can complement/replace survey data for HWLE” (methods)</a:t>
+            </a:r>
+          </a:p>
+          <a:p>
+            <a:pPr lvl="1" indent="-609585" marL="1219170">
+              <a:buAutoNum startAt="2" type="alphaLcParenBoth"/>
+            </a:pPr>
+            <a:r>
+              <a:rPr/>
+              <a:t>“HWPLE is a useful descriptive statistic for morbidity bases” (insurance)</a:t>
+            </a:r>
+          </a:p>
+          <a:p>
+            <a:pPr lvl="1" indent="-609585" marL="1219170">
+              <a:buAutoNum startAt="3" type="alphaLcParenBoth"/>
+            </a:pPr>
+            <a:r>
+              <a:rPr/>
+              <a:t>“HWLE has policy relevance to SPA / pensions adequacy / Keep Britain Working” (policy)</a:t>
+            </a:r>
+          </a:p>
+          <a:p>
+            <a:pPr lvl="1"/>
+            <a:r>
+              <a:rPr/>
+              <a:t>Call leaned towards: </a:t>
+            </a:r>
+            <a:r>
+              <a:rPr i="1"/>
+              <a:t>which data sources are best for these models — survey or CMI? — and the value of </a:t>
+            </a:r>
+            <a:r>
+              <a:rPr b="1" i="1"/>
+              <a:t>triangulating</a:t>
+            </a:r>
+            <a:r>
+              <a:rPr i="1"/>
+              <a:t> independent approaches.</a:t>
+            </a:r>
+            <a:r>
+              <a:rPr/>
+              <a:t> Deferred to next call.</a:t>
+            </a:r>
+          </a:p>
+          <a:p>
+            <a:pPr lvl="0"/>
+            <a:r>
+              <a:rPr/>
+              <a:t>☐ </a:t>
+            </a:r>
+            <a:r>
+              <a:rPr b="1"/>
+              <a:t>Avoid double-counting</a:t>
+            </a:r>
+            <a:r>
+              <a:rPr/>
+              <a:t> multi-state methods between Jon’s and David’s sections — decide who explains the model once.</a:t>
+            </a:r>
+          </a:p>
+          <a:p>
+            <a:pPr lvl="0"/>
+            <a:r>
+              <a:rPr/>
+              <a:t>☒ </a:t>
+            </a:r>
+            <a:r>
+              <a:rPr b="1"/>
+              <a:t>How much literature review?</a:t>
+            </a:r>
+          </a:p>
+          <a:p>
+            <a:pPr lvl="1"/>
+            <a:r>
+              <a:rPr/>
+              <a:t>≈ 5 min, folded into Jon’s “survey data” section.</a:t>
+            </a:r>
+          </a:p>
+          <a:p>
+            <a:pPr lvl="0"/>
+            <a:r>
+              <a:rPr/>
+              <a:t>☒ </a:t>
+            </a:r>
+            <a:r>
+              <a:rPr b="1"/>
+              <a:t>How much maths?</a:t>
+            </a:r>
+          </a:p>
+          <a:p>
+            <a:pPr lvl="1"/>
+            <a:r>
+              <a:rPr/>
+              <a:t>Diagrams sufficient; no additional equations.</a:t>
+            </a:r>
+          </a:p>
+          <a:p>
+            <a:pPr lvl="0"/>
+            <a:r>
+              <a:rPr/>
+              <a:t>☒ </a:t>
+            </a:r>
+            <a:r>
+              <a:rPr b="1"/>
+              <a:t>Show the Excel HWP Tool?</a:t>
+            </a:r>
+          </a:p>
+          <a:p>
+            <a:pPr lvl="1"/>
+            <a:r>
+              <a:rPr/>
+              <a:t>No.</a:t>
+            </a:r>
+          </a:p>
+          <a:p>
+            <a:pPr lvl="0"/>
+            <a:r>
+              <a:rPr/>
+              <a:t>☒ </a:t>
+            </a:r>
+            <a:r>
+              <a:rPr b="1"/>
+              <a:t>Link to UKHLS / economic inactivity work?</a:t>
+            </a:r>
+          </a:p>
+          <a:p>
+            <a:pPr lvl="1"/>
+            <a:r>
+              <a:rPr/>
+              <a:t>Yes, briefly — Jon’s section.</a:t>
+            </a:r>
+          </a:p>
+        </p:txBody>
+      </p:sp>
+      <p:sp>
+        <p:nvSpPr>
+          <p:cNvPr id="6" name="Footer Placeholder 4">
+            <a:extLst>
+              <a:ext uri="{FF2B5EF4-FFF2-40B4-BE49-F238E27FC236}">
+                <a16:creationId xmlns:a16="http://schemas.microsoft.com/office/drawing/2014/main" id="{8F9D7237-5CD7-6037-7D60-81DA36BE7AA4}"/>
+              </a:ext>
+            </a:extLst>
+          </p:cNvPr>
+          <p:cNvSpPr>
+            <a:spLocks noGrp="1"/>
+          </p:cNvSpPr>
+          <p:nvPr>
+            <p:ph idx="3" sz="quarter" type="ftr"/>
+          </p:nvPr>
+        </p:nvSpPr>
+        <p:spPr>
+          <a:xfrm>
+            <a:off x="1117600" y="8382533"/>
+            <a:ext cx="11368098" cy="486833"/>
+          </a:xfrm>
+          <a:prstGeom prst="rect">
+            <a:avLst/>
+          </a:prstGeom>
+        </p:spPr>
+        <p:txBody>
+          <a:bodyPr anchor="ctr" bIns="45720" lIns="91440" rIns="91440" rtlCol="0" tIns="45720" vert="horz"/>
+          <a:lstStyle>
+            <a:lvl1pPr algn="r">
+              <a:defRPr sz="1600">
+                <a:solidFill>
+                  <a:schemeClr val="tx1"/>
+                </a:solidFill>
+              </a:defRPr>
+            </a:lvl1pPr>
+          </a:lstStyle>
+          <a:p>
+            <a:r>
+              <a:rPr lang="en-GB"/>
+              <a:t>IFoA Life Conference</a:t>
+            </a:r>
+            <a:endParaRPr dirty="0" lang="en-GB"/>
+          </a:p>
+        </p:txBody>
+      </p:sp>
+      <p:sp>
+        <p:nvSpPr>
+          <p:cNvPr id="7" name="Slide Number Placeholder 5">
+            <a:extLst>
+              <a:ext uri="{FF2B5EF4-FFF2-40B4-BE49-F238E27FC236}">
+                <a16:creationId xmlns:a16="http://schemas.microsoft.com/office/drawing/2014/main" id="{7B4B538E-25FF-2CD8-CF5C-A8AD3F07FE13}"/>
+              </a:ext>
+            </a:extLst>
+          </p:cNvPr>
+          <p:cNvSpPr>
+            <a:spLocks noGrp="1"/>
+          </p:cNvSpPr>
+          <p:nvPr>
+            <p:ph idx="4" sz="quarter" type="sldNum"/>
+          </p:nvPr>
+        </p:nvSpPr>
+        <p:spPr>
+          <a:xfrm>
+            <a:off x="14573177" y="8382533"/>
+            <a:ext cx="529680" cy="486833"/>
+          </a:xfrm>
+          <a:prstGeom prst="rect">
+            <a:avLst/>
+          </a:prstGeom>
+          <a:solidFill>
+            <a:schemeClr val="tx1"/>
+          </a:solidFill>
+        </p:spPr>
+        <p:txBody>
+          <a:bodyPr anchor="ctr" bIns="45720" lIns="91440" rIns="91440" rtlCol="0" tIns="45720" vert="horz"/>
+          <a:lstStyle>
+            <a:lvl1pPr algn="ctr">
+              <a:defRPr b="1" i="0" sz="1200">
+                <a:solidFill>
+                  <a:schemeClr val="bg1"/>
+                </a:solidFill>
+                <a:latin charset="0" panose="020B0604020202020204" pitchFamily="34" typeface="Arial"/>
+                <a:cs charset="0" panose="020B0604020202020204" pitchFamily="34" typeface="Arial"/>
+              </a:defRPr>
+            </a:lvl1pPr>
+          </a:lstStyle>
+          <a:p>
+            <a:fld id="{40FC62D0-A2F2-4BF8-8DAC-E86C11000EC3}" type="slidenum">
+              <a:rPr lang="en-GB" smtClean="0"/>
+              <a:pPr/>
+              <a:t>‹#›</a:t>
+            </a:fld>
+            <a:endParaRPr dirty="0" lang="en-GB"/>
+          </a:p>
+        </p:txBody>
+      </p:sp>
+    </p:spTree>
+  </p:cSld>
+</p:sld>
+</file>
+
+<file path=ppt/slides/slide40.xml><?xml version="1.0" encoding="utf-8"?>
+<p:sld xmlns:a="http://schemas.openxmlformats.org/drawingml/2006/main" xmlns:r="http://schemas.openxmlformats.org/officeDocument/2006/relationships" xmlns:p="http://schemas.openxmlformats.org/presentationml/2006/main">
+  <p:cSld>
+    <p:spTree>
+      <p:nvGrpSpPr>
+        <p:cNvPr id="1" name=""/>
+        <p:cNvGrpSpPr/>
+        <p:nvPr/>
+      </p:nvGrpSpPr>
+      <p:grpSpPr>
+        <a:xfrm>
+          <a:off x="0" y="0"/>
+          <a:ext cx="0" cy="0"/>
+          <a:chOff x="0" y="0"/>
+          <a:chExt cx="0" cy="0"/>
+        </a:xfrm>
+      </p:grpSpPr>
+      <p:sp>
+        <p:nvSpPr>
+          <p:cNvPr id="14" name="Title 1">
+            <a:extLst>
+              <a:ext uri="{FF2B5EF4-FFF2-40B4-BE49-F238E27FC236}">
+                <a16:creationId xmlns:a16="http://schemas.microsoft.com/office/drawing/2014/main" id="{EF499182-B1CD-4399-99FD-7B1CA914FD59}"/>
+              </a:ext>
+            </a:extLst>
+          </p:cNvPr>
+          <p:cNvSpPr>
+            <a:spLocks noGrp="1"/>
+          </p:cNvSpPr>
+          <p:nvPr>
+            <p:ph hasCustomPrompt="1" type="title"/>
+          </p:nvPr>
+        </p:nvSpPr>
+        <p:spPr>
+          <a:xfrm>
+            <a:off x="1117601" y="405087"/>
+            <a:ext cx="14020798" cy="809696"/>
+          </a:xfrm>
+        </p:spPr>
+        <p:txBody>
+          <a:bodyPr/>
+          <a:lstStyle/>
+          <a:p>
+            <a:pPr lvl="0" indent="0" marL="0">
+              <a:buNone/>
+            </a:pPr>
+            <a:r>
+              <a:rPr/>
+              <a:t>Administrative vs. survey data — full trade-offs</a:t>
+            </a:r>
+          </a:p>
+        </p:txBody>
+      </p:sp>
+      <p:sp>
+        <p:nvSpPr>
+          <p:cNvPr id="23" name="Content Placeholder 9">
+            <a:extLst>
+              <a:ext uri="{FF2B5EF4-FFF2-40B4-BE49-F238E27FC236}">
+                <a16:creationId xmlns:a16="http://schemas.microsoft.com/office/drawing/2014/main" id="{0C532851-4697-4B02-B344-E4852AF78CBF}"/>
+              </a:ext>
+            </a:extLst>
+          </p:cNvPr>
+          <p:cNvSpPr>
+            <a:spLocks noGrp="1"/>
+          </p:cNvSpPr>
+          <p:nvPr>
+            <p:ph hasCustomPrompt="1" idx="13" sz="quarter"/>
+          </p:nvPr>
+        </p:nvSpPr>
+        <p:spPr>
+          <a:xfrm>
+            <a:off x="1104904" y="2269323"/>
+            <a:ext cx="6896104" cy="5459310"/>
+          </a:xfrm>
+        </p:spPr>
+        <p:txBody>
+          <a:bodyPr wrap="square" rtlCol="0">
+            <a:normAutofit/>
+          </a:bodyPr>
+          <a:lstStyle/>
+          <a:p>
+            <a:pPr lvl="0" indent="0" marL="0">
+              <a:buNone/>
+            </a:pPr>
+            <a:r>
+              <a:rPr b="1"/>
+              <a:t>Administrative — for</a:t>
+            </a:r>
+          </a:p>
+          <a:p>
+            <a:pPr lvl="0"/>
+            <a:r>
+              <a:rPr/>
+              <a:t>Objective events, not self-report</a:t>
+            </a:r>
+          </a:p>
+          <a:p>
+            <a:pPr lvl="0"/>
+            <a:r>
+              <a:rPr/>
+              <a:t>Incidence, not prevalence</a:t>
+            </a:r>
+          </a:p>
+          <a:p>
+            <a:pPr lvl="0"/>
+            <a:r>
+              <a:rPr/>
+              <a:t>Exact dates → accurate exposure by age and duration</a:t>
+            </a:r>
+          </a:p>
+          <a:p>
+            <a:pPr lvl="0"/>
+            <a:r>
+              <a:rPr/>
+              <a:t>Sub-annual transitions observable</a:t>
+            </a:r>
+          </a:p>
+          <a:p>
+            <a:pPr lvl="0"/>
+            <a:r>
+              <a:rPr/>
+              <a:t>Hundreds of thousands of lives/yr</a:t>
+            </a:r>
+          </a:p>
+        </p:txBody>
+      </p:sp>
+      <p:sp>
+        <p:nvSpPr>
+          <p:cNvPr id="9" name="Content Placeholder 9">
+            <a:extLst>
+              <a:ext uri="{FF2B5EF4-FFF2-40B4-BE49-F238E27FC236}">
+                <a16:creationId xmlns:a16="http://schemas.microsoft.com/office/drawing/2014/main" id="{8BE77E02-92D4-079E-ADD9-4455ABC3C3FA}"/>
+              </a:ext>
+            </a:extLst>
+          </p:cNvPr>
+          <p:cNvSpPr>
+            <a:spLocks noGrp="1"/>
+          </p:cNvSpPr>
+          <p:nvPr>
+            <p:ph hasCustomPrompt="1" idx="25" sz="quarter"/>
+          </p:nvPr>
+        </p:nvSpPr>
+        <p:spPr>
+          <a:xfrm>
+            <a:off x="8229600" y="2269322"/>
+            <a:ext cx="6896104" cy="5459309"/>
+          </a:xfrm>
+        </p:spPr>
+        <p:txBody>
+          <a:bodyPr wrap="square" rtlCol="0">
+            <a:normAutofit/>
+          </a:bodyPr>
+          <a:lstStyle/>
+          <a:p>
+            <a:pPr lvl="0" indent="0" marL="0">
+              <a:buNone/>
+            </a:pPr>
+            <a:r>
+              <a:rPr b="1"/>
+              <a:t>Survey — for</a:t>
+            </a:r>
+          </a:p>
+          <a:p>
+            <a:pPr lvl="0"/>
+            <a:r>
+              <a:rPr/>
+              <a:t>Exists, well understood, accessible</a:t>
+            </a:r>
+          </a:p>
+          <a:p>
+            <a:pPr lvl="0"/>
+            <a:r>
+              <a:rPr/>
+              <a:t>More representative of the population</a:t>
+            </a:r>
+          </a:p>
+          <a:p>
+            <a:pPr lvl="0"/>
+            <a:r>
+              <a:rPr/>
+              <a:t>Covers people not currently working</a:t>
+            </a:r>
+          </a:p>
+          <a:p>
+            <a:pPr lvl="0"/>
+            <a:r>
+              <a:rPr/>
+              <a:t>Captures health while working</a:t>
+            </a:r>
+          </a:p>
+        </p:txBody>
+      </p:sp>
+      <p:sp>
+        <p:nvSpPr>
+          <p:cNvPr id="7" name="Footer Placeholder 4">
+            <a:extLst>
+              <a:ext uri="{FF2B5EF4-FFF2-40B4-BE49-F238E27FC236}">
+                <a16:creationId xmlns:a16="http://schemas.microsoft.com/office/drawing/2014/main" id="{6F6C5742-1F6C-A710-52FA-1248F020C691}"/>
+              </a:ext>
+            </a:extLst>
+          </p:cNvPr>
+          <p:cNvSpPr>
+            <a:spLocks noGrp="1"/>
+          </p:cNvSpPr>
+          <p:nvPr>
+            <p:ph idx="3" sz="quarter" type="ftr"/>
+          </p:nvPr>
+        </p:nvSpPr>
+        <p:spPr>
+          <a:xfrm>
+            <a:off x="1117600" y="8382533"/>
+            <a:ext cx="11368098" cy="486833"/>
+          </a:xfrm>
+          <a:prstGeom prst="rect">
+            <a:avLst/>
+          </a:prstGeom>
+        </p:spPr>
+        <p:txBody>
+          <a:bodyPr anchor="ctr" bIns="45720" lIns="91440" rIns="91440" rtlCol="0" tIns="45720" vert="horz"/>
+          <a:lstStyle>
+            <a:lvl1pPr algn="r">
+              <a:defRPr sz="1600">
+                <a:solidFill>
+                  <a:schemeClr val="tx1"/>
+                </a:solidFill>
+              </a:defRPr>
+            </a:lvl1pPr>
+          </a:lstStyle>
+          <a:p>
+            <a:r>
+              <a:rPr lang="en-GB"/>
+              <a:t>IFoA Life Conference</a:t>
+            </a:r>
+            <a:endParaRPr dirty="0" lang="en-GB"/>
+          </a:p>
+        </p:txBody>
+      </p:sp>
+      <p:sp>
+        <p:nvSpPr>
+          <p:cNvPr id="8" name="Slide Number Placeholder 5">
+            <a:extLst>
+              <a:ext uri="{FF2B5EF4-FFF2-40B4-BE49-F238E27FC236}">
+                <a16:creationId xmlns:a16="http://schemas.microsoft.com/office/drawing/2014/main" id="{A628090A-C45A-2639-D2CB-86DE80ECECC6}"/>
+              </a:ext>
+            </a:extLst>
+          </p:cNvPr>
+          <p:cNvSpPr>
+            <a:spLocks noGrp="1"/>
+          </p:cNvSpPr>
+          <p:nvPr>
+            <p:ph idx="4" sz="quarter" type="sldNum"/>
+          </p:nvPr>
+        </p:nvSpPr>
+        <p:spPr>
+          <a:xfrm>
+            <a:off x="14573177" y="8382533"/>
+            <a:ext cx="529680" cy="486833"/>
+          </a:xfrm>
+          <a:prstGeom prst="rect">
+            <a:avLst/>
+          </a:prstGeom>
+          <a:solidFill>
+            <a:schemeClr val="tx1"/>
+          </a:solidFill>
+        </p:spPr>
+        <p:txBody>
+          <a:bodyPr anchor="ctr" bIns="45720" lIns="91440" rIns="91440" rtlCol="0" tIns="45720" vert="horz"/>
+          <a:lstStyle>
+            <a:lvl1pPr algn="ctr">
+              <a:defRPr b="1" i="0" sz="1200">
+                <a:solidFill>
+                  <a:schemeClr val="bg1"/>
+                </a:solidFill>
+                <a:latin charset="0" panose="020B0604020202020204" pitchFamily="34" typeface="Arial"/>
+                <a:cs charset="0" panose="020B0604020202020204" pitchFamily="34" typeface="Arial"/>
+              </a:defRPr>
+            </a:lvl1pPr>
+          </a:lstStyle>
+          <a:p>
+            <a:fld id="{40FC62D0-A2F2-4BF8-8DAC-E86C11000EC3}" type="slidenum">
+              <a:rPr lang="en-GB" smtClean="0"/>
+              <a:pPr/>
+              <a:t>‹#›</a:t>
+            </a:fld>
+            <a:endParaRPr dirty="0" lang="en-GB"/>
+          </a:p>
+        </p:txBody>
+      </p:sp>
+    </p:spTree>
+  </p:cSld>
+</p:sld>
+</file>
+
+<file path=ppt/slides/slide41.xml><?xml version="1.0" encoding="utf-8"?>
 <p:sld xmlns:a="http://schemas.openxmlformats.org/drawingml/2006/main" xmlns:r="http://schemas.openxmlformats.org/officeDocument/2006/relationships" xmlns:p="http://schemas.openxmlformats.org/presentationml/2006/main">
   <p:cSld>
     <p:spTree>
@@ -19817,7 +21247,7 @@
 </p:sld>
 </file>
 
-<file path=ppt/slides/slide4.xml><?xml version="1.0" encoding="utf-8"?>
+<file path=ppt/slides/slide42.xml><?xml version="1.0" encoding="utf-8"?>
 <p:sld xmlns:a="http://schemas.openxmlformats.org/drawingml/2006/main" xmlns:r="http://schemas.openxmlformats.org/officeDocument/2006/relationships" xmlns:p="http://schemas.openxmlformats.org/presentationml/2006/main">
   <p:cSld>
     <p:spTree>
@@ -19836,7 +21266,7 @@
       </p:grpSpPr>
       <p:sp>
         <p:nvSpPr>
-          <p:cNvPr id="14" name="Title 1">
+          <p:cNvPr id="97" name="Title 1">
             <a:extLst>
               <a:ext uri="{FF2B5EF4-FFF2-40B4-BE49-F238E27FC236}">
                 <a16:creationId xmlns:a16="http://schemas.microsoft.com/office/drawing/2014/main" id="{EF499182-B1CD-4399-99FD-7B1CA914FD59}"/>
@@ -19852,8 +21282,8 @@
         </p:nvSpPr>
         <p:spPr>
           <a:xfrm>
-            <a:off x="1117601" y="405087"/>
-            <a:ext cx="14020798" cy="818882"/>
+            <a:off x="1500000" y="3400000"/>
+            <a:ext cx="13256000" cy="2200000"/>
           </a:xfrm>
         </p:spPr>
         <p:txBody>
@@ -19865,216 +21295,17 @@
             </a:pPr>
             <a:r>
               <a:rPr/>
-              <a:t>❓ Audience and pitch</a:t>
-            </a:r>
-          </a:p>
-        </p:txBody>
-      </p:sp>
-      <p:sp>
-        <p:nvSpPr>
-          <p:cNvPr id="23" name="Content Placeholder 9">
-            <a:extLst>
-              <a:ext uri="{FF2B5EF4-FFF2-40B4-BE49-F238E27FC236}">
-                <a16:creationId xmlns:a16="http://schemas.microsoft.com/office/drawing/2014/main" id="{0C532851-4697-4B02-B344-E4852AF78CBF}"/>
-              </a:ext>
-            </a:extLst>
-          </p:cNvPr>
-          <p:cNvSpPr>
-            <a:spLocks noGrp="1"/>
-          </p:cNvSpPr>
-          <p:nvPr>
-            <p:ph hasCustomPrompt="1" idx="13" sz="quarter"/>
-          </p:nvPr>
-        </p:nvSpPr>
-        <p:spPr>
-          <a:xfrm>
-            <a:off x="1104904" y="2269323"/>
-            <a:ext cx="14020800" cy="5659894"/>
-          </a:xfrm>
-        </p:spPr>
-        <p:txBody>
-          <a:bodyPr wrap="square" rtlCol="0">
-            <a:normAutofit/>
-          </a:bodyPr>
-          <a:lstStyle/>
-          <a:p>
-            <a:pPr lvl="0"/>
-            <a:r>
-              <a:rPr/>
-              <a:t>☒ </a:t>
-            </a:r>
-            <a:r>
-              <a:rPr b="1"/>
-              <a:t>Assumed audience</a:t>
-            </a:r>
-          </a:p>
-          <a:p>
-            <a:pPr lvl="1"/>
-            <a:r>
-              <a:rPr/>
-              <a:t>Mostly life and health actuaries.</a:t>
-            </a:r>
-          </a:p>
-          <a:p>
-            <a:pPr lvl="0"/>
-            <a:r>
-              <a:rPr/>
-              <a:t>☐ </a:t>
-            </a:r>
-            <a:r>
-              <a:rPr b="1"/>
-              <a:t>Core message</a:t>
-            </a:r>
-            <a:r>
-              <a:rPr/>
-              <a:t> — choose ONE to lead with (or a (d) of our own):</a:t>
-            </a:r>
-          </a:p>
-          <a:p>
-            <a:pPr lvl="1" indent="-609585" marL="1219170">
-              <a:buAutoNum type="alphaLcParenBoth"/>
-            </a:pPr>
-            <a:r>
-              <a:rPr/>
-              <a:t>“Admin data can complement/replace survey data for HWLE” (methods)</a:t>
-            </a:r>
-          </a:p>
-          <a:p>
-            <a:pPr lvl="1" indent="-609585" marL="1219170">
-              <a:buAutoNum startAt="2" type="alphaLcParenBoth"/>
-            </a:pPr>
-            <a:r>
-              <a:rPr/>
-              <a:t>“HWPLE is a useful descriptive statistic for morbidity bases” (insurance)</a:t>
-            </a:r>
-          </a:p>
-          <a:p>
-            <a:pPr lvl="1" indent="-609585" marL="1219170">
-              <a:buAutoNum startAt="3" type="alphaLcParenBoth"/>
-            </a:pPr>
-            <a:r>
-              <a:rPr/>
-              <a:t>“HWLE has policy relevance to SPA / pensions adequacy / Keep Britain Working” (policy)</a:t>
-            </a:r>
-          </a:p>
-          <a:p>
-            <a:pPr lvl="1"/>
-            <a:r>
-              <a:rPr/>
-              <a:t>Call leaned towards: </a:t>
-            </a:r>
-            <a:r>
-              <a:rPr i="1"/>
-              <a:t>which data sources are best for these models — survey or CMI? — and the value of </a:t>
-            </a:r>
-            <a:r>
-              <a:rPr b="1" i="1"/>
-              <a:t>triangulating</a:t>
-            </a:r>
-            <a:r>
-              <a:rPr i="1"/>
-              <a:t> independent approaches.</a:t>
-            </a:r>
-            <a:r>
-              <a:rPr/>
-              <a:t> Deferred to next call.</a:t>
-            </a:r>
-          </a:p>
-          <a:p>
-            <a:pPr lvl="0"/>
-            <a:r>
-              <a:rPr/>
-              <a:t>☐ </a:t>
-            </a:r>
-            <a:r>
-              <a:rPr b="1"/>
-              <a:t>Avoid double-counting</a:t>
-            </a:r>
-            <a:r>
-              <a:rPr/>
-              <a:t> multi-state methods between Jon’s and David’s sections — decide who explains the model once.</a:t>
-            </a:r>
-          </a:p>
-          <a:p>
-            <a:pPr lvl="0"/>
-            <a:r>
-              <a:rPr/>
-              <a:t>☒ </a:t>
-            </a:r>
-            <a:r>
-              <a:rPr b="1"/>
-              <a:t>How much literature review?</a:t>
-            </a:r>
-          </a:p>
-          <a:p>
-            <a:pPr lvl="1"/>
-            <a:r>
-              <a:rPr/>
-              <a:t>≈ 5 min, folded into Jon’s “survey data” section.</a:t>
-            </a:r>
-          </a:p>
-          <a:p>
-            <a:pPr lvl="0"/>
-            <a:r>
-              <a:rPr/>
-              <a:t>☒ </a:t>
-            </a:r>
-            <a:r>
-              <a:rPr b="1"/>
-              <a:t>How much maths?</a:t>
-            </a:r>
-          </a:p>
-          <a:p>
-            <a:pPr lvl="1"/>
-            <a:r>
-              <a:rPr/>
-              <a:t>Diagrams sufficient; no additional equations.</a:t>
-            </a:r>
-          </a:p>
-          <a:p>
-            <a:pPr lvl="0"/>
-            <a:r>
-              <a:rPr/>
-              <a:t>☒ </a:t>
-            </a:r>
-            <a:r>
-              <a:rPr b="1"/>
-              <a:t>Show the Excel HWP Tool?</a:t>
-            </a:r>
-          </a:p>
-          <a:p>
-            <a:pPr lvl="1"/>
-            <a:r>
-              <a:rPr/>
-              <a:t>No.</a:t>
-            </a:r>
-          </a:p>
-          <a:p>
-            <a:pPr lvl="0"/>
-            <a:r>
-              <a:rPr/>
-              <a:t>☒ </a:t>
-            </a:r>
-            <a:r>
-              <a:rPr b="1"/>
-              <a:t>Link to UKHLS / economic inactivity work?</a:t>
-            </a:r>
-          </a:p>
-          <a:p>
-            <a:pPr lvl="1"/>
-            <a:r>
-              <a:rPr/>
-              <a:t>Yes, briefly — Jon’s section.</a:t>
-            </a:r>
-          </a:p>
-        </p:txBody>
-      </p:sp>
-      <p:sp>
-        <p:nvSpPr>
-          <p:cNvPr id="6" name="Footer Placeholder 4">
-            <a:extLst>
-              <a:ext uri="{FF2B5EF4-FFF2-40B4-BE49-F238E27FC236}">
-                <a16:creationId xmlns:a16="http://schemas.microsoft.com/office/drawing/2014/main" id="{8F9D7237-5CD7-6037-7D60-81DA36BE7AA4}"/>
+              <a:t>Supplement · CMI rates</a:t>
+            </a:r>
+          </a:p>
+        </p:txBody>
+      </p:sp>
+      <p:sp>
+        <p:nvSpPr>
+          <p:cNvPr id="8" name="Footer Placeholder 4">
+            <a:extLst>
+              <a:ext uri="{FF2B5EF4-FFF2-40B4-BE49-F238E27FC236}">
+                <a16:creationId xmlns:a16="http://schemas.microsoft.com/office/drawing/2014/main" id="{15C406F6-FE38-14E0-8BF8-B9AC42B3EF15}"/>
               </a:ext>
             </a:extLst>
           </p:cNvPr>
@@ -20100,7 +21331,7 @@
             <a:lvl1pPr algn="r">
               <a:defRPr sz="1600">
                 <a:solidFill>
-                  <a:schemeClr val="tx1"/>
+                  <a:schemeClr val="bg1"/>
                 </a:solidFill>
               </a:defRPr>
             </a:lvl1pPr>
@@ -20116,10 +21347,10 @@
       </p:sp>
       <p:sp>
         <p:nvSpPr>
-          <p:cNvPr id="7" name="Slide Number Placeholder 5">
-            <a:extLst>
-              <a:ext uri="{FF2B5EF4-FFF2-40B4-BE49-F238E27FC236}">
-                <a16:creationId xmlns:a16="http://schemas.microsoft.com/office/drawing/2014/main" id="{7B4B538E-25FF-2CD8-CF5C-A8AD3F07FE13}"/>
+          <p:cNvPr id="9" name="Slide Number Placeholder 5">
+            <a:extLst>
+              <a:ext uri="{FF2B5EF4-FFF2-40B4-BE49-F238E27FC236}">
+                <a16:creationId xmlns:a16="http://schemas.microsoft.com/office/drawing/2014/main" id="{C18B60AF-E1FE-C3E6-C9A3-0721F1D08E6F}"/>
               </a:ext>
             </a:extLst>
           </p:cNvPr>
@@ -20139,7 +21370,7 @@
             <a:avLst/>
           </a:prstGeom>
           <a:solidFill>
-            <a:schemeClr val="tx1"/>
+            <a:schemeClr val="bg1"/>
           </a:solidFill>
         </p:spPr>
         <p:txBody>
@@ -20148,7 +21379,7 @@
             <a:lvl1pPr algn="ctr">
               <a:defRPr b="1" i="0" sz="1200">
                 <a:solidFill>
-                  <a:schemeClr val="bg1"/>
+                  <a:schemeClr val="tx1"/>
                 </a:solidFill>
                 <a:latin charset="0" panose="020B0604020202020204" pitchFamily="34" typeface="Arial"/>
                 <a:cs charset="0" panose="020B0604020202020204" pitchFamily="34" typeface="Arial"/>
@@ -20170,7 +21401,7 @@
 </p:sld>
 </file>
 
-<file path=ppt/slides/slide40.xml><?xml version="1.0" encoding="utf-8"?>
+<file path=ppt/slides/slide43.xml><?xml version="1.0" encoding="utf-8"?>
 <p:sld xmlns:a="http://schemas.openxmlformats.org/drawingml/2006/main" xmlns:r="http://schemas.openxmlformats.org/officeDocument/2006/relationships" xmlns:p="http://schemas.openxmlformats.org/presentationml/2006/main">
   <p:cSld>
     <p:spTree>
@@ -20189,160 +21420,6 @@
       </p:grpSpPr>
       <p:sp>
         <p:nvSpPr>
-          <p:cNvPr id="97" name="Title 1">
-            <a:extLst>
-              <a:ext uri="{FF2B5EF4-FFF2-40B4-BE49-F238E27FC236}">
-                <a16:creationId xmlns:a16="http://schemas.microsoft.com/office/drawing/2014/main" id="{EF499182-B1CD-4399-99FD-7B1CA914FD59}"/>
-              </a:ext>
-            </a:extLst>
-          </p:cNvPr>
-          <p:cNvSpPr>
-            <a:spLocks noGrp="1"/>
-          </p:cNvSpPr>
-          <p:nvPr>
-            <p:ph hasCustomPrompt="1" type="title"/>
-          </p:nvPr>
-        </p:nvSpPr>
-        <p:spPr>
-          <a:xfrm>
-            <a:off x="1500000" y="3400000"/>
-            <a:ext cx="13256000" cy="2200000"/>
-          </a:xfrm>
-        </p:spPr>
-        <p:txBody>
-          <a:bodyPr/>
-          <a:lstStyle/>
-          <a:p>
-            <a:pPr lvl="0" indent="0" marL="0">
-              <a:buNone/>
-            </a:pPr>
-            <a:r>
-              <a:rPr/>
-              <a:t>Supplement · CMI rates</a:t>
-            </a:r>
-          </a:p>
-        </p:txBody>
-      </p:sp>
-      <p:sp>
-        <p:nvSpPr>
-          <p:cNvPr id="8" name="Footer Placeholder 4">
-            <a:extLst>
-              <a:ext uri="{FF2B5EF4-FFF2-40B4-BE49-F238E27FC236}">
-                <a16:creationId xmlns:a16="http://schemas.microsoft.com/office/drawing/2014/main" id="{15C406F6-FE38-14E0-8BF8-B9AC42B3EF15}"/>
-              </a:ext>
-            </a:extLst>
-          </p:cNvPr>
-          <p:cNvSpPr>
-            <a:spLocks noGrp="1"/>
-          </p:cNvSpPr>
-          <p:nvPr>
-            <p:ph idx="3" sz="quarter" type="ftr"/>
-          </p:nvPr>
-        </p:nvSpPr>
-        <p:spPr>
-          <a:xfrm>
-            <a:off x="1117600" y="8382533"/>
-            <a:ext cx="11368098" cy="486833"/>
-          </a:xfrm>
-          <a:prstGeom prst="rect">
-            <a:avLst/>
-          </a:prstGeom>
-        </p:spPr>
-        <p:txBody>
-          <a:bodyPr anchor="ctr" bIns="45720" lIns="91440" rIns="91440" rtlCol="0" tIns="45720" vert="horz"/>
-          <a:lstStyle>
-            <a:lvl1pPr algn="r">
-              <a:defRPr sz="1600">
-                <a:solidFill>
-                  <a:schemeClr val="bg1"/>
-                </a:solidFill>
-              </a:defRPr>
-            </a:lvl1pPr>
-          </a:lstStyle>
-          <a:p>
-            <a:r>
-              <a:rPr lang="en-GB"/>
-              <a:t>IFoA Life Conference</a:t>
-            </a:r>
-            <a:endParaRPr dirty="0" lang="en-GB"/>
-          </a:p>
-        </p:txBody>
-      </p:sp>
-      <p:sp>
-        <p:nvSpPr>
-          <p:cNvPr id="9" name="Slide Number Placeholder 5">
-            <a:extLst>
-              <a:ext uri="{FF2B5EF4-FFF2-40B4-BE49-F238E27FC236}">
-                <a16:creationId xmlns:a16="http://schemas.microsoft.com/office/drawing/2014/main" id="{C18B60AF-E1FE-C3E6-C9A3-0721F1D08E6F}"/>
-              </a:ext>
-            </a:extLst>
-          </p:cNvPr>
-          <p:cNvSpPr>
-            <a:spLocks noGrp="1"/>
-          </p:cNvSpPr>
-          <p:nvPr>
-            <p:ph idx="4" sz="quarter" type="sldNum"/>
-          </p:nvPr>
-        </p:nvSpPr>
-        <p:spPr>
-          <a:xfrm>
-            <a:off x="14573177" y="8382533"/>
-            <a:ext cx="529680" cy="486833"/>
-          </a:xfrm>
-          <a:prstGeom prst="rect">
-            <a:avLst/>
-          </a:prstGeom>
-          <a:solidFill>
-            <a:schemeClr val="bg1"/>
-          </a:solidFill>
-        </p:spPr>
-        <p:txBody>
-          <a:bodyPr anchor="ctr" bIns="45720" lIns="91440" rIns="91440" rtlCol="0" tIns="45720" vert="horz"/>
-          <a:lstStyle>
-            <a:lvl1pPr algn="ctr">
-              <a:defRPr b="1" i="0" sz="1200">
-                <a:solidFill>
-                  <a:schemeClr val="tx1"/>
-                </a:solidFill>
-                <a:latin charset="0" panose="020B0604020202020204" pitchFamily="34" typeface="Arial"/>
-                <a:cs charset="0" panose="020B0604020202020204" pitchFamily="34" typeface="Arial"/>
-              </a:defRPr>
-            </a:lvl1pPr>
-          </a:lstStyle>
-          <a:p>
-            <a:fld id="{40FC62D0-A2F2-4BF8-8DAC-E86C11000EC3}" type="slidenum">
-              <a:rPr lang="en-GB" smtClean="0"/>
-              <a:pPr/>
-              <a:t>‹#›</a:t>
-            </a:fld>
-            <a:endParaRPr dirty="0" lang="en-GB"/>
-          </a:p>
-        </p:txBody>
-      </p:sp>
-    </p:spTree>
-  </p:cSld>
-</p:sld>
-</file>
-
-<file path=ppt/slides/slide41.xml><?xml version="1.0" encoding="utf-8"?>
-<p:sld xmlns:a="http://schemas.openxmlformats.org/drawingml/2006/main" xmlns:r="http://schemas.openxmlformats.org/officeDocument/2006/relationships" xmlns:p="http://schemas.openxmlformats.org/presentationml/2006/main">
-  <p:cSld>
-    <p:spTree>
-      <p:nvGrpSpPr>
-        <p:cNvPr id="1" name=""/>
-        <p:cNvGrpSpPr/>
-        <p:nvPr/>
-      </p:nvGrpSpPr>
-      <p:grpSpPr>
-        <a:xfrm>
-          <a:off x="0" y="0"/>
-          <a:ext cx="0" cy="0"/>
-          <a:chOff x="0" y="0"/>
-          <a:chExt cx="0" cy="0"/>
-        </a:xfrm>
-      </p:grpSpPr>
-      <p:sp>
-        <p:nvSpPr>
           <p:cNvPr id="14" name="Title 1">
             <a:extLst>
               <a:ext uri="{FF2B5EF4-FFF2-40B4-BE49-F238E27FC236}">
@@ -20540,7 +21617,7 @@
 </p:sld>
 </file>
 
-<file path=ppt/slides/slide42.xml><?xml version="1.0" encoding="utf-8"?>
+<file path=ppt/slides/slide44.xml><?xml version="1.0" encoding="utf-8"?>
 <p:sld xmlns:a="http://schemas.openxmlformats.org/drawingml/2006/main" xmlns:r="http://schemas.openxmlformats.org/officeDocument/2006/relationships" xmlns:p="http://schemas.openxmlformats.org/presentationml/2006/main">
   <p:cSld>
     <p:spTree>
@@ -20884,7 +21961,7 @@
 </p:sld>
 </file>
 
-<file path=ppt/slides/slide43.xml><?xml version="1.0" encoding="utf-8"?>
+<file path=ppt/slides/slide45.xml><?xml version="1.0" encoding="utf-8"?>
 <p:sld xmlns:a="http://schemas.openxmlformats.org/drawingml/2006/main" xmlns:r="http://schemas.openxmlformats.org/officeDocument/2006/relationships" xmlns:p="http://schemas.openxmlformats.org/presentationml/2006/main">
   <p:cSld>
     <p:spTree>
@@ -21068,7 +22145,7 @@
 </p:sld>
 </file>
 
-<file path=ppt/slides/slide44.xml><?xml version="1.0" encoding="utf-8"?>
+<file path=ppt/slides/slide46.xml><?xml version="1.0" encoding="utf-8"?>
 <p:sld xmlns:a="http://schemas.openxmlformats.org/drawingml/2006/main" xmlns:r="http://schemas.openxmlformats.org/officeDocument/2006/relationships" xmlns:p="http://schemas.openxmlformats.org/presentationml/2006/main">
   <p:cSld>
     <p:spTree>
@@ -21536,7 +22613,7 @@
 </p:sld>
 </file>
 
-<file path=ppt/slides/slide45.xml><?xml version="1.0" encoding="utf-8"?>
+<file path=ppt/slides/slide47.xml><?xml version="1.0" encoding="utf-8"?>
 <p:sld xmlns:a="http://schemas.openxmlformats.org/drawingml/2006/main" xmlns:r="http://schemas.openxmlformats.org/officeDocument/2006/relationships" xmlns:p="http://schemas.openxmlformats.org/presentationml/2006/main">
   <p:cSld>
     <p:spTree>
@@ -21692,7 +22769,7 @@
 </p:sld>
 </file>
 
-<file path=ppt/slides/slide46.xml><?xml version="1.0" encoding="utf-8"?>
+<file path=ppt/slides/slide48.xml><?xml version="1.0" encoding="utf-8"?>
 <p:sld xmlns:a="http://schemas.openxmlformats.org/drawingml/2006/main" xmlns:r="http://schemas.openxmlformats.org/officeDocument/2006/relationships" xmlns:p="http://schemas.openxmlformats.org/presentationml/2006/main">
   <p:cSld>
     <p:spTree>
@@ -22122,7 +23199,7 @@
 </p:sld>
 </file>
 
-<file path=ppt/slides/slide47.xml><?xml version="1.0" encoding="utf-8"?>
+<file path=ppt/slides/slide49.xml><?xml version="1.0" encoding="utf-8"?>
 <p:sld xmlns:a="http://schemas.openxmlformats.org/drawingml/2006/main" xmlns:r="http://schemas.openxmlformats.org/officeDocument/2006/relationships" xmlns:p="http://schemas.openxmlformats.org/presentationml/2006/main">
   <p:cSld>
     <p:spTree>
@@ -22278,7 +23355,422 @@
 </p:sld>
 </file>
 
-<file path=ppt/slides/slide48.xml><?xml version="1.0" encoding="utf-8"?>
+<file path=ppt/slides/slide5.xml><?xml version="1.0" encoding="utf-8"?>
+<p:sld xmlns:a="http://schemas.openxmlformats.org/drawingml/2006/main" xmlns:r="http://schemas.openxmlformats.org/officeDocument/2006/relationships" xmlns:p="http://schemas.openxmlformats.org/presentationml/2006/main">
+  <p:cSld>
+    <p:spTree>
+      <p:nvGrpSpPr>
+        <p:cNvPr id="1" name=""/>
+        <p:cNvGrpSpPr/>
+        <p:nvPr/>
+      </p:nvGrpSpPr>
+      <p:grpSpPr>
+        <a:xfrm>
+          <a:off x="0" y="0"/>
+          <a:ext cx="0" cy="0"/>
+          <a:chOff x="0" y="0"/>
+          <a:chExt cx="0" cy="0"/>
+        </a:xfrm>
+      </p:grpSpPr>
+      <p:sp>
+        <p:nvSpPr>
+          <p:cNvPr id="14" name="Title 1">
+            <a:extLst>
+              <a:ext uri="{FF2B5EF4-FFF2-40B4-BE49-F238E27FC236}">
+                <a16:creationId xmlns:a16="http://schemas.microsoft.com/office/drawing/2014/main" id="{EF499182-B1CD-4399-99FD-7B1CA914FD59}"/>
+              </a:ext>
+            </a:extLst>
+          </p:cNvPr>
+          <p:cNvSpPr>
+            <a:spLocks noGrp="1"/>
+          </p:cNvSpPr>
+          <p:nvPr>
+            <p:ph hasCustomPrompt="1" type="title"/>
+          </p:nvPr>
+        </p:nvSpPr>
+        <p:spPr>
+          <a:xfrm>
+            <a:off x="1117601" y="405087"/>
+            <a:ext cx="14020798" cy="818882"/>
+          </a:xfrm>
+        </p:spPr>
+        <p:txBody>
+          <a:bodyPr/>
+          <a:lstStyle/>
+          <a:p>
+            <a:pPr lvl="0" indent="0" marL="0">
+              <a:buNone/>
+            </a:pPr>
+            <a:r>
+              <a:rPr/>
+              <a:t>❓ Content decisions affecting several slides</a:t>
+            </a:r>
+          </a:p>
+        </p:txBody>
+      </p:sp>
+      <p:sp>
+        <p:nvSpPr>
+          <p:cNvPr id="23" name="Content Placeholder 9">
+            <a:extLst>
+              <a:ext uri="{FF2B5EF4-FFF2-40B4-BE49-F238E27FC236}">
+                <a16:creationId xmlns:a16="http://schemas.microsoft.com/office/drawing/2014/main" id="{0C532851-4697-4B02-B344-E4852AF78CBF}"/>
+              </a:ext>
+            </a:extLst>
+          </p:cNvPr>
+          <p:cNvSpPr>
+            <a:spLocks noGrp="1"/>
+          </p:cNvSpPr>
+          <p:nvPr>
+            <p:ph hasCustomPrompt="1" idx="13" sz="quarter"/>
+          </p:nvPr>
+        </p:nvSpPr>
+        <p:spPr>
+          <a:xfrm>
+            <a:off x="1104904" y="2269323"/>
+            <a:ext cx="14020800" cy="5659894"/>
+          </a:xfrm>
+        </p:spPr>
+        <p:txBody>
+          <a:bodyPr wrap="square" rtlCol="0">
+            <a:normAutofit/>
+          </a:bodyPr>
+          <a:lstStyle/>
+          <a:p>
+            <a:pPr lvl="0"/>
+            <a:r>
+              <a:rPr/>
+              <a:t>☐ </a:t>
+            </a:r>
+            <a:r>
+              <a:rPr b="1"/>
+              <a:t>Which headline numbers?</a:t>
+            </a:r>
+            <a:r>
+              <a:rPr/>
+              <a:t> Draft uses </a:t>
+            </a:r>
+            <a:r>
+              <a:rPr i="1"/>
+              <a:t>age 50, retire at 65</a:t>
+            </a:r>
+            <a:r>
+              <a:rPr/>
+              <a:t>: HWPLE 13.1–13.8 yrs, NNPLE 0.44–1.21 yrs. Also age-20 (42.3 / 1.08 yrs)?</a:t>
+            </a:r>
+          </a:p>
+          <a:p>
+            <a:pPr lvl="0"/>
+            <a:r>
+              <a:rPr/>
+              <a:t>☐ </a:t>
+            </a:r>
+            <a:r>
+              <a:rPr b="1"/>
+              <a:t>OC1 vs OC2 “counter-intuitive” ordering</a:t>
+            </a:r>
+            <a:r>
+              <a:rPr/>
+              <a:t> — talking point or downplay?</a:t>
+            </a:r>
+          </a:p>
+          <a:p>
+            <a:pPr lvl="0"/>
+            <a:r>
+              <a:rPr/>
+              <a:t>☐ </a:t>
+            </a:r>
+            <a:r>
+              <a:rPr b="1"/>
+              <a:t>Female OC3/OC4 credibility caveat</a:t>
+            </a:r>
+            <a:r>
+              <a:rPr/>
+              <a:t> — footnote or one caveat line?</a:t>
+            </a:r>
+          </a:p>
+          <a:p>
+            <a:pPr lvl="0"/>
+            <a:r>
+              <a:rPr/>
+              <a:t>☐ </a:t>
+            </a:r>
+            <a:r>
+              <a:rPr b="1"/>
+              <a:t>Terminology:</a:t>
+            </a:r>
+            <a:r>
+              <a:rPr/>
+              <a:t> </a:t>
+            </a:r>
+            <a:r>
+              <a:rPr i="1"/>
+              <a:t>HWPLE / NNPLE</a:t>
+            </a:r>
+            <a:r>
+              <a:rPr/>
+              <a:t> throughout, or </a:t>
+            </a:r>
+            <a:r>
+              <a:rPr i="1"/>
+              <a:t>HWLE</a:t>
+            </a:r>
+            <a:r>
+              <a:rPr/>
+              <a:t> in titles with “partial” defined once?</a:t>
+            </a:r>
+          </a:p>
+          <a:p>
+            <a:pPr lvl="0"/>
+            <a:r>
+              <a:rPr/>
+              <a:t>☐ </a:t>
+            </a:r>
+            <a:r>
+              <a:rPr b="1"/>
+              <a:t>Figures needed:</a:t>
+            </a:r>
+          </a:p>
+          <a:p>
+            <a:pPr lvl="1"/>
+            <a:r>
+              <a:rPr/>
+              <a:t>☒ HWPLE / NNPLE by starting age × OC (line chart — generated in this file)</a:t>
+            </a:r>
+          </a:p>
+          <a:p>
+            <a:pPr lvl="1"/>
+            <a:r>
+              <a:rPr/>
+              <a:t>☐ Stacked bar: % of working life to 65 in W / NN / Dead, ages 20 vs 50</a:t>
+            </a:r>
+          </a:p>
+          <a:p>
+            <a:pPr lvl="1"/>
+            <a:r>
+              <a:rPr/>
+              <a:t>☐ Redrawn 4-state HWP Tool diagram (Figure 5 is </a:t>
+            </a:r>
+            <a:r>
+              <a:rPr i="1"/>
+              <a:t>missing</a:t>
+            </a:r>
+            <a:r>
+              <a:rPr/>
+              <a:t> from the docx)</a:t>
+            </a:r>
+          </a:p>
+          <a:p>
+            <a:pPr lvl="0"/>
+            <a:r>
+              <a:rPr/>
+              <a:t>☒ </a:t>
+            </a:r>
+            <a:r>
+              <a:rPr b="1"/>
+              <a:t>Exact title of the Mayfield review</a:t>
+            </a:r>
+          </a:p>
+          <a:p>
+            <a:pPr lvl="1"/>
+            <a:r>
+              <a:rPr i="1"/>
+              <a:t>Keep Britain Working</a:t>
+            </a:r>
+            <a:r>
+              <a:rPr/>
+              <a:t> is the current name (renamed from </a:t>
+            </a:r>
+            <a:r>
+              <a:rPr i="1"/>
+              <a:t>Get Britain Working</a:t>
+            </a:r>
+            <a:r>
+              <a:rPr/>
+              <a:t>; name change discussed at the 28 Aug call).</a:t>
+            </a:r>
+          </a:p>
+          <a:p>
+            <a:pPr lvl="0"/>
+            <a:r>
+              <a:rPr/>
+              <a:t>☐ </a:t>
+            </a:r>
+            <a:r>
+              <a:rPr b="1"/>
+              <a:t>Darzi review</a:t>
+            </a:r>
+            <a:r>
+              <a:rPr/>
+              <a:t> (2024, NHS-focused) — mention in Chris’s policy backdrop? Agreed worth a mention, but it is NHS- rather than workforce-focused; decide on prominence.</a:t>
+            </a:r>
+          </a:p>
+          <a:p>
+            <a:pPr lvl="0"/>
+            <a:r>
+              <a:rPr/>
+              <a:t>☒ </a:t>
+            </a:r>
+            <a:r>
+              <a:rPr b="1"/>
+              <a:t>Personal intros</a:t>
+            </a:r>
+          </a:p>
+          <a:p>
+            <a:pPr lvl="1"/>
+            <a:r>
+              <a:rPr/>
+              <a:t>Each presenter gives a slightly longer personal intro when taking over their section; David does a brief one at the start.</a:t>
+            </a:r>
+          </a:p>
+          <a:p>
+            <a:pPr lvl="0"/>
+            <a:r>
+              <a:rPr/>
+              <a:t>☒ </a:t>
+            </a:r>
+            <a:r>
+              <a:rPr b="1"/>
+              <a:t>Presenter names</a:t>
+            </a:r>
+            <a:r>
+              <a:rPr/>
+              <a:t> — Chris Martin; three presenters on behalf of the wider WP, whose names appear on title slide and WP slide.</a:t>
+            </a:r>
+          </a:p>
+          <a:p>
+            <a:pPr lvl="0"/>
+            <a:r>
+              <a:rPr/>
+              <a:t>☒ </a:t>
+            </a:r>
+            <a:r>
+              <a:rPr b="1"/>
+              <a:t>Meeting transcript</a:t>
+            </a:r>
+            <a:r>
+              <a:rPr/>
+              <a:t> (Pocket AI, 28 Aug call) — reviewed; points folded into NOTES.md and these checklists.</a:t>
+            </a:r>
+          </a:p>
+          <a:p>
+            <a:pPr lvl="0"/>
+            <a:r>
+              <a:rPr/>
+              <a:t>☐ </a:t>
+            </a:r>
+            <a:r>
+              <a:rPr b="1"/>
+              <a:t>Chris’s content</a:t>
+            </a:r>
+            <a:r>
+              <a:rPr/>
+              <a:t> — Chris will draft as a text document for Jon to fold in here.</a:t>
+            </a:r>
+          </a:p>
+        </p:txBody>
+      </p:sp>
+      <p:sp>
+        <p:nvSpPr>
+          <p:cNvPr id="6" name="Footer Placeholder 4">
+            <a:extLst>
+              <a:ext uri="{FF2B5EF4-FFF2-40B4-BE49-F238E27FC236}">
+                <a16:creationId xmlns:a16="http://schemas.microsoft.com/office/drawing/2014/main" id="{8F9D7237-5CD7-6037-7D60-81DA36BE7AA4}"/>
+              </a:ext>
+            </a:extLst>
+          </p:cNvPr>
+          <p:cNvSpPr>
+            <a:spLocks noGrp="1"/>
+          </p:cNvSpPr>
+          <p:nvPr>
+            <p:ph idx="3" sz="quarter" type="ftr"/>
+          </p:nvPr>
+        </p:nvSpPr>
+        <p:spPr>
+          <a:xfrm>
+            <a:off x="1117600" y="8382533"/>
+            <a:ext cx="11368098" cy="486833"/>
+          </a:xfrm>
+          <a:prstGeom prst="rect">
+            <a:avLst/>
+          </a:prstGeom>
+        </p:spPr>
+        <p:txBody>
+          <a:bodyPr anchor="ctr" bIns="45720" lIns="91440" rIns="91440" rtlCol="0" tIns="45720" vert="horz"/>
+          <a:lstStyle>
+            <a:lvl1pPr algn="r">
+              <a:defRPr sz="1600">
+                <a:solidFill>
+                  <a:schemeClr val="tx1"/>
+                </a:solidFill>
+              </a:defRPr>
+            </a:lvl1pPr>
+          </a:lstStyle>
+          <a:p>
+            <a:r>
+              <a:rPr lang="en-GB"/>
+              <a:t>IFoA Life Conference</a:t>
+            </a:r>
+            <a:endParaRPr dirty="0" lang="en-GB"/>
+          </a:p>
+        </p:txBody>
+      </p:sp>
+      <p:sp>
+        <p:nvSpPr>
+          <p:cNvPr id="7" name="Slide Number Placeholder 5">
+            <a:extLst>
+              <a:ext uri="{FF2B5EF4-FFF2-40B4-BE49-F238E27FC236}">
+                <a16:creationId xmlns:a16="http://schemas.microsoft.com/office/drawing/2014/main" id="{7B4B538E-25FF-2CD8-CF5C-A8AD3F07FE13}"/>
+              </a:ext>
+            </a:extLst>
+          </p:cNvPr>
+          <p:cNvSpPr>
+            <a:spLocks noGrp="1"/>
+          </p:cNvSpPr>
+          <p:nvPr>
+            <p:ph idx="4" sz="quarter" type="sldNum"/>
+          </p:nvPr>
+        </p:nvSpPr>
+        <p:spPr>
+          <a:xfrm>
+            <a:off x="14573177" y="8382533"/>
+            <a:ext cx="529680" cy="486833"/>
+          </a:xfrm>
+          <a:prstGeom prst="rect">
+            <a:avLst/>
+          </a:prstGeom>
+          <a:solidFill>
+            <a:schemeClr val="tx1"/>
+          </a:solidFill>
+        </p:spPr>
+        <p:txBody>
+          <a:bodyPr anchor="ctr" bIns="45720" lIns="91440" rIns="91440" rtlCol="0" tIns="45720" vert="horz"/>
+          <a:lstStyle>
+            <a:lvl1pPr algn="ctr">
+              <a:defRPr b="1" i="0" sz="1200">
+                <a:solidFill>
+                  <a:schemeClr val="bg1"/>
+                </a:solidFill>
+                <a:latin charset="0" panose="020B0604020202020204" pitchFamily="34" typeface="Arial"/>
+                <a:cs charset="0" panose="020B0604020202020204" pitchFamily="34" typeface="Arial"/>
+              </a:defRPr>
+            </a:lvl1pPr>
+          </a:lstStyle>
+          <a:p>
+            <a:fld id="{40FC62D0-A2F2-4BF8-8DAC-E86C11000EC3}" type="slidenum">
+              <a:rPr lang="en-GB" smtClean="0"/>
+              <a:pPr/>
+              <a:t>‹#›</a:t>
+            </a:fld>
+            <a:endParaRPr dirty="0" lang="en-GB"/>
+          </a:p>
+        </p:txBody>
+      </p:sp>
+    </p:spTree>
+  </p:cSld>
+</p:sld>
+</file>
+
+<file path=ppt/slides/slide50.xml><?xml version="1.0" encoding="utf-8"?>
 <p:sld xmlns:a="http://schemas.openxmlformats.org/drawingml/2006/main" xmlns:r="http://schemas.openxmlformats.org/officeDocument/2006/relationships" xmlns:p="http://schemas.openxmlformats.org/presentationml/2006/main">
   <p:cSld>
     <p:spTree>
@@ -22838,7 +24330,7 @@
 </p:sld>
 </file>
 
-<file path=ppt/slides/slide49.xml><?xml version="1.0" encoding="utf-8"?>
+<file path=ppt/slides/slide51.xml><?xml version="1.0" encoding="utf-8"?>
 <p:sld xmlns:a="http://schemas.openxmlformats.org/drawingml/2006/main" xmlns:r="http://schemas.openxmlformats.org/officeDocument/2006/relationships" xmlns:p="http://schemas.openxmlformats.org/presentationml/2006/main">
   <p:cSld>
     <p:spTree>
@@ -22994,7 +24486,7 @@
 </p:sld>
 </file>
 
-<file path=ppt/slides/slide5.xml><?xml version="1.0" encoding="utf-8"?>
+<file path=ppt/slides/slide52.xml><?xml version="1.0" encoding="utf-8"?>
 <p:sld xmlns:a="http://schemas.openxmlformats.org/drawingml/2006/main" xmlns:r="http://schemas.openxmlformats.org/officeDocument/2006/relationships" xmlns:p="http://schemas.openxmlformats.org/presentationml/2006/main">
   <p:cSld>
     <p:spTree>
@@ -23013,7 +24505,7 @@
       </p:grpSpPr>
       <p:sp>
         <p:nvSpPr>
-          <p:cNvPr id="14" name="Title 1">
+          <p:cNvPr id="97" name="Title 1">
             <a:extLst>
               <a:ext uri="{FF2B5EF4-FFF2-40B4-BE49-F238E27FC236}">
                 <a16:creationId xmlns:a16="http://schemas.microsoft.com/office/drawing/2014/main" id="{EF499182-B1CD-4399-99FD-7B1CA914FD59}"/>
@@ -23029,8 +24521,8 @@
         </p:nvSpPr>
         <p:spPr>
           <a:xfrm>
-            <a:off x="1117601" y="405087"/>
-            <a:ext cx="14020798" cy="818882"/>
+            <a:off x="1500000" y="3400000"/>
+            <a:ext cx="13256000" cy="2200000"/>
           </a:xfrm>
         </p:spPr>
         <p:txBody>
@@ -23042,278 +24534,17 @@
             </a:pPr>
             <a:r>
               <a:rPr/>
-              <a:t>❓ Content decisions affecting several slides</a:t>
-            </a:r>
-          </a:p>
-        </p:txBody>
-      </p:sp>
-      <p:sp>
-        <p:nvSpPr>
-          <p:cNvPr id="23" name="Content Placeholder 9">
-            <a:extLst>
-              <a:ext uri="{FF2B5EF4-FFF2-40B4-BE49-F238E27FC236}">
-                <a16:creationId xmlns:a16="http://schemas.microsoft.com/office/drawing/2014/main" id="{0C532851-4697-4B02-B344-E4852AF78CBF}"/>
-              </a:ext>
-            </a:extLst>
-          </p:cNvPr>
-          <p:cNvSpPr>
-            <a:spLocks noGrp="1"/>
-          </p:cNvSpPr>
-          <p:nvPr>
-            <p:ph hasCustomPrompt="1" idx="13" sz="quarter"/>
-          </p:nvPr>
-        </p:nvSpPr>
-        <p:spPr>
-          <a:xfrm>
-            <a:off x="1104904" y="2269323"/>
-            <a:ext cx="14020800" cy="5659894"/>
-          </a:xfrm>
-        </p:spPr>
-        <p:txBody>
-          <a:bodyPr wrap="square" rtlCol="0">
-            <a:normAutofit/>
-          </a:bodyPr>
-          <a:lstStyle/>
-          <a:p>
-            <a:pPr lvl="0"/>
-            <a:r>
-              <a:rPr/>
-              <a:t>☐ </a:t>
-            </a:r>
-            <a:r>
-              <a:rPr b="1"/>
-              <a:t>Which headline numbers?</a:t>
-            </a:r>
-            <a:r>
-              <a:rPr/>
-              <a:t> Draft uses </a:t>
-            </a:r>
-            <a:r>
-              <a:rPr i="1"/>
-              <a:t>age 50, retire at 65</a:t>
-            </a:r>
-            <a:r>
-              <a:rPr/>
-              <a:t>: HWPLE 13.1–13.8 yrs, NNPLE 0.44–1.21 yrs. Also age-20 (42.3 / 1.08 yrs)?</a:t>
-            </a:r>
-          </a:p>
-          <a:p>
-            <a:pPr lvl="0"/>
-            <a:r>
-              <a:rPr/>
-              <a:t>☐ </a:t>
-            </a:r>
-            <a:r>
-              <a:rPr b="1"/>
-              <a:t>OC1 vs OC2 “counter-intuitive” ordering</a:t>
-            </a:r>
-            <a:r>
-              <a:rPr/>
-              <a:t> — talking point or downplay?</a:t>
-            </a:r>
-          </a:p>
-          <a:p>
-            <a:pPr lvl="0"/>
-            <a:r>
-              <a:rPr/>
-              <a:t>☐ </a:t>
-            </a:r>
-            <a:r>
-              <a:rPr b="1"/>
-              <a:t>Female OC3/OC4 credibility caveat</a:t>
-            </a:r>
-            <a:r>
-              <a:rPr/>
-              <a:t> — footnote or one caveat line?</a:t>
-            </a:r>
-          </a:p>
-          <a:p>
-            <a:pPr lvl="0"/>
-            <a:r>
-              <a:rPr/>
-              <a:t>☐ </a:t>
-            </a:r>
-            <a:r>
-              <a:rPr b="1"/>
-              <a:t>Terminology:</a:t>
-            </a:r>
-            <a:r>
-              <a:rPr/>
-              <a:t> </a:t>
-            </a:r>
-            <a:r>
-              <a:rPr i="1"/>
-              <a:t>HWPLE / NNPLE</a:t>
-            </a:r>
-            <a:r>
-              <a:rPr/>
-              <a:t> throughout, or </a:t>
-            </a:r>
-            <a:r>
-              <a:rPr i="1"/>
-              <a:t>HWLE</a:t>
-            </a:r>
-            <a:r>
-              <a:rPr/>
-              <a:t> in titles with “partial” defined once?</a:t>
-            </a:r>
-          </a:p>
-          <a:p>
-            <a:pPr lvl="0"/>
-            <a:r>
-              <a:rPr/>
-              <a:t>☐ </a:t>
-            </a:r>
-            <a:r>
-              <a:rPr b="1"/>
-              <a:t>Figures needed:</a:t>
-            </a:r>
-          </a:p>
-          <a:p>
-            <a:pPr lvl="1"/>
-            <a:r>
-              <a:rPr/>
-              <a:t>☒ HWPLE / NNPLE by starting age × OC (line chart — generated in this file)</a:t>
-            </a:r>
-          </a:p>
-          <a:p>
-            <a:pPr lvl="1"/>
-            <a:r>
-              <a:rPr/>
-              <a:t>☐ Stacked bar: % of working life to 65 in W / NN / Dead, ages 20 vs 50</a:t>
-            </a:r>
-          </a:p>
-          <a:p>
-            <a:pPr lvl="1"/>
-            <a:r>
-              <a:rPr/>
-              <a:t>☐ Redrawn 4-state HWP Tool diagram (Figure 5 is </a:t>
-            </a:r>
-            <a:r>
-              <a:rPr i="1"/>
-              <a:t>missing</a:t>
-            </a:r>
-            <a:r>
-              <a:rPr/>
-              <a:t> from the docx)</a:t>
-            </a:r>
-          </a:p>
-          <a:p>
-            <a:pPr lvl="0"/>
-            <a:r>
-              <a:rPr/>
-              <a:t>☒ </a:t>
-            </a:r>
-            <a:r>
-              <a:rPr b="1"/>
-              <a:t>Exact title of the Mayfield review</a:t>
-            </a:r>
-          </a:p>
-          <a:p>
-            <a:pPr lvl="1"/>
-            <a:r>
-              <a:rPr i="1"/>
-              <a:t>Keep Britain Working</a:t>
-            </a:r>
-            <a:r>
-              <a:rPr/>
-              <a:t> is the current name (renamed from </a:t>
-            </a:r>
-            <a:r>
-              <a:rPr i="1"/>
-              <a:t>Get Britain Working</a:t>
-            </a:r>
-            <a:r>
-              <a:rPr/>
-              <a:t>; name change discussed at the 28 Aug call).</a:t>
-            </a:r>
-          </a:p>
-          <a:p>
-            <a:pPr lvl="0"/>
-            <a:r>
-              <a:rPr/>
-              <a:t>☐ </a:t>
-            </a:r>
-            <a:r>
-              <a:rPr b="1"/>
-              <a:t>Darzi review</a:t>
-            </a:r>
-            <a:r>
-              <a:rPr/>
-              <a:t> (2024, NHS-focused) — mention in Chris’s policy backdrop? Agreed worth a mention, but it is NHS- rather than workforce-focused; decide on prominence.</a:t>
-            </a:r>
-          </a:p>
-          <a:p>
-            <a:pPr lvl="0"/>
-            <a:r>
-              <a:rPr/>
-              <a:t>☒ </a:t>
-            </a:r>
-            <a:r>
-              <a:rPr b="1"/>
-              <a:t>Personal intros</a:t>
-            </a:r>
-          </a:p>
-          <a:p>
-            <a:pPr lvl="1"/>
-            <a:r>
-              <a:rPr/>
-              <a:t>Each presenter gives a slightly longer personal intro when taking over their section; David does a brief one at the start.</a:t>
-            </a:r>
-          </a:p>
-          <a:p>
-            <a:pPr lvl="0"/>
-            <a:r>
-              <a:rPr/>
-              <a:t>☒ </a:t>
-            </a:r>
-            <a:r>
-              <a:rPr b="1"/>
-              <a:t>Presenter names</a:t>
-            </a:r>
-            <a:r>
-              <a:rPr/>
-              <a:t> — Chris Martin; three presenters on behalf of the wider WP, whose names appear on title slide and WP slide.</a:t>
-            </a:r>
-          </a:p>
-          <a:p>
-            <a:pPr lvl="0"/>
-            <a:r>
-              <a:rPr/>
-              <a:t>☒ </a:t>
-            </a:r>
-            <a:r>
-              <a:rPr b="1"/>
-              <a:t>Meeting transcript</a:t>
-            </a:r>
-            <a:r>
-              <a:rPr/>
-              <a:t> (Pocket AI, 28 Aug call) — reviewed; points folded into NOTES.md and these checklists.</a:t>
-            </a:r>
-          </a:p>
-          <a:p>
-            <a:pPr lvl="0"/>
-            <a:r>
-              <a:rPr/>
-              <a:t>☐ </a:t>
-            </a:r>
-            <a:r>
-              <a:rPr b="1"/>
-              <a:t>Chris’s content</a:t>
-            </a:r>
-            <a:r>
-              <a:rPr/>
-              <a:t> — Chris will draft as a text document for Jon to fold in here.</a:t>
-            </a:r>
-          </a:p>
-        </p:txBody>
-      </p:sp>
-      <p:sp>
-        <p:nvSpPr>
-          <p:cNvPr id="6" name="Footer Placeholder 4">
-            <a:extLst>
-              <a:ext uri="{FF2B5EF4-FFF2-40B4-BE49-F238E27FC236}">
-                <a16:creationId xmlns:a16="http://schemas.microsoft.com/office/drawing/2014/main" id="{8F9D7237-5CD7-6037-7D60-81DA36BE7AA4}"/>
+              <a:t>Supplement · Close</a:t>
+            </a:r>
+          </a:p>
+        </p:txBody>
+      </p:sp>
+      <p:sp>
+        <p:nvSpPr>
+          <p:cNvPr id="8" name="Footer Placeholder 4">
+            <a:extLst>
+              <a:ext uri="{FF2B5EF4-FFF2-40B4-BE49-F238E27FC236}">
+                <a16:creationId xmlns:a16="http://schemas.microsoft.com/office/drawing/2014/main" id="{15C406F6-FE38-14E0-8BF8-B9AC42B3EF15}"/>
               </a:ext>
             </a:extLst>
           </p:cNvPr>
@@ -23339,7 +24570,7 @@
             <a:lvl1pPr algn="r">
               <a:defRPr sz="1600">
                 <a:solidFill>
-                  <a:schemeClr val="tx1"/>
+                  <a:schemeClr val="bg1"/>
                 </a:solidFill>
               </a:defRPr>
             </a:lvl1pPr>
@@ -23355,10 +24586,10 @@
       </p:sp>
       <p:sp>
         <p:nvSpPr>
-          <p:cNvPr id="7" name="Slide Number Placeholder 5">
-            <a:extLst>
-              <a:ext uri="{FF2B5EF4-FFF2-40B4-BE49-F238E27FC236}">
-                <a16:creationId xmlns:a16="http://schemas.microsoft.com/office/drawing/2014/main" id="{7B4B538E-25FF-2CD8-CF5C-A8AD3F07FE13}"/>
+          <p:cNvPr id="9" name="Slide Number Placeholder 5">
+            <a:extLst>
+              <a:ext uri="{FF2B5EF4-FFF2-40B4-BE49-F238E27FC236}">
+                <a16:creationId xmlns:a16="http://schemas.microsoft.com/office/drawing/2014/main" id="{C18B60AF-E1FE-C3E6-C9A3-0721F1D08E6F}"/>
               </a:ext>
             </a:extLst>
           </p:cNvPr>
@@ -23378,7 +24609,7 @@
             <a:avLst/>
           </a:prstGeom>
           <a:solidFill>
-            <a:schemeClr val="tx1"/>
+            <a:schemeClr val="bg1"/>
           </a:solidFill>
         </p:spPr>
         <p:txBody>
@@ -23387,7 +24618,7 @@
             <a:lvl1pPr algn="ctr">
               <a:defRPr b="1" i="0" sz="1200">
                 <a:solidFill>
-                  <a:schemeClr val="bg1"/>
+                  <a:schemeClr val="tx1"/>
                 </a:solidFill>
                 <a:latin charset="0" panose="020B0604020202020204" pitchFamily="34" typeface="Arial"/>
                 <a:cs charset="0" panose="020B0604020202020204" pitchFamily="34" typeface="Arial"/>
@@ -23409,161 +24640,7 @@
 </p:sld>
 </file>
 
-<file path=ppt/slides/slide50.xml><?xml version="1.0" encoding="utf-8"?>
-<p:sld xmlns:a="http://schemas.openxmlformats.org/drawingml/2006/main" xmlns:r="http://schemas.openxmlformats.org/officeDocument/2006/relationships" xmlns:p="http://schemas.openxmlformats.org/presentationml/2006/main">
-  <p:cSld>
-    <p:spTree>
-      <p:nvGrpSpPr>
-        <p:cNvPr id="1" name=""/>
-        <p:cNvGrpSpPr/>
-        <p:nvPr/>
-      </p:nvGrpSpPr>
-      <p:grpSpPr>
-        <a:xfrm>
-          <a:off x="0" y="0"/>
-          <a:ext cx="0" cy="0"/>
-          <a:chOff x="0" y="0"/>
-          <a:chExt cx="0" cy="0"/>
-        </a:xfrm>
-      </p:grpSpPr>
-      <p:sp>
-        <p:nvSpPr>
-          <p:cNvPr id="97" name="Title 1">
-            <a:extLst>
-              <a:ext uri="{FF2B5EF4-FFF2-40B4-BE49-F238E27FC236}">
-                <a16:creationId xmlns:a16="http://schemas.microsoft.com/office/drawing/2014/main" id="{EF499182-B1CD-4399-99FD-7B1CA914FD59}"/>
-              </a:ext>
-            </a:extLst>
-          </p:cNvPr>
-          <p:cNvSpPr>
-            <a:spLocks noGrp="1"/>
-          </p:cNvSpPr>
-          <p:nvPr>
-            <p:ph hasCustomPrompt="1" type="title"/>
-          </p:nvPr>
-        </p:nvSpPr>
-        <p:spPr>
-          <a:xfrm>
-            <a:off x="1500000" y="3400000"/>
-            <a:ext cx="13256000" cy="2200000"/>
-          </a:xfrm>
-        </p:spPr>
-        <p:txBody>
-          <a:bodyPr/>
-          <a:lstStyle/>
-          <a:p>
-            <a:pPr lvl="0" indent="0" marL="0">
-              <a:buNone/>
-            </a:pPr>
-            <a:r>
-              <a:rPr/>
-              <a:t>Supplement · Close</a:t>
-            </a:r>
-          </a:p>
-        </p:txBody>
-      </p:sp>
-      <p:sp>
-        <p:nvSpPr>
-          <p:cNvPr id="8" name="Footer Placeholder 4">
-            <a:extLst>
-              <a:ext uri="{FF2B5EF4-FFF2-40B4-BE49-F238E27FC236}">
-                <a16:creationId xmlns:a16="http://schemas.microsoft.com/office/drawing/2014/main" id="{15C406F6-FE38-14E0-8BF8-B9AC42B3EF15}"/>
-              </a:ext>
-            </a:extLst>
-          </p:cNvPr>
-          <p:cNvSpPr>
-            <a:spLocks noGrp="1"/>
-          </p:cNvSpPr>
-          <p:nvPr>
-            <p:ph idx="3" sz="quarter" type="ftr"/>
-          </p:nvPr>
-        </p:nvSpPr>
-        <p:spPr>
-          <a:xfrm>
-            <a:off x="1117600" y="8382533"/>
-            <a:ext cx="11368098" cy="486833"/>
-          </a:xfrm>
-          <a:prstGeom prst="rect">
-            <a:avLst/>
-          </a:prstGeom>
-        </p:spPr>
-        <p:txBody>
-          <a:bodyPr anchor="ctr" bIns="45720" lIns="91440" rIns="91440" rtlCol="0" tIns="45720" vert="horz"/>
-          <a:lstStyle>
-            <a:lvl1pPr algn="r">
-              <a:defRPr sz="1600">
-                <a:solidFill>
-                  <a:schemeClr val="bg1"/>
-                </a:solidFill>
-              </a:defRPr>
-            </a:lvl1pPr>
-          </a:lstStyle>
-          <a:p>
-            <a:r>
-              <a:rPr lang="en-GB"/>
-              <a:t>IFoA Life Conference</a:t>
-            </a:r>
-            <a:endParaRPr dirty="0" lang="en-GB"/>
-          </a:p>
-        </p:txBody>
-      </p:sp>
-      <p:sp>
-        <p:nvSpPr>
-          <p:cNvPr id="9" name="Slide Number Placeholder 5">
-            <a:extLst>
-              <a:ext uri="{FF2B5EF4-FFF2-40B4-BE49-F238E27FC236}">
-                <a16:creationId xmlns:a16="http://schemas.microsoft.com/office/drawing/2014/main" id="{C18B60AF-E1FE-C3E6-C9A3-0721F1D08E6F}"/>
-              </a:ext>
-            </a:extLst>
-          </p:cNvPr>
-          <p:cNvSpPr>
-            <a:spLocks noGrp="1"/>
-          </p:cNvSpPr>
-          <p:nvPr>
-            <p:ph idx="4" sz="quarter" type="sldNum"/>
-          </p:nvPr>
-        </p:nvSpPr>
-        <p:spPr>
-          <a:xfrm>
-            <a:off x="14573177" y="8382533"/>
-            <a:ext cx="529680" cy="486833"/>
-          </a:xfrm>
-          <a:prstGeom prst="rect">
-            <a:avLst/>
-          </a:prstGeom>
-          <a:solidFill>
-            <a:schemeClr val="bg1"/>
-          </a:solidFill>
-        </p:spPr>
-        <p:txBody>
-          <a:bodyPr anchor="ctr" bIns="45720" lIns="91440" rIns="91440" rtlCol="0" tIns="45720" vert="horz"/>
-          <a:lstStyle>
-            <a:lvl1pPr algn="ctr">
-              <a:defRPr b="1" i="0" sz="1200">
-                <a:solidFill>
-                  <a:schemeClr val="tx1"/>
-                </a:solidFill>
-                <a:latin charset="0" panose="020B0604020202020204" pitchFamily="34" typeface="Arial"/>
-                <a:cs charset="0" panose="020B0604020202020204" pitchFamily="34" typeface="Arial"/>
-              </a:defRPr>
-            </a:lvl1pPr>
-          </a:lstStyle>
-          <a:p>
-            <a:fld id="{40FC62D0-A2F2-4BF8-8DAC-E86C11000EC3}" type="slidenum">
-              <a:rPr lang="en-GB" smtClean="0"/>
-              <a:pPr/>
-              <a:t>‹#›</a:t>
-            </a:fld>
-            <a:endParaRPr dirty="0" lang="en-GB"/>
-          </a:p>
-        </p:txBody>
-      </p:sp>
-    </p:spTree>
-  </p:cSld>
-</p:sld>
-</file>
-
-<file path=ppt/slides/slide51.xml><?xml version="1.0" encoding="utf-8"?>
+<file path=ppt/slides/slide53.xml><?xml version="1.0" encoding="utf-8"?>
 <p:sld xmlns:a="http://schemas.openxmlformats.org/drawingml/2006/main" xmlns:r="http://schemas.openxmlformats.org/officeDocument/2006/relationships" xmlns:p="http://schemas.openxmlformats.org/presentationml/2006/main">
   <p:cSld>
     <p:spTree>
@@ -24132,7 +25209,7 @@
             </a:pPr>
             <a:r>
               <a:rPr/>
-              <a:t>Public health approaches using survey data — </a:t>
+              <a:t>From survey data to administrative data: multi-state models — </a:t>
             </a:r>
             <a:r>
               <a:rPr i="1"/>
